--- a/PLSQL/02장/2장_반복문과커서.pptx
+++ b/PLSQL/02장/2장_반복문과커서.pptx
@@ -4,62 +4,65 @@
   <p:sldMasterIdLst>
     <p:sldMasterId id="2147483648" r:id="rId1"/>
   </p:sldMasterIdLst>
+  <p:notesMasterIdLst>
+    <p:notesMasterId r:id="rId55"/>
+  </p:notesMasterIdLst>
   <p:sldIdLst>
-    <p:sldId id="256" r:id="rId7"/>
-    <p:sldId id="257" r:id="rId9"/>
-    <p:sldId id="258" r:id="rId10"/>
-    <p:sldId id="259" r:id="rId11"/>
-    <p:sldId id="260" r:id="rId12"/>
-    <p:sldId id="261" r:id="rId13"/>
-    <p:sldId id="262" r:id="rId14"/>
-    <p:sldId id="263" r:id="rId15"/>
-    <p:sldId id="264" r:id="rId16"/>
-    <p:sldId id="265" r:id="rId17"/>
-    <p:sldId id="266" r:id="rId18"/>
-    <p:sldId id="267" r:id="rId19"/>
-    <p:sldId id="268" r:id="rId20"/>
-    <p:sldId id="269" r:id="rId21"/>
-    <p:sldId id="270" r:id="rId22"/>
-    <p:sldId id="271" r:id="rId23"/>
-    <p:sldId id="272" r:id="rId24"/>
-    <p:sldId id="273" r:id="rId25"/>
-    <p:sldId id="274" r:id="rId26"/>
-    <p:sldId id="275" r:id="rId27"/>
-    <p:sldId id="276" r:id="rId28"/>
-    <p:sldId id="277" r:id="rId29"/>
-    <p:sldId id="278" r:id="rId30"/>
-    <p:sldId id="279" r:id="rId31"/>
-    <p:sldId id="280" r:id="rId32"/>
-    <p:sldId id="281" r:id="rId33"/>
-    <p:sldId id="282" r:id="rId34"/>
-    <p:sldId id="283" r:id="rId35"/>
-    <p:sldId id="284" r:id="rId36"/>
-    <p:sldId id="285" r:id="rId37"/>
-    <p:sldId id="286" r:id="rId38"/>
-    <p:sldId id="287" r:id="rId39"/>
-    <p:sldId id="288" r:id="rId40"/>
-    <p:sldId id="289" r:id="rId41"/>
-    <p:sldId id="290" r:id="rId42"/>
-    <p:sldId id="291" r:id="rId43"/>
-    <p:sldId id="292" r:id="rId44"/>
-    <p:sldId id="293" r:id="rId45"/>
-    <p:sldId id="294" r:id="rId46"/>
-    <p:sldId id="295" r:id="rId47"/>
-    <p:sldId id="296" r:id="rId48"/>
-    <p:sldId id="297" r:id="rId49"/>
-    <p:sldId id="298" r:id="rId50"/>
-    <p:sldId id="299" r:id="rId51"/>
-    <p:sldId id="300" r:id="rId52"/>
-    <p:sldId id="301" r:id="rId53"/>
-    <p:sldId id="302" r:id="rId54"/>
-    <p:sldId id="303" r:id="rId55"/>
-    <p:sldId id="304" r:id="rId56"/>
-    <p:sldId id="305" r:id="rId57"/>
-    <p:sldId id="306" r:id="rId58"/>
-    <p:sldId id="307" r:id="rId59"/>
-    <p:sldId id="308" r:id="rId60"/>
+    <p:sldId id="256" r:id="rId2"/>
+    <p:sldId id="257" r:id="rId3"/>
+    <p:sldId id="258" r:id="rId4"/>
+    <p:sldId id="259" r:id="rId5"/>
+    <p:sldId id="260" r:id="rId6"/>
+    <p:sldId id="261" r:id="rId7"/>
+    <p:sldId id="262" r:id="rId8"/>
+    <p:sldId id="263" r:id="rId9"/>
+    <p:sldId id="264" r:id="rId10"/>
+    <p:sldId id="265" r:id="rId11"/>
+    <p:sldId id="266" r:id="rId12"/>
+    <p:sldId id="267" r:id="rId13"/>
+    <p:sldId id="268" r:id="rId14"/>
+    <p:sldId id="269" r:id="rId15"/>
+    <p:sldId id="270" r:id="rId16"/>
+    <p:sldId id="271" r:id="rId17"/>
+    <p:sldId id="272" r:id="rId18"/>
+    <p:sldId id="273" r:id="rId19"/>
+    <p:sldId id="274" r:id="rId20"/>
+    <p:sldId id="275" r:id="rId21"/>
+    <p:sldId id="276" r:id="rId22"/>
+    <p:sldId id="277" r:id="rId23"/>
+    <p:sldId id="278" r:id="rId24"/>
+    <p:sldId id="279" r:id="rId25"/>
+    <p:sldId id="280" r:id="rId26"/>
+    <p:sldId id="281" r:id="rId27"/>
+    <p:sldId id="282" r:id="rId28"/>
+    <p:sldId id="283" r:id="rId29"/>
+    <p:sldId id="284" r:id="rId30"/>
+    <p:sldId id="285" r:id="rId31"/>
+    <p:sldId id="286" r:id="rId32"/>
+    <p:sldId id="287" r:id="rId33"/>
+    <p:sldId id="288" r:id="rId34"/>
+    <p:sldId id="289" r:id="rId35"/>
+    <p:sldId id="290" r:id="rId36"/>
+    <p:sldId id="291" r:id="rId37"/>
+    <p:sldId id="292" r:id="rId38"/>
+    <p:sldId id="293" r:id="rId39"/>
+    <p:sldId id="294" r:id="rId40"/>
+    <p:sldId id="295" r:id="rId41"/>
+    <p:sldId id="296" r:id="rId42"/>
+    <p:sldId id="297" r:id="rId43"/>
+    <p:sldId id="298" r:id="rId44"/>
+    <p:sldId id="299" r:id="rId45"/>
+    <p:sldId id="300" r:id="rId46"/>
+    <p:sldId id="301" r:id="rId47"/>
+    <p:sldId id="302" r:id="rId48"/>
+    <p:sldId id="303" r:id="rId49"/>
+    <p:sldId id="304" r:id="rId50"/>
+    <p:sldId id="305" r:id="rId51"/>
+    <p:sldId id="306" r:id="rId52"/>
+    <p:sldId id="307" r:id="rId53"/>
+    <p:sldId id="308" r:id="rId54"/>
   </p:sldIdLst>
-  <p:sldSz cx="12191695" cy="6858000" type="screen4x3"/>
+  <p:sldSz cx="12192000" cy="6858000"/>
   <p:notesSz cx="6858000" cy="9144000"/>
   <p:defaultTextStyle>
     <a:defPPr>
@@ -156,11 +159,27 @@
       </a:defRPr>
     </a:lvl9pPr>
   </p:defaultTextStyle>
+  <p:extLst>
+    <p:ext uri="{EFAFB233-063F-42B5-8137-9DF3F51BA10A}">
+      <p15:sldGuideLst xmlns:p15="http://schemas.microsoft.com/office/powerpoint/2012/main">
+        <p15:guide id="1" orient="horz" pos="2160">
+          <p15:clr>
+            <a:srgbClr val="A4A3A4"/>
+          </p15:clr>
+        </p15:guide>
+        <p15:guide id="2" pos="2880">
+          <p15:clr>
+            <a:srgbClr val="A4A3A4"/>
+          </p15:clr>
+        </p15:guide>
+      </p15:sldGuideLst>
+    </p:ext>
+  </p:extLst>
 </p:presentation>
 </file>
 
 <file path=ppt/notesMasters/notesMaster1.xml><?xml version="1.0" encoding="utf-8"?>
-<p:notesMaster xmlns:a="http://schemas.openxmlformats.org/drawingml/2006/main" xmlns:p="http://schemas.openxmlformats.org/presentationml/2006/main" xmlns:r="http://schemas.openxmlformats.org/officeDocument/2006/relationships">
+<p:notesMaster xmlns:a="http://schemas.openxmlformats.org/drawingml/2006/main" xmlns:r="http://schemas.openxmlformats.org/officeDocument/2006/relationships" xmlns:p="http://schemas.openxmlformats.org/presentationml/2006/main">
   <p:cSld>
     <p:bg>
       <p:bgRef idx="1001">
@@ -181,241 +200,16 @@
           <a:chExt cx="0" cy="0"/>
         </a:xfrm>
       </p:grpSpPr>
-      <p:sp>
-        <p:nvSpPr>
-          <p:cNvPr id="2" name="Header Placeholder 1"/>
-          <p:cNvSpPr>
-            <a:spLocks noGrp="1"/>
-          </p:cNvSpPr>
-          <p:nvPr>
-            <p:ph type="hdr" sz="quarter"/>
-          </p:nvPr>
-        </p:nvSpPr>
-        <p:spPr>
-          <a:xfrm>
-            <a:off x="0" y="0"/>
-            <a:ext cx="2971800" cy="457200"/>
-          </a:xfrm>
-          <a:prstGeom prst="rect">
-            <a:avLst/>
-          </a:prstGeom>
-        </p:spPr>
-        <p:txBody>
-          <a:bodyPr vert="horz" lIns="91440" tIns="45720" rIns="91440" bIns="45720" rtlCol="0"/>
-          <a:lstStyle>
-            <a:lvl1pPr algn="l">
-              <a:defRPr sz="1200"/>
-            </a:lvl1pPr>
-          </a:lstStyle>
-          <a:p>
-            <a:endParaRPr lang="en-US"/>
-          </a:p>
-        </p:txBody>
-      </p:sp>
-      <p:sp>
-        <p:nvSpPr>
-          <p:cNvPr id="3" name="Date Placeholder 2"/>
-          <p:cNvSpPr>
-            <a:spLocks noGrp="1"/>
-          </p:cNvSpPr>
-          <p:nvPr>
-            <p:ph type="dt" idx="1"/>
-          </p:nvPr>
-        </p:nvSpPr>
-        <p:spPr>
-          <a:xfrm>
-            <a:off x="3884613" y="0"/>
-            <a:ext cx="2971800" cy="457200"/>
-          </a:xfrm>
-          <a:prstGeom prst="rect">
-            <a:avLst/>
-          </a:prstGeom>
-        </p:spPr>
-        <p:txBody>
-          <a:bodyPr vert="horz" lIns="91440" tIns="45720" rIns="91440" bIns="45720" rtlCol="0"/>
-          <a:lstStyle>
-            <a:lvl1pPr algn="r">
-              <a:defRPr sz="1200"/>
-            </a:lvl1pPr>
-          </a:lstStyle>
-          <a:p>
-            <a:fld id="{0F89C1C7-3DCD-1040-A9CF-14679D8B5DDD}" type="datetimeFigureOut">
-              <a:rPr lang="en-US" smtClean="0"/>
-              <a:t>10/17/16</a:t>
-            </a:fld>
-            <a:endParaRPr lang="en-US"/>
-          </a:p>
-        </p:txBody>
-      </p:sp>
-      <p:sp>
-        <p:nvSpPr>
-          <p:cNvPr id="4" name="Slide Image Placeholder 3"/>
-          <p:cNvSpPr>
-            <a:spLocks noGrp="1" noRot="1" noChangeAspect="1"/>
-          </p:cNvSpPr>
-          <p:nvPr>
-            <p:ph type="sldImg" idx="2"/>
-          </p:nvPr>
-        </p:nvSpPr>
-        <p:spPr>
-          <a:xfrm>
-            <a:off x="1143000" y="685800"/>
-            <a:ext cx="4572000" cy="3429000"/>
-          </a:xfrm>
-          <a:prstGeom prst="rect">
-            <a:avLst/>
-          </a:prstGeom>
-          <a:noFill/>
-          <a:ln w="12700">
-            <a:solidFill>
-              <a:prstClr val="black"/>
-            </a:solidFill>
-          </a:ln>
-        </p:spPr>
-        <p:txBody>
-          <a:bodyPr vert="horz" lIns="91440" tIns="45720" rIns="91440" bIns="45720" rtlCol="0" anchor="ctr"/>
-          <a:lstStyle/>
-          <a:p>
-            <a:endParaRPr lang="en-US"/>
-          </a:p>
-        </p:txBody>
-      </p:sp>
-      <p:sp>
-        <p:nvSpPr>
-          <p:cNvPr id="5" name="Notes Placeholder 4"/>
-          <p:cNvSpPr>
-            <a:spLocks noGrp="1"/>
-          </p:cNvSpPr>
-          <p:nvPr>
-            <p:ph type="body" sz="quarter" idx="3"/>
-          </p:nvPr>
-        </p:nvSpPr>
-        <p:spPr>
-          <a:xfrm>
-            <a:off x="685800" y="4343400"/>
-            <a:ext cx="5486400" cy="4114800"/>
-          </a:xfrm>
-          <a:prstGeom prst="rect">
-            <a:avLst/>
-          </a:prstGeom>
-        </p:spPr>
-        <p:txBody>
-          <a:bodyPr vert="horz" lIns="91440" tIns="45720" rIns="91440" bIns="45720" rtlCol="0"/>
-          <a:lstStyle/>
-          <a:p>
-            <a:pPr lvl="0"/>
-            <a:r>
-              <a:rPr lang="en-US" smtClean="0"/>
-              <a:t>Click to edit Master text styles</a:t>
-            </a:r>
-          </a:p>
-          <a:p>
-            <a:pPr lvl="1"/>
-            <a:r>
-              <a:rPr lang="en-US" smtClean="0"/>
-              <a:t>Second level</a:t>
-            </a:r>
-          </a:p>
-          <a:p>
-            <a:pPr lvl="2"/>
-            <a:r>
-              <a:rPr lang="en-US" smtClean="0"/>
-              <a:t>Third level</a:t>
-            </a:r>
-          </a:p>
-          <a:p>
-            <a:pPr lvl="3"/>
-            <a:r>
-              <a:rPr lang="en-US" smtClean="0"/>
-              <a:t>Fourth level</a:t>
-            </a:r>
-          </a:p>
-          <a:p>
-            <a:pPr lvl="4"/>
-            <a:r>
-              <a:rPr lang="en-US" smtClean="0"/>
-              <a:t>Fifth level</a:t>
-            </a:r>
-            <a:endParaRPr lang="en-US"/>
-          </a:p>
-        </p:txBody>
-      </p:sp>
-      <p:sp>
-        <p:nvSpPr>
-          <p:cNvPr id="6" name="Footer Placeholder 5"/>
-          <p:cNvSpPr>
-            <a:spLocks noGrp="1"/>
-          </p:cNvSpPr>
-          <p:nvPr>
-            <p:ph type="ftr" sz="quarter" idx="4"/>
-          </p:nvPr>
-        </p:nvSpPr>
-        <p:spPr>
-          <a:xfrm>
-            <a:off x="0" y="8685213"/>
-            <a:ext cx="2971800" cy="457200"/>
-          </a:xfrm>
-          <a:prstGeom prst="rect">
-            <a:avLst/>
-          </a:prstGeom>
-        </p:spPr>
-        <p:txBody>
-          <a:bodyPr vert="horz" lIns="91440" tIns="45720" rIns="91440" bIns="45720" rtlCol="0" anchor="b"/>
-          <a:lstStyle>
-            <a:lvl1pPr algn="l">
-              <a:defRPr sz="1200"/>
-            </a:lvl1pPr>
-          </a:lstStyle>
-          <a:p>
-            <a:endParaRPr lang="en-US"/>
-          </a:p>
-        </p:txBody>
-      </p:sp>
-      <p:sp>
-        <p:nvSpPr>
-          <p:cNvPr id="7" name="Slide Number Placeholder 6"/>
-          <p:cNvSpPr>
-            <a:spLocks noGrp="1"/>
-          </p:cNvSpPr>
-          <p:nvPr>
-            <p:ph type="sldNum" sz="quarter" idx="5"/>
-          </p:nvPr>
-        </p:nvSpPr>
-        <p:spPr>
-          <a:xfrm>
-            <a:off x="3884613" y="8685213"/>
-            <a:ext cx="2971800" cy="457200"/>
-          </a:xfrm>
-          <a:prstGeom prst="rect">
-            <a:avLst/>
-          </a:prstGeom>
-        </p:spPr>
-        <p:txBody>
-          <a:bodyPr vert="horz" lIns="91440" tIns="45720" rIns="91440" bIns="45720" rtlCol="0" anchor="b"/>
-          <a:lstStyle>
-            <a:lvl1pPr algn="r">
-              <a:defRPr sz="1200"/>
-            </a:lvl1pPr>
-          </a:lstStyle>
-          <a:p>
-            <a:fld id="{BB5E49A5-4136-284D-997B-48E1D791AD67}" type="slidenum">
-              <a:rPr lang="en-US" smtClean="0"/>
-              <a:t>‹#›</a:t>
-            </a:fld>
-            <a:endParaRPr lang="en-US"/>
-          </a:p>
-        </p:txBody>
-      </p:sp>
     </p:spTree>
     <p:extLst>
       <p:ext uri="{BB962C8B-B14F-4D97-AF65-F5344CB8AC3E}">
-        <p14:creationId xmlns:p14="http://schemas.microsoft.com/office/powerpoint/2010/main" val="2623252185"/>
+        <p14:creationId xmlns:p14="http://schemas.microsoft.com/office/powerpoint/2010/main" val="1681581684"/>
       </p:ext>
     </p:extLst>
   </p:cSld>
   <p:clrMap bg1="lt1" tx1="dk1" bg2="lt2" tx2="dk2" accent1="accent1" accent2="accent2" accent3="accent3" accent4="accent4" accent5="accent5" accent6="accent6" hlink="hlink" folHlink="folHlink"/>
   <p:notesStyle>
-    <a:lvl1pPr marL="0" algn="l" defTabSz="457200" rtl="0" eaLnBrk="1" latinLnBrk="0" hangingPunct="1">
+    <a:lvl1pPr marL="0" algn="l" defTabSz="914400" rtl="0" eaLnBrk="1" latinLnBrk="1" hangingPunct="1">
       <a:defRPr sz="1200" kern="1200">
         <a:solidFill>
           <a:schemeClr val="tx1"/>
@@ -425,7 +219,7 @@
         <a:cs typeface="+mn-cs"/>
       </a:defRPr>
     </a:lvl1pPr>
-    <a:lvl2pPr marL="457200" algn="l" defTabSz="457200" rtl="0" eaLnBrk="1" latinLnBrk="0" hangingPunct="1">
+    <a:lvl2pPr marL="457200" algn="l" defTabSz="914400" rtl="0" eaLnBrk="1" latinLnBrk="1" hangingPunct="1">
       <a:defRPr sz="1200" kern="1200">
         <a:solidFill>
           <a:schemeClr val="tx1"/>
@@ -435,7 +229,7 @@
         <a:cs typeface="+mn-cs"/>
       </a:defRPr>
     </a:lvl2pPr>
-    <a:lvl3pPr marL="914400" algn="l" defTabSz="457200" rtl="0" eaLnBrk="1" latinLnBrk="0" hangingPunct="1">
+    <a:lvl3pPr marL="914400" algn="l" defTabSz="914400" rtl="0" eaLnBrk="1" latinLnBrk="1" hangingPunct="1">
       <a:defRPr sz="1200" kern="1200">
         <a:solidFill>
           <a:schemeClr val="tx1"/>
@@ -445,7 +239,7 @@
         <a:cs typeface="+mn-cs"/>
       </a:defRPr>
     </a:lvl3pPr>
-    <a:lvl4pPr marL="1371600" algn="l" defTabSz="457200" rtl="0" eaLnBrk="1" latinLnBrk="0" hangingPunct="1">
+    <a:lvl4pPr marL="1371600" algn="l" defTabSz="914400" rtl="0" eaLnBrk="1" latinLnBrk="1" hangingPunct="1">
       <a:defRPr sz="1200" kern="1200">
         <a:solidFill>
           <a:schemeClr val="tx1"/>
@@ -455,7 +249,7 @@
         <a:cs typeface="+mn-cs"/>
       </a:defRPr>
     </a:lvl4pPr>
-    <a:lvl5pPr marL="1828800" algn="l" defTabSz="457200" rtl="0" eaLnBrk="1" latinLnBrk="0" hangingPunct="1">
+    <a:lvl5pPr marL="1828800" algn="l" defTabSz="914400" rtl="0" eaLnBrk="1" latinLnBrk="1" hangingPunct="1">
       <a:defRPr sz="1200" kern="1200">
         <a:solidFill>
           <a:schemeClr val="tx1"/>
@@ -465,7 +259,7 @@
         <a:cs typeface="+mn-cs"/>
       </a:defRPr>
     </a:lvl5pPr>
-    <a:lvl6pPr marL="2286000" algn="l" defTabSz="457200" rtl="0" eaLnBrk="1" latinLnBrk="0" hangingPunct="1">
+    <a:lvl6pPr marL="2286000" algn="l" defTabSz="914400" rtl="0" eaLnBrk="1" latinLnBrk="1" hangingPunct="1">
       <a:defRPr sz="1200" kern="1200">
         <a:solidFill>
           <a:schemeClr val="tx1"/>
@@ -475,7 +269,7 @@
         <a:cs typeface="+mn-cs"/>
       </a:defRPr>
     </a:lvl6pPr>
-    <a:lvl7pPr marL="2743200" algn="l" defTabSz="457200" rtl="0" eaLnBrk="1" latinLnBrk="0" hangingPunct="1">
+    <a:lvl7pPr marL="2743200" algn="l" defTabSz="914400" rtl="0" eaLnBrk="1" latinLnBrk="1" hangingPunct="1">
       <a:defRPr sz="1200" kern="1200">
         <a:solidFill>
           <a:schemeClr val="tx1"/>
@@ -485,7 +279,7 @@
         <a:cs typeface="+mn-cs"/>
       </a:defRPr>
     </a:lvl7pPr>
-    <a:lvl8pPr marL="3200400" algn="l" defTabSz="457200" rtl="0" eaLnBrk="1" latinLnBrk="0" hangingPunct="1">
+    <a:lvl8pPr marL="3200400" algn="l" defTabSz="914400" rtl="0" eaLnBrk="1" latinLnBrk="1" hangingPunct="1">
       <a:defRPr sz="1200" kern="1200">
         <a:solidFill>
           <a:schemeClr val="tx1"/>
@@ -495,7 +289,7 @@
         <a:cs typeface="+mn-cs"/>
       </a:defRPr>
     </a:lvl8pPr>
-    <a:lvl9pPr marL="3657600" algn="l" defTabSz="457200" rtl="0" eaLnBrk="1" latinLnBrk="0" hangingPunct="1">
+    <a:lvl9pPr marL="3657600" algn="l" defTabSz="914400" rtl="0" eaLnBrk="1" latinLnBrk="1" hangingPunct="1">
       <a:defRPr sz="1200" kern="1200">
         <a:solidFill>
           <a:schemeClr val="tx1"/>
@@ -510,7 +304,7 @@
 </file>
 
 <file path=ppt/notesSlides/notesSlide1.xml><?xml version="1.0" encoding="utf-8"?>
-<p:notes xmlns:a="http://schemas.openxmlformats.org/drawingml/2006/main" xmlns:p="http://schemas.openxmlformats.org/presentationml/2006/main" xmlns:r="http://schemas.openxmlformats.org/officeDocument/2006/relationships">
+<p:notes xmlns:a="http://schemas.openxmlformats.org/drawingml/2006/main" xmlns:r="http://schemas.openxmlformats.org/officeDocument/2006/relationships" xmlns:p="http://schemas.openxmlformats.org/presentationml/2006/main">
   <p:cSld>
     <p:spTree>
       <p:nvGrpSpPr>
@@ -530,7 +324,7 @@
         <p:nvSpPr>
           <p:cNvPr id="2" name="Slide Image Placeholder 1"/>
           <p:cNvSpPr>
-            <a:spLocks noGrp="1"/>
+            <a:spLocks noGrp="1" noRot="1" noChangeAspect="1"/>
           </p:cNvSpPr>
           <p:nvPr>
             <p:ph type="sldImg" idx="2"/>
@@ -545,7 +339,7 @@
             <a:spLocks noGrp="1"/>
           </p:cNvSpPr>
           <p:nvPr>
-            <p:ph type="body" idx="3" sz="quarter"/>
+            <p:ph type="body" sz="quarter" idx="3"/>
           </p:nvPr>
         </p:nvSpPr>
         <p:spPr/>
@@ -566,7 +360,7 @@
             <a:spLocks noGrp="1"/>
           </p:cNvSpPr>
           <p:nvPr>
-            <p:ph type="sldNum" idx="5" sz="quarter"/>
+            <p:ph type="sldNum" sz="quarter" idx="5"/>
           </p:nvPr>
         </p:nvSpPr>
         <p:spPr/>
@@ -580,7 +374,7 @@
 </file>
 
 <file path=ppt/notesSlides/notesSlide10.xml><?xml version="1.0" encoding="utf-8"?>
-<p:notes xmlns:a="http://schemas.openxmlformats.org/drawingml/2006/main" xmlns:p="http://schemas.openxmlformats.org/presentationml/2006/main" xmlns:r="http://schemas.openxmlformats.org/officeDocument/2006/relationships">
+<p:notes xmlns:a="http://schemas.openxmlformats.org/drawingml/2006/main" xmlns:r="http://schemas.openxmlformats.org/officeDocument/2006/relationships" xmlns:p="http://schemas.openxmlformats.org/presentationml/2006/main">
   <p:cSld>
     <p:spTree>
       <p:nvGrpSpPr>
@@ -600,7 +394,7 @@
         <p:nvSpPr>
           <p:cNvPr id="2" name="Slide Image Placeholder 1"/>
           <p:cNvSpPr>
-            <a:spLocks noGrp="1"/>
+            <a:spLocks noGrp="1" noRot="1" noChangeAspect="1"/>
           </p:cNvSpPr>
           <p:nvPr>
             <p:ph type="sldImg" idx="2"/>
@@ -615,7 +409,7 @@
             <a:spLocks noGrp="1"/>
           </p:cNvSpPr>
           <p:nvPr>
-            <p:ph type="body" idx="3" sz="quarter"/>
+            <p:ph type="body" sz="quarter" idx="3"/>
           </p:nvPr>
         </p:nvSpPr>
         <p:spPr/>
@@ -636,7 +430,7 @@
             <a:spLocks noGrp="1"/>
           </p:cNvSpPr>
           <p:nvPr>
-            <p:ph type="sldNum" idx="5" sz="quarter"/>
+            <p:ph type="sldNum" sz="quarter" idx="5"/>
           </p:nvPr>
         </p:nvSpPr>
         <p:spPr/>
@@ -650,7 +444,7 @@
 </file>
 
 <file path=ppt/notesSlides/notesSlide11.xml><?xml version="1.0" encoding="utf-8"?>
-<p:notes xmlns:a="http://schemas.openxmlformats.org/drawingml/2006/main" xmlns:p="http://schemas.openxmlformats.org/presentationml/2006/main" xmlns:r="http://schemas.openxmlformats.org/officeDocument/2006/relationships">
+<p:notes xmlns:a="http://schemas.openxmlformats.org/drawingml/2006/main" xmlns:r="http://schemas.openxmlformats.org/officeDocument/2006/relationships" xmlns:p="http://schemas.openxmlformats.org/presentationml/2006/main">
   <p:cSld>
     <p:spTree>
       <p:nvGrpSpPr>
@@ -670,7 +464,7 @@
         <p:nvSpPr>
           <p:cNvPr id="2" name="Slide Image Placeholder 1"/>
           <p:cNvSpPr>
-            <a:spLocks noGrp="1"/>
+            <a:spLocks noGrp="1" noRot="1" noChangeAspect="1"/>
           </p:cNvSpPr>
           <p:nvPr>
             <p:ph type="sldImg" idx="2"/>
@@ -685,7 +479,7 @@
             <a:spLocks noGrp="1"/>
           </p:cNvSpPr>
           <p:nvPr>
-            <p:ph type="body" idx="3" sz="quarter"/>
+            <p:ph type="body" sz="quarter" idx="3"/>
           </p:nvPr>
         </p:nvSpPr>
         <p:spPr/>
@@ -706,7 +500,7 @@
             <a:spLocks noGrp="1"/>
           </p:cNvSpPr>
           <p:nvPr>
-            <p:ph type="sldNum" idx="5" sz="quarter"/>
+            <p:ph type="sldNum" sz="quarter" idx="5"/>
           </p:nvPr>
         </p:nvSpPr>
         <p:spPr/>
@@ -720,7 +514,7 @@
 </file>
 
 <file path=ppt/notesSlides/notesSlide12.xml><?xml version="1.0" encoding="utf-8"?>
-<p:notes xmlns:a="http://schemas.openxmlformats.org/drawingml/2006/main" xmlns:p="http://schemas.openxmlformats.org/presentationml/2006/main" xmlns:r="http://schemas.openxmlformats.org/officeDocument/2006/relationships">
+<p:notes xmlns:a="http://schemas.openxmlformats.org/drawingml/2006/main" xmlns:r="http://schemas.openxmlformats.org/officeDocument/2006/relationships" xmlns:p="http://schemas.openxmlformats.org/presentationml/2006/main">
   <p:cSld>
     <p:spTree>
       <p:nvGrpSpPr>
@@ -740,7 +534,7 @@
         <p:nvSpPr>
           <p:cNvPr id="2" name="Slide Image Placeholder 1"/>
           <p:cNvSpPr>
-            <a:spLocks noGrp="1"/>
+            <a:spLocks noGrp="1" noRot="1" noChangeAspect="1"/>
           </p:cNvSpPr>
           <p:nvPr>
             <p:ph type="sldImg" idx="2"/>
@@ -755,7 +549,7 @@
             <a:spLocks noGrp="1"/>
           </p:cNvSpPr>
           <p:nvPr>
-            <p:ph type="body" idx="3" sz="quarter"/>
+            <p:ph type="body" sz="quarter" idx="3"/>
           </p:nvPr>
         </p:nvSpPr>
         <p:spPr/>
@@ -776,7 +570,7 @@
             <a:spLocks noGrp="1"/>
           </p:cNvSpPr>
           <p:nvPr>
-            <p:ph type="sldNum" idx="5" sz="quarter"/>
+            <p:ph type="sldNum" sz="quarter" idx="5"/>
           </p:nvPr>
         </p:nvSpPr>
         <p:spPr/>
@@ -790,7 +584,7 @@
 </file>
 
 <file path=ppt/notesSlides/notesSlide13.xml><?xml version="1.0" encoding="utf-8"?>
-<p:notes xmlns:a="http://schemas.openxmlformats.org/drawingml/2006/main" xmlns:p="http://schemas.openxmlformats.org/presentationml/2006/main" xmlns:r="http://schemas.openxmlformats.org/officeDocument/2006/relationships">
+<p:notes xmlns:a="http://schemas.openxmlformats.org/drawingml/2006/main" xmlns:r="http://schemas.openxmlformats.org/officeDocument/2006/relationships" xmlns:p="http://schemas.openxmlformats.org/presentationml/2006/main">
   <p:cSld>
     <p:spTree>
       <p:nvGrpSpPr>
@@ -810,7 +604,7 @@
         <p:nvSpPr>
           <p:cNvPr id="2" name="Slide Image Placeholder 1"/>
           <p:cNvSpPr>
-            <a:spLocks noGrp="1"/>
+            <a:spLocks noGrp="1" noRot="1" noChangeAspect="1"/>
           </p:cNvSpPr>
           <p:nvPr>
             <p:ph type="sldImg" idx="2"/>
@@ -825,7 +619,7 @@
             <a:spLocks noGrp="1"/>
           </p:cNvSpPr>
           <p:nvPr>
-            <p:ph type="body" idx="3" sz="quarter"/>
+            <p:ph type="body" sz="quarter" idx="3"/>
           </p:nvPr>
         </p:nvSpPr>
         <p:spPr/>
@@ -846,7 +640,7 @@
             <a:spLocks noGrp="1"/>
           </p:cNvSpPr>
           <p:nvPr>
-            <p:ph type="sldNum" idx="5" sz="quarter"/>
+            <p:ph type="sldNum" sz="quarter" idx="5"/>
           </p:nvPr>
         </p:nvSpPr>
         <p:spPr/>
@@ -860,7 +654,7 @@
 </file>
 
 <file path=ppt/notesSlides/notesSlide14.xml><?xml version="1.0" encoding="utf-8"?>
-<p:notes xmlns:a="http://schemas.openxmlformats.org/drawingml/2006/main" xmlns:p="http://schemas.openxmlformats.org/presentationml/2006/main" xmlns:r="http://schemas.openxmlformats.org/officeDocument/2006/relationships">
+<p:notes xmlns:a="http://schemas.openxmlformats.org/drawingml/2006/main" xmlns:r="http://schemas.openxmlformats.org/officeDocument/2006/relationships" xmlns:p="http://schemas.openxmlformats.org/presentationml/2006/main">
   <p:cSld>
     <p:spTree>
       <p:nvGrpSpPr>
@@ -880,7 +674,7 @@
         <p:nvSpPr>
           <p:cNvPr id="2" name="Slide Image Placeholder 1"/>
           <p:cNvSpPr>
-            <a:spLocks noGrp="1"/>
+            <a:spLocks noGrp="1" noRot="1" noChangeAspect="1"/>
           </p:cNvSpPr>
           <p:nvPr>
             <p:ph type="sldImg" idx="2"/>
@@ -895,7 +689,7 @@
             <a:spLocks noGrp="1"/>
           </p:cNvSpPr>
           <p:nvPr>
-            <p:ph type="body" idx="3" sz="quarter"/>
+            <p:ph type="body" sz="quarter" idx="3"/>
           </p:nvPr>
         </p:nvSpPr>
         <p:spPr/>
@@ -916,7 +710,7 @@
             <a:spLocks noGrp="1"/>
           </p:cNvSpPr>
           <p:nvPr>
-            <p:ph type="sldNum" idx="5" sz="quarter"/>
+            <p:ph type="sldNum" sz="quarter" idx="5"/>
           </p:nvPr>
         </p:nvSpPr>
         <p:spPr/>
@@ -930,7 +724,7 @@
 </file>
 
 <file path=ppt/notesSlides/notesSlide15.xml><?xml version="1.0" encoding="utf-8"?>
-<p:notes xmlns:a="http://schemas.openxmlformats.org/drawingml/2006/main" xmlns:p="http://schemas.openxmlformats.org/presentationml/2006/main" xmlns:r="http://schemas.openxmlformats.org/officeDocument/2006/relationships">
+<p:notes xmlns:a="http://schemas.openxmlformats.org/drawingml/2006/main" xmlns:r="http://schemas.openxmlformats.org/officeDocument/2006/relationships" xmlns:p="http://schemas.openxmlformats.org/presentationml/2006/main">
   <p:cSld>
     <p:spTree>
       <p:nvGrpSpPr>
@@ -950,7 +744,7 @@
         <p:nvSpPr>
           <p:cNvPr id="2" name="Slide Image Placeholder 1"/>
           <p:cNvSpPr>
-            <a:spLocks noGrp="1"/>
+            <a:spLocks noGrp="1" noRot="1" noChangeAspect="1"/>
           </p:cNvSpPr>
           <p:nvPr>
             <p:ph type="sldImg" idx="2"/>
@@ -965,7 +759,7 @@
             <a:spLocks noGrp="1"/>
           </p:cNvSpPr>
           <p:nvPr>
-            <p:ph type="body" idx="3" sz="quarter"/>
+            <p:ph type="body" sz="quarter" idx="3"/>
           </p:nvPr>
         </p:nvSpPr>
         <p:spPr/>
@@ -986,7 +780,7 @@
             <a:spLocks noGrp="1"/>
           </p:cNvSpPr>
           <p:nvPr>
-            <p:ph type="sldNum" idx="5" sz="quarter"/>
+            <p:ph type="sldNum" sz="quarter" idx="5"/>
           </p:nvPr>
         </p:nvSpPr>
         <p:spPr/>
@@ -1000,7 +794,7 @@
 </file>
 
 <file path=ppt/notesSlides/notesSlide16.xml><?xml version="1.0" encoding="utf-8"?>
-<p:notes xmlns:a="http://schemas.openxmlformats.org/drawingml/2006/main" xmlns:p="http://schemas.openxmlformats.org/presentationml/2006/main" xmlns:r="http://schemas.openxmlformats.org/officeDocument/2006/relationships">
+<p:notes xmlns:a="http://schemas.openxmlformats.org/drawingml/2006/main" xmlns:r="http://schemas.openxmlformats.org/officeDocument/2006/relationships" xmlns:p="http://schemas.openxmlformats.org/presentationml/2006/main">
   <p:cSld>
     <p:spTree>
       <p:nvGrpSpPr>
@@ -1020,7 +814,7 @@
         <p:nvSpPr>
           <p:cNvPr id="2" name="Slide Image Placeholder 1"/>
           <p:cNvSpPr>
-            <a:spLocks noGrp="1"/>
+            <a:spLocks noGrp="1" noRot="1" noChangeAspect="1"/>
           </p:cNvSpPr>
           <p:nvPr>
             <p:ph type="sldImg" idx="2"/>
@@ -1035,7 +829,7 @@
             <a:spLocks noGrp="1"/>
           </p:cNvSpPr>
           <p:nvPr>
-            <p:ph type="body" idx="3" sz="quarter"/>
+            <p:ph type="body" sz="quarter" idx="3"/>
           </p:nvPr>
         </p:nvSpPr>
         <p:spPr/>
@@ -1056,7 +850,7 @@
             <a:spLocks noGrp="1"/>
           </p:cNvSpPr>
           <p:nvPr>
-            <p:ph type="sldNum" idx="5" sz="quarter"/>
+            <p:ph type="sldNum" sz="quarter" idx="5"/>
           </p:nvPr>
         </p:nvSpPr>
         <p:spPr/>
@@ -1070,7 +864,7 @@
 </file>
 
 <file path=ppt/notesSlides/notesSlide17.xml><?xml version="1.0" encoding="utf-8"?>
-<p:notes xmlns:a="http://schemas.openxmlformats.org/drawingml/2006/main" xmlns:p="http://schemas.openxmlformats.org/presentationml/2006/main" xmlns:r="http://schemas.openxmlformats.org/officeDocument/2006/relationships">
+<p:notes xmlns:a="http://schemas.openxmlformats.org/drawingml/2006/main" xmlns:r="http://schemas.openxmlformats.org/officeDocument/2006/relationships" xmlns:p="http://schemas.openxmlformats.org/presentationml/2006/main">
   <p:cSld>
     <p:spTree>
       <p:nvGrpSpPr>
@@ -1090,7 +884,7 @@
         <p:nvSpPr>
           <p:cNvPr id="2" name="Slide Image Placeholder 1"/>
           <p:cNvSpPr>
-            <a:spLocks noGrp="1"/>
+            <a:spLocks noGrp="1" noRot="1" noChangeAspect="1"/>
           </p:cNvSpPr>
           <p:nvPr>
             <p:ph type="sldImg" idx="2"/>
@@ -1105,7 +899,7 @@
             <a:spLocks noGrp="1"/>
           </p:cNvSpPr>
           <p:nvPr>
-            <p:ph type="body" idx="3" sz="quarter"/>
+            <p:ph type="body" sz="quarter" idx="3"/>
           </p:nvPr>
         </p:nvSpPr>
         <p:spPr/>
@@ -1126,7 +920,7 @@
             <a:spLocks noGrp="1"/>
           </p:cNvSpPr>
           <p:nvPr>
-            <p:ph type="sldNum" idx="5" sz="quarter"/>
+            <p:ph type="sldNum" sz="quarter" idx="5"/>
           </p:nvPr>
         </p:nvSpPr>
         <p:spPr/>
@@ -1140,7 +934,7 @@
 </file>
 
 <file path=ppt/notesSlides/notesSlide18.xml><?xml version="1.0" encoding="utf-8"?>
-<p:notes xmlns:a="http://schemas.openxmlformats.org/drawingml/2006/main" xmlns:p="http://schemas.openxmlformats.org/presentationml/2006/main" xmlns:r="http://schemas.openxmlformats.org/officeDocument/2006/relationships">
+<p:notes xmlns:a="http://schemas.openxmlformats.org/drawingml/2006/main" xmlns:r="http://schemas.openxmlformats.org/officeDocument/2006/relationships" xmlns:p="http://schemas.openxmlformats.org/presentationml/2006/main">
   <p:cSld>
     <p:spTree>
       <p:nvGrpSpPr>
@@ -1160,7 +954,7 @@
         <p:nvSpPr>
           <p:cNvPr id="2" name="Slide Image Placeholder 1"/>
           <p:cNvSpPr>
-            <a:spLocks noGrp="1"/>
+            <a:spLocks noGrp="1" noRot="1" noChangeAspect="1"/>
           </p:cNvSpPr>
           <p:nvPr>
             <p:ph type="sldImg" idx="2"/>
@@ -1175,7 +969,7 @@
             <a:spLocks noGrp="1"/>
           </p:cNvSpPr>
           <p:nvPr>
-            <p:ph type="body" idx="3" sz="quarter"/>
+            <p:ph type="body" sz="quarter" idx="3"/>
           </p:nvPr>
         </p:nvSpPr>
         <p:spPr/>
@@ -1196,7 +990,7 @@
             <a:spLocks noGrp="1"/>
           </p:cNvSpPr>
           <p:nvPr>
-            <p:ph type="sldNum" idx="5" sz="quarter"/>
+            <p:ph type="sldNum" sz="quarter" idx="5"/>
           </p:nvPr>
         </p:nvSpPr>
         <p:spPr/>
@@ -1210,7 +1004,7 @@
 </file>
 
 <file path=ppt/notesSlides/notesSlide19.xml><?xml version="1.0" encoding="utf-8"?>
-<p:notes xmlns:a="http://schemas.openxmlformats.org/drawingml/2006/main" xmlns:p="http://schemas.openxmlformats.org/presentationml/2006/main" xmlns:r="http://schemas.openxmlformats.org/officeDocument/2006/relationships">
+<p:notes xmlns:a="http://schemas.openxmlformats.org/drawingml/2006/main" xmlns:r="http://schemas.openxmlformats.org/officeDocument/2006/relationships" xmlns:p="http://schemas.openxmlformats.org/presentationml/2006/main">
   <p:cSld>
     <p:spTree>
       <p:nvGrpSpPr>
@@ -1230,7 +1024,7 @@
         <p:nvSpPr>
           <p:cNvPr id="2" name="Slide Image Placeholder 1"/>
           <p:cNvSpPr>
-            <a:spLocks noGrp="1"/>
+            <a:spLocks noGrp="1" noRot="1" noChangeAspect="1"/>
           </p:cNvSpPr>
           <p:nvPr>
             <p:ph type="sldImg" idx="2"/>
@@ -1245,7 +1039,7 @@
             <a:spLocks noGrp="1"/>
           </p:cNvSpPr>
           <p:nvPr>
-            <p:ph type="body" idx="3" sz="quarter"/>
+            <p:ph type="body" sz="quarter" idx="3"/>
           </p:nvPr>
         </p:nvSpPr>
         <p:spPr/>
@@ -1266,7 +1060,7 @@
             <a:spLocks noGrp="1"/>
           </p:cNvSpPr>
           <p:nvPr>
-            <p:ph type="sldNum" idx="5" sz="quarter"/>
+            <p:ph type="sldNum" sz="quarter" idx="5"/>
           </p:nvPr>
         </p:nvSpPr>
         <p:spPr/>
@@ -1280,7 +1074,7 @@
 </file>
 
 <file path=ppt/notesSlides/notesSlide2.xml><?xml version="1.0" encoding="utf-8"?>
-<p:notes xmlns:a="http://schemas.openxmlformats.org/drawingml/2006/main" xmlns:p="http://schemas.openxmlformats.org/presentationml/2006/main" xmlns:r="http://schemas.openxmlformats.org/officeDocument/2006/relationships">
+<p:notes xmlns:a="http://schemas.openxmlformats.org/drawingml/2006/main" xmlns:r="http://schemas.openxmlformats.org/officeDocument/2006/relationships" xmlns:p="http://schemas.openxmlformats.org/presentationml/2006/main">
   <p:cSld>
     <p:spTree>
       <p:nvGrpSpPr>
@@ -1300,7 +1094,7 @@
         <p:nvSpPr>
           <p:cNvPr id="2" name="Slide Image Placeholder 1"/>
           <p:cNvSpPr>
-            <a:spLocks noGrp="1"/>
+            <a:spLocks noGrp="1" noRot="1" noChangeAspect="1"/>
           </p:cNvSpPr>
           <p:nvPr>
             <p:ph type="sldImg" idx="2"/>
@@ -1315,7 +1109,7 @@
             <a:spLocks noGrp="1"/>
           </p:cNvSpPr>
           <p:nvPr>
-            <p:ph type="body" idx="3" sz="quarter"/>
+            <p:ph type="body" sz="quarter" idx="3"/>
           </p:nvPr>
         </p:nvSpPr>
         <p:spPr/>
@@ -1336,7 +1130,7 @@
             <a:spLocks noGrp="1"/>
           </p:cNvSpPr>
           <p:nvPr>
-            <p:ph type="sldNum" idx="5" sz="quarter"/>
+            <p:ph type="sldNum" sz="quarter" idx="5"/>
           </p:nvPr>
         </p:nvSpPr>
         <p:spPr/>
@@ -1350,7 +1144,7 @@
 </file>
 
 <file path=ppt/notesSlides/notesSlide20.xml><?xml version="1.0" encoding="utf-8"?>
-<p:notes xmlns:a="http://schemas.openxmlformats.org/drawingml/2006/main" xmlns:p="http://schemas.openxmlformats.org/presentationml/2006/main" xmlns:r="http://schemas.openxmlformats.org/officeDocument/2006/relationships">
+<p:notes xmlns:a="http://schemas.openxmlformats.org/drawingml/2006/main" xmlns:r="http://schemas.openxmlformats.org/officeDocument/2006/relationships" xmlns:p="http://schemas.openxmlformats.org/presentationml/2006/main">
   <p:cSld>
     <p:spTree>
       <p:nvGrpSpPr>
@@ -1370,7 +1164,7 @@
         <p:nvSpPr>
           <p:cNvPr id="2" name="Slide Image Placeholder 1"/>
           <p:cNvSpPr>
-            <a:spLocks noGrp="1"/>
+            <a:spLocks noGrp="1" noRot="1" noChangeAspect="1"/>
           </p:cNvSpPr>
           <p:nvPr>
             <p:ph type="sldImg" idx="2"/>
@@ -1385,7 +1179,7 @@
             <a:spLocks noGrp="1"/>
           </p:cNvSpPr>
           <p:nvPr>
-            <p:ph type="body" idx="3" sz="quarter"/>
+            <p:ph type="body" sz="quarter" idx="3"/>
           </p:nvPr>
         </p:nvSpPr>
         <p:spPr/>
@@ -1406,7 +1200,7 @@
             <a:spLocks noGrp="1"/>
           </p:cNvSpPr>
           <p:nvPr>
-            <p:ph type="sldNum" idx="5" sz="quarter"/>
+            <p:ph type="sldNum" sz="quarter" idx="5"/>
           </p:nvPr>
         </p:nvSpPr>
         <p:spPr/>
@@ -1420,7 +1214,7 @@
 </file>
 
 <file path=ppt/notesSlides/notesSlide21.xml><?xml version="1.0" encoding="utf-8"?>
-<p:notes xmlns:a="http://schemas.openxmlformats.org/drawingml/2006/main" xmlns:p="http://schemas.openxmlformats.org/presentationml/2006/main" xmlns:r="http://schemas.openxmlformats.org/officeDocument/2006/relationships">
+<p:notes xmlns:a="http://schemas.openxmlformats.org/drawingml/2006/main" xmlns:r="http://schemas.openxmlformats.org/officeDocument/2006/relationships" xmlns:p="http://schemas.openxmlformats.org/presentationml/2006/main">
   <p:cSld>
     <p:spTree>
       <p:nvGrpSpPr>
@@ -1440,7 +1234,7 @@
         <p:nvSpPr>
           <p:cNvPr id="2" name="Slide Image Placeholder 1"/>
           <p:cNvSpPr>
-            <a:spLocks noGrp="1"/>
+            <a:spLocks noGrp="1" noRot="1" noChangeAspect="1"/>
           </p:cNvSpPr>
           <p:nvPr>
             <p:ph type="sldImg" idx="2"/>
@@ -1455,7 +1249,7 @@
             <a:spLocks noGrp="1"/>
           </p:cNvSpPr>
           <p:nvPr>
-            <p:ph type="body" idx="3" sz="quarter"/>
+            <p:ph type="body" sz="quarter" idx="3"/>
           </p:nvPr>
         </p:nvSpPr>
         <p:spPr/>
@@ -1476,7 +1270,7 @@
             <a:spLocks noGrp="1"/>
           </p:cNvSpPr>
           <p:nvPr>
-            <p:ph type="sldNum" idx="5" sz="quarter"/>
+            <p:ph type="sldNum" sz="quarter" idx="5"/>
           </p:nvPr>
         </p:nvSpPr>
         <p:spPr/>
@@ -1490,7 +1284,7 @@
 </file>
 
 <file path=ppt/notesSlides/notesSlide22.xml><?xml version="1.0" encoding="utf-8"?>
-<p:notes xmlns:a="http://schemas.openxmlformats.org/drawingml/2006/main" xmlns:p="http://schemas.openxmlformats.org/presentationml/2006/main" xmlns:r="http://schemas.openxmlformats.org/officeDocument/2006/relationships">
+<p:notes xmlns:a="http://schemas.openxmlformats.org/drawingml/2006/main" xmlns:r="http://schemas.openxmlformats.org/officeDocument/2006/relationships" xmlns:p="http://schemas.openxmlformats.org/presentationml/2006/main">
   <p:cSld>
     <p:spTree>
       <p:nvGrpSpPr>
@@ -1510,7 +1304,7 @@
         <p:nvSpPr>
           <p:cNvPr id="2" name="Slide Image Placeholder 1"/>
           <p:cNvSpPr>
-            <a:spLocks noGrp="1"/>
+            <a:spLocks noGrp="1" noRot="1" noChangeAspect="1"/>
           </p:cNvSpPr>
           <p:nvPr>
             <p:ph type="sldImg" idx="2"/>
@@ -1525,7 +1319,7 @@
             <a:spLocks noGrp="1"/>
           </p:cNvSpPr>
           <p:nvPr>
-            <p:ph type="body" idx="3" sz="quarter"/>
+            <p:ph type="body" sz="quarter" idx="3"/>
           </p:nvPr>
         </p:nvSpPr>
         <p:spPr/>
@@ -1546,7 +1340,7 @@
             <a:spLocks noGrp="1"/>
           </p:cNvSpPr>
           <p:nvPr>
-            <p:ph type="sldNum" idx="5" sz="quarter"/>
+            <p:ph type="sldNum" sz="quarter" idx="5"/>
           </p:nvPr>
         </p:nvSpPr>
         <p:spPr/>
@@ -1560,7 +1354,7 @@
 </file>
 
 <file path=ppt/notesSlides/notesSlide23.xml><?xml version="1.0" encoding="utf-8"?>
-<p:notes xmlns:a="http://schemas.openxmlformats.org/drawingml/2006/main" xmlns:p="http://schemas.openxmlformats.org/presentationml/2006/main" xmlns:r="http://schemas.openxmlformats.org/officeDocument/2006/relationships">
+<p:notes xmlns:a="http://schemas.openxmlformats.org/drawingml/2006/main" xmlns:r="http://schemas.openxmlformats.org/officeDocument/2006/relationships" xmlns:p="http://schemas.openxmlformats.org/presentationml/2006/main">
   <p:cSld>
     <p:spTree>
       <p:nvGrpSpPr>
@@ -1580,7 +1374,7 @@
         <p:nvSpPr>
           <p:cNvPr id="2" name="Slide Image Placeholder 1"/>
           <p:cNvSpPr>
-            <a:spLocks noGrp="1"/>
+            <a:spLocks noGrp="1" noRot="1" noChangeAspect="1"/>
           </p:cNvSpPr>
           <p:nvPr>
             <p:ph type="sldImg" idx="2"/>
@@ -1595,7 +1389,7 @@
             <a:spLocks noGrp="1"/>
           </p:cNvSpPr>
           <p:nvPr>
-            <p:ph type="body" idx="3" sz="quarter"/>
+            <p:ph type="body" sz="quarter" idx="3"/>
           </p:nvPr>
         </p:nvSpPr>
         <p:spPr/>
@@ -1616,7 +1410,7 @@
             <a:spLocks noGrp="1"/>
           </p:cNvSpPr>
           <p:nvPr>
-            <p:ph type="sldNum" idx="5" sz="quarter"/>
+            <p:ph type="sldNum" sz="quarter" idx="5"/>
           </p:nvPr>
         </p:nvSpPr>
         <p:spPr/>
@@ -1630,7 +1424,7 @@
 </file>
 
 <file path=ppt/notesSlides/notesSlide24.xml><?xml version="1.0" encoding="utf-8"?>
-<p:notes xmlns:a="http://schemas.openxmlformats.org/drawingml/2006/main" xmlns:p="http://schemas.openxmlformats.org/presentationml/2006/main" xmlns:r="http://schemas.openxmlformats.org/officeDocument/2006/relationships">
+<p:notes xmlns:a="http://schemas.openxmlformats.org/drawingml/2006/main" xmlns:r="http://schemas.openxmlformats.org/officeDocument/2006/relationships" xmlns:p="http://schemas.openxmlformats.org/presentationml/2006/main">
   <p:cSld>
     <p:spTree>
       <p:nvGrpSpPr>
@@ -1650,7 +1444,7 @@
         <p:nvSpPr>
           <p:cNvPr id="2" name="Slide Image Placeholder 1"/>
           <p:cNvSpPr>
-            <a:spLocks noGrp="1"/>
+            <a:spLocks noGrp="1" noRot="1" noChangeAspect="1"/>
           </p:cNvSpPr>
           <p:nvPr>
             <p:ph type="sldImg" idx="2"/>
@@ -1665,7 +1459,7 @@
             <a:spLocks noGrp="1"/>
           </p:cNvSpPr>
           <p:nvPr>
-            <p:ph type="body" idx="3" sz="quarter"/>
+            <p:ph type="body" sz="quarter" idx="3"/>
           </p:nvPr>
         </p:nvSpPr>
         <p:spPr/>
@@ -1686,7 +1480,7 @@
             <a:spLocks noGrp="1"/>
           </p:cNvSpPr>
           <p:nvPr>
-            <p:ph type="sldNum" idx="5" sz="quarter"/>
+            <p:ph type="sldNum" sz="quarter" idx="5"/>
           </p:nvPr>
         </p:nvSpPr>
         <p:spPr/>
@@ -1700,7 +1494,7 @@
 </file>
 
 <file path=ppt/notesSlides/notesSlide25.xml><?xml version="1.0" encoding="utf-8"?>
-<p:notes xmlns:a="http://schemas.openxmlformats.org/drawingml/2006/main" xmlns:p="http://schemas.openxmlformats.org/presentationml/2006/main" xmlns:r="http://schemas.openxmlformats.org/officeDocument/2006/relationships">
+<p:notes xmlns:a="http://schemas.openxmlformats.org/drawingml/2006/main" xmlns:r="http://schemas.openxmlformats.org/officeDocument/2006/relationships" xmlns:p="http://schemas.openxmlformats.org/presentationml/2006/main">
   <p:cSld>
     <p:spTree>
       <p:nvGrpSpPr>
@@ -1720,7 +1514,7 @@
         <p:nvSpPr>
           <p:cNvPr id="2" name="Slide Image Placeholder 1"/>
           <p:cNvSpPr>
-            <a:spLocks noGrp="1"/>
+            <a:spLocks noGrp="1" noRot="1" noChangeAspect="1"/>
           </p:cNvSpPr>
           <p:nvPr>
             <p:ph type="sldImg" idx="2"/>
@@ -1735,7 +1529,7 @@
             <a:spLocks noGrp="1"/>
           </p:cNvSpPr>
           <p:nvPr>
-            <p:ph type="body" idx="3" sz="quarter"/>
+            <p:ph type="body" sz="quarter" idx="3"/>
           </p:nvPr>
         </p:nvSpPr>
         <p:spPr/>
@@ -1756,7 +1550,7 @@
             <a:spLocks noGrp="1"/>
           </p:cNvSpPr>
           <p:nvPr>
-            <p:ph type="sldNum" idx="5" sz="quarter"/>
+            <p:ph type="sldNum" sz="quarter" idx="5"/>
           </p:nvPr>
         </p:nvSpPr>
         <p:spPr/>
@@ -1770,7 +1564,7 @@
 </file>
 
 <file path=ppt/notesSlides/notesSlide26.xml><?xml version="1.0" encoding="utf-8"?>
-<p:notes xmlns:a="http://schemas.openxmlformats.org/drawingml/2006/main" xmlns:p="http://schemas.openxmlformats.org/presentationml/2006/main" xmlns:r="http://schemas.openxmlformats.org/officeDocument/2006/relationships">
+<p:notes xmlns:a="http://schemas.openxmlformats.org/drawingml/2006/main" xmlns:r="http://schemas.openxmlformats.org/officeDocument/2006/relationships" xmlns:p="http://schemas.openxmlformats.org/presentationml/2006/main">
   <p:cSld>
     <p:spTree>
       <p:nvGrpSpPr>
@@ -1790,7 +1584,7 @@
         <p:nvSpPr>
           <p:cNvPr id="2" name="Slide Image Placeholder 1"/>
           <p:cNvSpPr>
-            <a:spLocks noGrp="1"/>
+            <a:spLocks noGrp="1" noRot="1" noChangeAspect="1"/>
           </p:cNvSpPr>
           <p:nvPr>
             <p:ph type="sldImg" idx="2"/>
@@ -1805,7 +1599,7 @@
             <a:spLocks noGrp="1"/>
           </p:cNvSpPr>
           <p:nvPr>
-            <p:ph type="body" idx="3" sz="quarter"/>
+            <p:ph type="body" sz="quarter" idx="3"/>
           </p:nvPr>
         </p:nvSpPr>
         <p:spPr/>
@@ -1826,7 +1620,7 @@
             <a:spLocks noGrp="1"/>
           </p:cNvSpPr>
           <p:nvPr>
-            <p:ph type="sldNum" idx="5" sz="quarter"/>
+            <p:ph type="sldNum" sz="quarter" idx="5"/>
           </p:nvPr>
         </p:nvSpPr>
         <p:spPr/>
@@ -1840,7 +1634,7 @@
 </file>
 
 <file path=ppt/notesSlides/notesSlide27.xml><?xml version="1.0" encoding="utf-8"?>
-<p:notes xmlns:a="http://schemas.openxmlformats.org/drawingml/2006/main" xmlns:p="http://schemas.openxmlformats.org/presentationml/2006/main" xmlns:r="http://schemas.openxmlformats.org/officeDocument/2006/relationships">
+<p:notes xmlns:a="http://schemas.openxmlformats.org/drawingml/2006/main" xmlns:r="http://schemas.openxmlformats.org/officeDocument/2006/relationships" xmlns:p="http://schemas.openxmlformats.org/presentationml/2006/main">
   <p:cSld>
     <p:spTree>
       <p:nvGrpSpPr>
@@ -1860,7 +1654,7 @@
         <p:nvSpPr>
           <p:cNvPr id="2" name="Slide Image Placeholder 1"/>
           <p:cNvSpPr>
-            <a:spLocks noGrp="1"/>
+            <a:spLocks noGrp="1" noRot="1" noChangeAspect="1"/>
           </p:cNvSpPr>
           <p:nvPr>
             <p:ph type="sldImg" idx="2"/>
@@ -1875,7 +1669,7 @@
             <a:spLocks noGrp="1"/>
           </p:cNvSpPr>
           <p:nvPr>
-            <p:ph type="body" idx="3" sz="quarter"/>
+            <p:ph type="body" sz="quarter" idx="3"/>
           </p:nvPr>
         </p:nvSpPr>
         <p:spPr/>
@@ -1896,7 +1690,7 @@
             <a:spLocks noGrp="1"/>
           </p:cNvSpPr>
           <p:nvPr>
-            <p:ph type="sldNum" idx="5" sz="quarter"/>
+            <p:ph type="sldNum" sz="quarter" idx="5"/>
           </p:nvPr>
         </p:nvSpPr>
         <p:spPr/>
@@ -1910,7 +1704,7 @@
 </file>
 
 <file path=ppt/notesSlides/notesSlide28.xml><?xml version="1.0" encoding="utf-8"?>
-<p:notes xmlns:a="http://schemas.openxmlformats.org/drawingml/2006/main" xmlns:p="http://schemas.openxmlformats.org/presentationml/2006/main" xmlns:r="http://schemas.openxmlformats.org/officeDocument/2006/relationships">
+<p:notes xmlns:a="http://schemas.openxmlformats.org/drawingml/2006/main" xmlns:r="http://schemas.openxmlformats.org/officeDocument/2006/relationships" xmlns:p="http://schemas.openxmlformats.org/presentationml/2006/main">
   <p:cSld>
     <p:spTree>
       <p:nvGrpSpPr>
@@ -1930,7 +1724,7 @@
         <p:nvSpPr>
           <p:cNvPr id="2" name="Slide Image Placeholder 1"/>
           <p:cNvSpPr>
-            <a:spLocks noGrp="1"/>
+            <a:spLocks noGrp="1" noRot="1" noChangeAspect="1"/>
           </p:cNvSpPr>
           <p:nvPr>
             <p:ph type="sldImg" idx="2"/>
@@ -1945,7 +1739,7 @@
             <a:spLocks noGrp="1"/>
           </p:cNvSpPr>
           <p:nvPr>
-            <p:ph type="body" idx="3" sz="quarter"/>
+            <p:ph type="body" sz="quarter" idx="3"/>
           </p:nvPr>
         </p:nvSpPr>
         <p:spPr/>
@@ -1966,7 +1760,7 @@
             <a:spLocks noGrp="1"/>
           </p:cNvSpPr>
           <p:nvPr>
-            <p:ph type="sldNum" idx="5" sz="quarter"/>
+            <p:ph type="sldNum" sz="quarter" idx="5"/>
           </p:nvPr>
         </p:nvSpPr>
         <p:spPr/>
@@ -1980,7 +1774,7 @@
 </file>
 
 <file path=ppt/notesSlides/notesSlide29.xml><?xml version="1.0" encoding="utf-8"?>
-<p:notes xmlns:a="http://schemas.openxmlformats.org/drawingml/2006/main" xmlns:p="http://schemas.openxmlformats.org/presentationml/2006/main" xmlns:r="http://schemas.openxmlformats.org/officeDocument/2006/relationships">
+<p:notes xmlns:a="http://schemas.openxmlformats.org/drawingml/2006/main" xmlns:r="http://schemas.openxmlformats.org/officeDocument/2006/relationships" xmlns:p="http://schemas.openxmlformats.org/presentationml/2006/main">
   <p:cSld>
     <p:spTree>
       <p:nvGrpSpPr>
@@ -2000,7 +1794,7 @@
         <p:nvSpPr>
           <p:cNvPr id="2" name="Slide Image Placeholder 1"/>
           <p:cNvSpPr>
-            <a:spLocks noGrp="1"/>
+            <a:spLocks noGrp="1" noRot="1" noChangeAspect="1"/>
           </p:cNvSpPr>
           <p:nvPr>
             <p:ph type="sldImg" idx="2"/>
@@ -2015,7 +1809,7 @@
             <a:spLocks noGrp="1"/>
           </p:cNvSpPr>
           <p:nvPr>
-            <p:ph type="body" idx="3" sz="quarter"/>
+            <p:ph type="body" sz="quarter" idx="3"/>
           </p:nvPr>
         </p:nvSpPr>
         <p:spPr/>
@@ -2036,7 +1830,7 @@
             <a:spLocks noGrp="1"/>
           </p:cNvSpPr>
           <p:nvPr>
-            <p:ph type="sldNum" idx="5" sz="quarter"/>
+            <p:ph type="sldNum" sz="quarter" idx="5"/>
           </p:nvPr>
         </p:nvSpPr>
         <p:spPr/>
@@ -2050,7 +1844,7 @@
 </file>
 
 <file path=ppt/notesSlides/notesSlide3.xml><?xml version="1.0" encoding="utf-8"?>
-<p:notes xmlns:a="http://schemas.openxmlformats.org/drawingml/2006/main" xmlns:p="http://schemas.openxmlformats.org/presentationml/2006/main" xmlns:r="http://schemas.openxmlformats.org/officeDocument/2006/relationships">
+<p:notes xmlns:a="http://schemas.openxmlformats.org/drawingml/2006/main" xmlns:r="http://schemas.openxmlformats.org/officeDocument/2006/relationships" xmlns:p="http://schemas.openxmlformats.org/presentationml/2006/main">
   <p:cSld>
     <p:spTree>
       <p:nvGrpSpPr>
@@ -2070,7 +1864,7 @@
         <p:nvSpPr>
           <p:cNvPr id="2" name="Slide Image Placeholder 1"/>
           <p:cNvSpPr>
-            <a:spLocks noGrp="1"/>
+            <a:spLocks noGrp="1" noRot="1" noChangeAspect="1"/>
           </p:cNvSpPr>
           <p:nvPr>
             <p:ph type="sldImg" idx="2"/>
@@ -2085,7 +1879,7 @@
             <a:spLocks noGrp="1"/>
           </p:cNvSpPr>
           <p:nvPr>
-            <p:ph type="body" idx="3" sz="quarter"/>
+            <p:ph type="body" sz="quarter" idx="3"/>
           </p:nvPr>
         </p:nvSpPr>
         <p:spPr/>
@@ -2106,7 +1900,7 @@
             <a:spLocks noGrp="1"/>
           </p:cNvSpPr>
           <p:nvPr>
-            <p:ph type="sldNum" idx="5" sz="quarter"/>
+            <p:ph type="sldNum" sz="quarter" idx="5"/>
           </p:nvPr>
         </p:nvSpPr>
         <p:spPr/>
@@ -2120,7 +1914,7 @@
 </file>
 
 <file path=ppt/notesSlides/notesSlide30.xml><?xml version="1.0" encoding="utf-8"?>
-<p:notes xmlns:a="http://schemas.openxmlformats.org/drawingml/2006/main" xmlns:p="http://schemas.openxmlformats.org/presentationml/2006/main" xmlns:r="http://schemas.openxmlformats.org/officeDocument/2006/relationships">
+<p:notes xmlns:a="http://schemas.openxmlformats.org/drawingml/2006/main" xmlns:r="http://schemas.openxmlformats.org/officeDocument/2006/relationships" xmlns:p="http://schemas.openxmlformats.org/presentationml/2006/main">
   <p:cSld>
     <p:spTree>
       <p:nvGrpSpPr>
@@ -2140,7 +1934,7 @@
         <p:nvSpPr>
           <p:cNvPr id="2" name="Slide Image Placeholder 1"/>
           <p:cNvSpPr>
-            <a:spLocks noGrp="1"/>
+            <a:spLocks noGrp="1" noRot="1" noChangeAspect="1"/>
           </p:cNvSpPr>
           <p:nvPr>
             <p:ph type="sldImg" idx="2"/>
@@ -2155,7 +1949,7 @@
             <a:spLocks noGrp="1"/>
           </p:cNvSpPr>
           <p:nvPr>
-            <p:ph type="body" idx="3" sz="quarter"/>
+            <p:ph type="body" sz="quarter" idx="3"/>
           </p:nvPr>
         </p:nvSpPr>
         <p:spPr/>
@@ -2176,7 +1970,7 @@
             <a:spLocks noGrp="1"/>
           </p:cNvSpPr>
           <p:nvPr>
-            <p:ph type="sldNum" idx="5" sz="quarter"/>
+            <p:ph type="sldNum" sz="quarter" idx="5"/>
           </p:nvPr>
         </p:nvSpPr>
         <p:spPr/>
@@ -2190,7 +1984,7 @@
 </file>
 
 <file path=ppt/notesSlides/notesSlide31.xml><?xml version="1.0" encoding="utf-8"?>
-<p:notes xmlns:a="http://schemas.openxmlformats.org/drawingml/2006/main" xmlns:p="http://schemas.openxmlformats.org/presentationml/2006/main" xmlns:r="http://schemas.openxmlformats.org/officeDocument/2006/relationships">
+<p:notes xmlns:a="http://schemas.openxmlformats.org/drawingml/2006/main" xmlns:r="http://schemas.openxmlformats.org/officeDocument/2006/relationships" xmlns:p="http://schemas.openxmlformats.org/presentationml/2006/main">
   <p:cSld>
     <p:spTree>
       <p:nvGrpSpPr>
@@ -2210,7 +2004,7 @@
         <p:nvSpPr>
           <p:cNvPr id="2" name="Slide Image Placeholder 1"/>
           <p:cNvSpPr>
-            <a:spLocks noGrp="1"/>
+            <a:spLocks noGrp="1" noRot="1" noChangeAspect="1"/>
           </p:cNvSpPr>
           <p:nvPr>
             <p:ph type="sldImg" idx="2"/>
@@ -2225,7 +2019,7 @@
             <a:spLocks noGrp="1"/>
           </p:cNvSpPr>
           <p:nvPr>
-            <p:ph type="body" idx="3" sz="quarter"/>
+            <p:ph type="body" sz="quarter" idx="3"/>
           </p:nvPr>
         </p:nvSpPr>
         <p:spPr/>
@@ -2246,7 +2040,7 @@
             <a:spLocks noGrp="1"/>
           </p:cNvSpPr>
           <p:nvPr>
-            <p:ph type="sldNum" idx="5" sz="quarter"/>
+            <p:ph type="sldNum" sz="quarter" idx="5"/>
           </p:nvPr>
         </p:nvSpPr>
         <p:spPr/>
@@ -2260,7 +2054,7 @@
 </file>
 
 <file path=ppt/notesSlides/notesSlide32.xml><?xml version="1.0" encoding="utf-8"?>
-<p:notes xmlns:a="http://schemas.openxmlformats.org/drawingml/2006/main" xmlns:p="http://schemas.openxmlformats.org/presentationml/2006/main" xmlns:r="http://schemas.openxmlformats.org/officeDocument/2006/relationships">
+<p:notes xmlns:a="http://schemas.openxmlformats.org/drawingml/2006/main" xmlns:r="http://schemas.openxmlformats.org/officeDocument/2006/relationships" xmlns:p="http://schemas.openxmlformats.org/presentationml/2006/main">
   <p:cSld>
     <p:spTree>
       <p:nvGrpSpPr>
@@ -2280,7 +2074,7 @@
         <p:nvSpPr>
           <p:cNvPr id="2" name="Slide Image Placeholder 1"/>
           <p:cNvSpPr>
-            <a:spLocks noGrp="1"/>
+            <a:spLocks noGrp="1" noRot="1" noChangeAspect="1"/>
           </p:cNvSpPr>
           <p:nvPr>
             <p:ph type="sldImg" idx="2"/>
@@ -2295,7 +2089,7 @@
             <a:spLocks noGrp="1"/>
           </p:cNvSpPr>
           <p:nvPr>
-            <p:ph type="body" idx="3" sz="quarter"/>
+            <p:ph type="body" sz="quarter" idx="3"/>
           </p:nvPr>
         </p:nvSpPr>
         <p:spPr/>
@@ -2316,7 +2110,7 @@
             <a:spLocks noGrp="1"/>
           </p:cNvSpPr>
           <p:nvPr>
-            <p:ph type="sldNum" idx="5" sz="quarter"/>
+            <p:ph type="sldNum" sz="quarter" idx="5"/>
           </p:nvPr>
         </p:nvSpPr>
         <p:spPr/>
@@ -2330,7 +2124,7 @@
 </file>
 
 <file path=ppt/notesSlides/notesSlide33.xml><?xml version="1.0" encoding="utf-8"?>
-<p:notes xmlns:a="http://schemas.openxmlformats.org/drawingml/2006/main" xmlns:p="http://schemas.openxmlformats.org/presentationml/2006/main" xmlns:r="http://schemas.openxmlformats.org/officeDocument/2006/relationships">
+<p:notes xmlns:a="http://schemas.openxmlformats.org/drawingml/2006/main" xmlns:r="http://schemas.openxmlformats.org/officeDocument/2006/relationships" xmlns:p="http://schemas.openxmlformats.org/presentationml/2006/main">
   <p:cSld>
     <p:spTree>
       <p:nvGrpSpPr>
@@ -2350,7 +2144,7 @@
         <p:nvSpPr>
           <p:cNvPr id="2" name="Slide Image Placeholder 1"/>
           <p:cNvSpPr>
-            <a:spLocks noGrp="1"/>
+            <a:spLocks noGrp="1" noRot="1" noChangeAspect="1"/>
           </p:cNvSpPr>
           <p:nvPr>
             <p:ph type="sldImg" idx="2"/>
@@ -2365,7 +2159,7 @@
             <a:spLocks noGrp="1"/>
           </p:cNvSpPr>
           <p:nvPr>
-            <p:ph type="body" idx="3" sz="quarter"/>
+            <p:ph type="body" sz="quarter" idx="3"/>
           </p:nvPr>
         </p:nvSpPr>
         <p:spPr/>
@@ -2386,7 +2180,7 @@
             <a:spLocks noGrp="1"/>
           </p:cNvSpPr>
           <p:nvPr>
-            <p:ph type="sldNum" idx="5" sz="quarter"/>
+            <p:ph type="sldNum" sz="quarter" idx="5"/>
           </p:nvPr>
         </p:nvSpPr>
         <p:spPr/>
@@ -2400,7 +2194,7 @@
 </file>
 
 <file path=ppt/notesSlides/notesSlide34.xml><?xml version="1.0" encoding="utf-8"?>
-<p:notes xmlns:a="http://schemas.openxmlformats.org/drawingml/2006/main" xmlns:p="http://schemas.openxmlformats.org/presentationml/2006/main" xmlns:r="http://schemas.openxmlformats.org/officeDocument/2006/relationships">
+<p:notes xmlns:a="http://schemas.openxmlformats.org/drawingml/2006/main" xmlns:r="http://schemas.openxmlformats.org/officeDocument/2006/relationships" xmlns:p="http://schemas.openxmlformats.org/presentationml/2006/main">
   <p:cSld>
     <p:spTree>
       <p:nvGrpSpPr>
@@ -2420,7 +2214,7 @@
         <p:nvSpPr>
           <p:cNvPr id="2" name="Slide Image Placeholder 1"/>
           <p:cNvSpPr>
-            <a:spLocks noGrp="1"/>
+            <a:spLocks noGrp="1" noRot="1" noChangeAspect="1"/>
           </p:cNvSpPr>
           <p:nvPr>
             <p:ph type="sldImg" idx="2"/>
@@ -2435,7 +2229,7 @@
             <a:spLocks noGrp="1"/>
           </p:cNvSpPr>
           <p:nvPr>
-            <p:ph type="body" idx="3" sz="quarter"/>
+            <p:ph type="body" sz="quarter" idx="3"/>
           </p:nvPr>
         </p:nvSpPr>
         <p:spPr/>
@@ -2456,7 +2250,7 @@
             <a:spLocks noGrp="1"/>
           </p:cNvSpPr>
           <p:nvPr>
-            <p:ph type="sldNum" idx="5" sz="quarter"/>
+            <p:ph type="sldNum" sz="quarter" idx="5"/>
           </p:nvPr>
         </p:nvSpPr>
         <p:spPr/>
@@ -2470,7 +2264,7 @@
 </file>
 
 <file path=ppt/notesSlides/notesSlide35.xml><?xml version="1.0" encoding="utf-8"?>
-<p:notes xmlns:a="http://schemas.openxmlformats.org/drawingml/2006/main" xmlns:p="http://schemas.openxmlformats.org/presentationml/2006/main" xmlns:r="http://schemas.openxmlformats.org/officeDocument/2006/relationships">
+<p:notes xmlns:a="http://schemas.openxmlformats.org/drawingml/2006/main" xmlns:r="http://schemas.openxmlformats.org/officeDocument/2006/relationships" xmlns:p="http://schemas.openxmlformats.org/presentationml/2006/main">
   <p:cSld>
     <p:spTree>
       <p:nvGrpSpPr>
@@ -2490,7 +2284,7 @@
         <p:nvSpPr>
           <p:cNvPr id="2" name="Slide Image Placeholder 1"/>
           <p:cNvSpPr>
-            <a:spLocks noGrp="1"/>
+            <a:spLocks noGrp="1" noRot="1" noChangeAspect="1"/>
           </p:cNvSpPr>
           <p:nvPr>
             <p:ph type="sldImg" idx="2"/>
@@ -2505,7 +2299,7 @@
             <a:spLocks noGrp="1"/>
           </p:cNvSpPr>
           <p:nvPr>
-            <p:ph type="body" idx="3" sz="quarter"/>
+            <p:ph type="body" sz="quarter" idx="3"/>
           </p:nvPr>
         </p:nvSpPr>
         <p:spPr/>
@@ -2526,7 +2320,7 @@
             <a:spLocks noGrp="1"/>
           </p:cNvSpPr>
           <p:nvPr>
-            <p:ph type="sldNum" idx="5" sz="quarter"/>
+            <p:ph type="sldNum" sz="quarter" idx="5"/>
           </p:nvPr>
         </p:nvSpPr>
         <p:spPr/>
@@ -2540,7 +2334,7 @@
 </file>
 
 <file path=ppt/notesSlides/notesSlide36.xml><?xml version="1.0" encoding="utf-8"?>
-<p:notes xmlns:a="http://schemas.openxmlformats.org/drawingml/2006/main" xmlns:p="http://schemas.openxmlformats.org/presentationml/2006/main" xmlns:r="http://schemas.openxmlformats.org/officeDocument/2006/relationships">
+<p:notes xmlns:a="http://schemas.openxmlformats.org/drawingml/2006/main" xmlns:r="http://schemas.openxmlformats.org/officeDocument/2006/relationships" xmlns:p="http://schemas.openxmlformats.org/presentationml/2006/main">
   <p:cSld>
     <p:spTree>
       <p:nvGrpSpPr>
@@ -2560,7 +2354,7 @@
         <p:nvSpPr>
           <p:cNvPr id="2" name="Slide Image Placeholder 1"/>
           <p:cNvSpPr>
-            <a:spLocks noGrp="1"/>
+            <a:spLocks noGrp="1" noRot="1" noChangeAspect="1"/>
           </p:cNvSpPr>
           <p:nvPr>
             <p:ph type="sldImg" idx="2"/>
@@ -2575,7 +2369,7 @@
             <a:spLocks noGrp="1"/>
           </p:cNvSpPr>
           <p:nvPr>
-            <p:ph type="body" idx="3" sz="quarter"/>
+            <p:ph type="body" sz="quarter" idx="3"/>
           </p:nvPr>
         </p:nvSpPr>
         <p:spPr/>
@@ -2596,7 +2390,7 @@
             <a:spLocks noGrp="1"/>
           </p:cNvSpPr>
           <p:nvPr>
-            <p:ph type="sldNum" idx="5" sz="quarter"/>
+            <p:ph type="sldNum" sz="quarter" idx="5"/>
           </p:nvPr>
         </p:nvSpPr>
         <p:spPr/>
@@ -2610,7 +2404,7 @@
 </file>
 
 <file path=ppt/notesSlides/notesSlide37.xml><?xml version="1.0" encoding="utf-8"?>
-<p:notes xmlns:a="http://schemas.openxmlformats.org/drawingml/2006/main" xmlns:p="http://schemas.openxmlformats.org/presentationml/2006/main" xmlns:r="http://schemas.openxmlformats.org/officeDocument/2006/relationships">
+<p:notes xmlns:a="http://schemas.openxmlformats.org/drawingml/2006/main" xmlns:r="http://schemas.openxmlformats.org/officeDocument/2006/relationships" xmlns:p="http://schemas.openxmlformats.org/presentationml/2006/main">
   <p:cSld>
     <p:spTree>
       <p:nvGrpSpPr>
@@ -2630,7 +2424,7 @@
         <p:nvSpPr>
           <p:cNvPr id="2" name="Slide Image Placeholder 1"/>
           <p:cNvSpPr>
-            <a:spLocks noGrp="1"/>
+            <a:spLocks noGrp="1" noRot="1" noChangeAspect="1"/>
           </p:cNvSpPr>
           <p:nvPr>
             <p:ph type="sldImg" idx="2"/>
@@ -2645,7 +2439,7 @@
             <a:spLocks noGrp="1"/>
           </p:cNvSpPr>
           <p:nvPr>
-            <p:ph type="body" idx="3" sz="quarter"/>
+            <p:ph type="body" sz="quarter" idx="3"/>
           </p:nvPr>
         </p:nvSpPr>
         <p:spPr/>
@@ -2666,7 +2460,7 @@
             <a:spLocks noGrp="1"/>
           </p:cNvSpPr>
           <p:nvPr>
-            <p:ph type="sldNum" idx="5" sz="quarter"/>
+            <p:ph type="sldNum" sz="quarter" idx="5"/>
           </p:nvPr>
         </p:nvSpPr>
         <p:spPr/>
@@ -2680,7 +2474,7 @@
 </file>
 
 <file path=ppt/notesSlides/notesSlide38.xml><?xml version="1.0" encoding="utf-8"?>
-<p:notes xmlns:a="http://schemas.openxmlformats.org/drawingml/2006/main" xmlns:p="http://schemas.openxmlformats.org/presentationml/2006/main" xmlns:r="http://schemas.openxmlformats.org/officeDocument/2006/relationships">
+<p:notes xmlns:a="http://schemas.openxmlformats.org/drawingml/2006/main" xmlns:r="http://schemas.openxmlformats.org/officeDocument/2006/relationships" xmlns:p="http://schemas.openxmlformats.org/presentationml/2006/main">
   <p:cSld>
     <p:spTree>
       <p:nvGrpSpPr>
@@ -2700,7 +2494,7 @@
         <p:nvSpPr>
           <p:cNvPr id="2" name="Slide Image Placeholder 1"/>
           <p:cNvSpPr>
-            <a:spLocks noGrp="1"/>
+            <a:spLocks noGrp="1" noRot="1" noChangeAspect="1"/>
           </p:cNvSpPr>
           <p:nvPr>
             <p:ph type="sldImg" idx="2"/>
@@ -2715,7 +2509,7 @@
             <a:spLocks noGrp="1"/>
           </p:cNvSpPr>
           <p:nvPr>
-            <p:ph type="body" idx="3" sz="quarter"/>
+            <p:ph type="body" sz="quarter" idx="3"/>
           </p:nvPr>
         </p:nvSpPr>
         <p:spPr/>
@@ -2736,7 +2530,7 @@
             <a:spLocks noGrp="1"/>
           </p:cNvSpPr>
           <p:nvPr>
-            <p:ph type="sldNum" idx="5" sz="quarter"/>
+            <p:ph type="sldNum" sz="quarter" idx="5"/>
           </p:nvPr>
         </p:nvSpPr>
         <p:spPr/>
@@ -2750,7 +2544,7 @@
 </file>
 
 <file path=ppt/notesSlides/notesSlide39.xml><?xml version="1.0" encoding="utf-8"?>
-<p:notes xmlns:a="http://schemas.openxmlformats.org/drawingml/2006/main" xmlns:p="http://schemas.openxmlformats.org/presentationml/2006/main" xmlns:r="http://schemas.openxmlformats.org/officeDocument/2006/relationships">
+<p:notes xmlns:a="http://schemas.openxmlformats.org/drawingml/2006/main" xmlns:r="http://schemas.openxmlformats.org/officeDocument/2006/relationships" xmlns:p="http://schemas.openxmlformats.org/presentationml/2006/main">
   <p:cSld>
     <p:spTree>
       <p:nvGrpSpPr>
@@ -2770,7 +2564,7 @@
         <p:nvSpPr>
           <p:cNvPr id="2" name="Slide Image Placeholder 1"/>
           <p:cNvSpPr>
-            <a:spLocks noGrp="1"/>
+            <a:spLocks noGrp="1" noRot="1" noChangeAspect="1"/>
           </p:cNvSpPr>
           <p:nvPr>
             <p:ph type="sldImg" idx="2"/>
@@ -2785,7 +2579,7 @@
             <a:spLocks noGrp="1"/>
           </p:cNvSpPr>
           <p:nvPr>
-            <p:ph type="body" idx="3" sz="quarter"/>
+            <p:ph type="body" sz="quarter" idx="3"/>
           </p:nvPr>
         </p:nvSpPr>
         <p:spPr/>
@@ -2806,7 +2600,7 @@
             <a:spLocks noGrp="1"/>
           </p:cNvSpPr>
           <p:nvPr>
-            <p:ph type="sldNum" idx="5" sz="quarter"/>
+            <p:ph type="sldNum" sz="quarter" idx="5"/>
           </p:nvPr>
         </p:nvSpPr>
         <p:spPr/>
@@ -2820,7 +2614,7 @@
 </file>
 
 <file path=ppt/notesSlides/notesSlide4.xml><?xml version="1.0" encoding="utf-8"?>
-<p:notes xmlns:a="http://schemas.openxmlformats.org/drawingml/2006/main" xmlns:p="http://schemas.openxmlformats.org/presentationml/2006/main" xmlns:r="http://schemas.openxmlformats.org/officeDocument/2006/relationships">
+<p:notes xmlns:a="http://schemas.openxmlformats.org/drawingml/2006/main" xmlns:r="http://schemas.openxmlformats.org/officeDocument/2006/relationships" xmlns:p="http://schemas.openxmlformats.org/presentationml/2006/main">
   <p:cSld>
     <p:spTree>
       <p:nvGrpSpPr>
@@ -2840,7 +2634,7 @@
         <p:nvSpPr>
           <p:cNvPr id="2" name="Slide Image Placeholder 1"/>
           <p:cNvSpPr>
-            <a:spLocks noGrp="1"/>
+            <a:spLocks noGrp="1" noRot="1" noChangeAspect="1"/>
           </p:cNvSpPr>
           <p:nvPr>
             <p:ph type="sldImg" idx="2"/>
@@ -2855,7 +2649,7 @@
             <a:spLocks noGrp="1"/>
           </p:cNvSpPr>
           <p:nvPr>
-            <p:ph type="body" idx="3" sz="quarter"/>
+            <p:ph type="body" sz="quarter" idx="3"/>
           </p:nvPr>
         </p:nvSpPr>
         <p:spPr/>
@@ -2876,7 +2670,7 @@
             <a:spLocks noGrp="1"/>
           </p:cNvSpPr>
           <p:nvPr>
-            <p:ph type="sldNum" idx="5" sz="quarter"/>
+            <p:ph type="sldNum" sz="quarter" idx="5"/>
           </p:nvPr>
         </p:nvSpPr>
         <p:spPr/>
@@ -2890,7 +2684,7 @@
 </file>
 
 <file path=ppt/notesSlides/notesSlide40.xml><?xml version="1.0" encoding="utf-8"?>
-<p:notes xmlns:a="http://schemas.openxmlformats.org/drawingml/2006/main" xmlns:p="http://schemas.openxmlformats.org/presentationml/2006/main" xmlns:r="http://schemas.openxmlformats.org/officeDocument/2006/relationships">
+<p:notes xmlns:a="http://schemas.openxmlformats.org/drawingml/2006/main" xmlns:r="http://schemas.openxmlformats.org/officeDocument/2006/relationships" xmlns:p="http://schemas.openxmlformats.org/presentationml/2006/main">
   <p:cSld>
     <p:spTree>
       <p:nvGrpSpPr>
@@ -2910,7 +2704,7 @@
         <p:nvSpPr>
           <p:cNvPr id="2" name="Slide Image Placeholder 1"/>
           <p:cNvSpPr>
-            <a:spLocks noGrp="1"/>
+            <a:spLocks noGrp="1" noRot="1" noChangeAspect="1"/>
           </p:cNvSpPr>
           <p:nvPr>
             <p:ph type="sldImg" idx="2"/>
@@ -2925,7 +2719,7 @@
             <a:spLocks noGrp="1"/>
           </p:cNvSpPr>
           <p:nvPr>
-            <p:ph type="body" idx="3" sz="quarter"/>
+            <p:ph type="body" sz="quarter" idx="3"/>
           </p:nvPr>
         </p:nvSpPr>
         <p:spPr/>
@@ -2946,7 +2740,7 @@
             <a:spLocks noGrp="1"/>
           </p:cNvSpPr>
           <p:nvPr>
-            <p:ph type="sldNum" idx="5" sz="quarter"/>
+            <p:ph type="sldNum" sz="quarter" idx="5"/>
           </p:nvPr>
         </p:nvSpPr>
         <p:spPr/>
@@ -2960,7 +2754,7 @@
 </file>
 
 <file path=ppt/notesSlides/notesSlide41.xml><?xml version="1.0" encoding="utf-8"?>
-<p:notes xmlns:a="http://schemas.openxmlformats.org/drawingml/2006/main" xmlns:p="http://schemas.openxmlformats.org/presentationml/2006/main" xmlns:r="http://schemas.openxmlformats.org/officeDocument/2006/relationships">
+<p:notes xmlns:a="http://schemas.openxmlformats.org/drawingml/2006/main" xmlns:r="http://schemas.openxmlformats.org/officeDocument/2006/relationships" xmlns:p="http://schemas.openxmlformats.org/presentationml/2006/main">
   <p:cSld>
     <p:spTree>
       <p:nvGrpSpPr>
@@ -2980,7 +2774,7 @@
         <p:nvSpPr>
           <p:cNvPr id="2" name="Slide Image Placeholder 1"/>
           <p:cNvSpPr>
-            <a:spLocks noGrp="1"/>
+            <a:spLocks noGrp="1" noRot="1" noChangeAspect="1"/>
           </p:cNvSpPr>
           <p:nvPr>
             <p:ph type="sldImg" idx="2"/>
@@ -2995,7 +2789,7 @@
             <a:spLocks noGrp="1"/>
           </p:cNvSpPr>
           <p:nvPr>
-            <p:ph type="body" idx="3" sz="quarter"/>
+            <p:ph type="body" sz="quarter" idx="3"/>
           </p:nvPr>
         </p:nvSpPr>
         <p:spPr/>
@@ -3016,7 +2810,7 @@
             <a:spLocks noGrp="1"/>
           </p:cNvSpPr>
           <p:nvPr>
-            <p:ph type="sldNum" idx="5" sz="quarter"/>
+            <p:ph type="sldNum" sz="quarter" idx="5"/>
           </p:nvPr>
         </p:nvSpPr>
         <p:spPr/>
@@ -3030,7 +2824,7 @@
 </file>
 
 <file path=ppt/notesSlides/notesSlide42.xml><?xml version="1.0" encoding="utf-8"?>
-<p:notes xmlns:a="http://schemas.openxmlformats.org/drawingml/2006/main" xmlns:p="http://schemas.openxmlformats.org/presentationml/2006/main" xmlns:r="http://schemas.openxmlformats.org/officeDocument/2006/relationships">
+<p:notes xmlns:a="http://schemas.openxmlformats.org/drawingml/2006/main" xmlns:r="http://schemas.openxmlformats.org/officeDocument/2006/relationships" xmlns:p="http://schemas.openxmlformats.org/presentationml/2006/main">
   <p:cSld>
     <p:spTree>
       <p:nvGrpSpPr>
@@ -3050,7 +2844,7 @@
         <p:nvSpPr>
           <p:cNvPr id="2" name="Slide Image Placeholder 1"/>
           <p:cNvSpPr>
-            <a:spLocks noGrp="1"/>
+            <a:spLocks noGrp="1" noRot="1" noChangeAspect="1"/>
           </p:cNvSpPr>
           <p:nvPr>
             <p:ph type="sldImg" idx="2"/>
@@ -3065,7 +2859,7 @@
             <a:spLocks noGrp="1"/>
           </p:cNvSpPr>
           <p:nvPr>
-            <p:ph type="body" idx="3" sz="quarter"/>
+            <p:ph type="body" sz="quarter" idx="3"/>
           </p:nvPr>
         </p:nvSpPr>
         <p:spPr/>
@@ -3086,7 +2880,7 @@
             <a:spLocks noGrp="1"/>
           </p:cNvSpPr>
           <p:nvPr>
-            <p:ph type="sldNum" idx="5" sz="quarter"/>
+            <p:ph type="sldNum" sz="quarter" idx="5"/>
           </p:nvPr>
         </p:nvSpPr>
         <p:spPr/>
@@ -3100,7 +2894,7 @@
 </file>
 
 <file path=ppt/notesSlides/notesSlide43.xml><?xml version="1.0" encoding="utf-8"?>
-<p:notes xmlns:a="http://schemas.openxmlformats.org/drawingml/2006/main" xmlns:p="http://schemas.openxmlformats.org/presentationml/2006/main" xmlns:r="http://schemas.openxmlformats.org/officeDocument/2006/relationships">
+<p:notes xmlns:a="http://schemas.openxmlformats.org/drawingml/2006/main" xmlns:r="http://schemas.openxmlformats.org/officeDocument/2006/relationships" xmlns:p="http://schemas.openxmlformats.org/presentationml/2006/main">
   <p:cSld>
     <p:spTree>
       <p:nvGrpSpPr>
@@ -3120,7 +2914,7 @@
         <p:nvSpPr>
           <p:cNvPr id="2" name="Slide Image Placeholder 1"/>
           <p:cNvSpPr>
-            <a:spLocks noGrp="1"/>
+            <a:spLocks noGrp="1" noRot="1" noChangeAspect="1"/>
           </p:cNvSpPr>
           <p:nvPr>
             <p:ph type="sldImg" idx="2"/>
@@ -3135,7 +2929,7 @@
             <a:spLocks noGrp="1"/>
           </p:cNvSpPr>
           <p:nvPr>
-            <p:ph type="body" idx="3" sz="quarter"/>
+            <p:ph type="body" sz="quarter" idx="3"/>
           </p:nvPr>
         </p:nvSpPr>
         <p:spPr/>
@@ -3156,7 +2950,7 @@
             <a:spLocks noGrp="1"/>
           </p:cNvSpPr>
           <p:nvPr>
-            <p:ph type="sldNum" idx="5" sz="quarter"/>
+            <p:ph type="sldNum" sz="quarter" idx="5"/>
           </p:nvPr>
         </p:nvSpPr>
         <p:spPr/>
@@ -3170,7 +2964,7 @@
 </file>
 
 <file path=ppt/notesSlides/notesSlide44.xml><?xml version="1.0" encoding="utf-8"?>
-<p:notes xmlns:a="http://schemas.openxmlformats.org/drawingml/2006/main" xmlns:p="http://schemas.openxmlformats.org/presentationml/2006/main" xmlns:r="http://schemas.openxmlformats.org/officeDocument/2006/relationships">
+<p:notes xmlns:a="http://schemas.openxmlformats.org/drawingml/2006/main" xmlns:r="http://schemas.openxmlformats.org/officeDocument/2006/relationships" xmlns:p="http://schemas.openxmlformats.org/presentationml/2006/main">
   <p:cSld>
     <p:spTree>
       <p:nvGrpSpPr>
@@ -3190,7 +2984,7 @@
         <p:nvSpPr>
           <p:cNvPr id="2" name="Slide Image Placeholder 1"/>
           <p:cNvSpPr>
-            <a:spLocks noGrp="1"/>
+            <a:spLocks noGrp="1" noRot="1" noChangeAspect="1"/>
           </p:cNvSpPr>
           <p:nvPr>
             <p:ph type="sldImg" idx="2"/>
@@ -3205,7 +2999,7 @@
             <a:spLocks noGrp="1"/>
           </p:cNvSpPr>
           <p:nvPr>
-            <p:ph type="body" idx="3" sz="quarter"/>
+            <p:ph type="body" sz="quarter" idx="3"/>
           </p:nvPr>
         </p:nvSpPr>
         <p:spPr/>
@@ -3226,7 +3020,7 @@
             <a:spLocks noGrp="1"/>
           </p:cNvSpPr>
           <p:nvPr>
-            <p:ph type="sldNum" idx="5" sz="quarter"/>
+            <p:ph type="sldNum" sz="quarter" idx="5"/>
           </p:nvPr>
         </p:nvSpPr>
         <p:spPr/>
@@ -3240,7 +3034,7 @@
 </file>
 
 <file path=ppt/notesSlides/notesSlide45.xml><?xml version="1.0" encoding="utf-8"?>
-<p:notes xmlns:a="http://schemas.openxmlformats.org/drawingml/2006/main" xmlns:p="http://schemas.openxmlformats.org/presentationml/2006/main" xmlns:r="http://schemas.openxmlformats.org/officeDocument/2006/relationships">
+<p:notes xmlns:a="http://schemas.openxmlformats.org/drawingml/2006/main" xmlns:r="http://schemas.openxmlformats.org/officeDocument/2006/relationships" xmlns:p="http://schemas.openxmlformats.org/presentationml/2006/main">
   <p:cSld>
     <p:spTree>
       <p:nvGrpSpPr>
@@ -3260,7 +3054,7 @@
         <p:nvSpPr>
           <p:cNvPr id="2" name="Slide Image Placeholder 1"/>
           <p:cNvSpPr>
-            <a:spLocks noGrp="1"/>
+            <a:spLocks noGrp="1" noRot="1" noChangeAspect="1"/>
           </p:cNvSpPr>
           <p:nvPr>
             <p:ph type="sldImg" idx="2"/>
@@ -3275,7 +3069,7 @@
             <a:spLocks noGrp="1"/>
           </p:cNvSpPr>
           <p:nvPr>
-            <p:ph type="body" idx="3" sz="quarter"/>
+            <p:ph type="body" sz="quarter" idx="3"/>
           </p:nvPr>
         </p:nvSpPr>
         <p:spPr/>
@@ -3296,7 +3090,7 @@
             <a:spLocks noGrp="1"/>
           </p:cNvSpPr>
           <p:nvPr>
-            <p:ph type="sldNum" idx="5" sz="quarter"/>
+            <p:ph type="sldNum" sz="quarter" idx="5"/>
           </p:nvPr>
         </p:nvSpPr>
         <p:spPr/>
@@ -3310,7 +3104,7 @@
 </file>
 
 <file path=ppt/notesSlides/notesSlide46.xml><?xml version="1.0" encoding="utf-8"?>
-<p:notes xmlns:a="http://schemas.openxmlformats.org/drawingml/2006/main" xmlns:p="http://schemas.openxmlformats.org/presentationml/2006/main" xmlns:r="http://schemas.openxmlformats.org/officeDocument/2006/relationships">
+<p:notes xmlns:a="http://schemas.openxmlformats.org/drawingml/2006/main" xmlns:r="http://schemas.openxmlformats.org/officeDocument/2006/relationships" xmlns:p="http://schemas.openxmlformats.org/presentationml/2006/main">
   <p:cSld>
     <p:spTree>
       <p:nvGrpSpPr>
@@ -3330,7 +3124,7 @@
         <p:nvSpPr>
           <p:cNvPr id="2" name="Slide Image Placeholder 1"/>
           <p:cNvSpPr>
-            <a:spLocks noGrp="1"/>
+            <a:spLocks noGrp="1" noRot="1" noChangeAspect="1"/>
           </p:cNvSpPr>
           <p:nvPr>
             <p:ph type="sldImg" idx="2"/>
@@ -3345,7 +3139,7 @@
             <a:spLocks noGrp="1"/>
           </p:cNvSpPr>
           <p:nvPr>
-            <p:ph type="body" idx="3" sz="quarter"/>
+            <p:ph type="body" sz="quarter" idx="3"/>
           </p:nvPr>
         </p:nvSpPr>
         <p:spPr/>
@@ -3366,7 +3160,7 @@
             <a:spLocks noGrp="1"/>
           </p:cNvSpPr>
           <p:nvPr>
-            <p:ph type="sldNum" idx="5" sz="quarter"/>
+            <p:ph type="sldNum" sz="quarter" idx="5"/>
           </p:nvPr>
         </p:nvSpPr>
         <p:spPr/>
@@ -3380,7 +3174,7 @@
 </file>
 
 <file path=ppt/notesSlides/notesSlide47.xml><?xml version="1.0" encoding="utf-8"?>
-<p:notes xmlns:a="http://schemas.openxmlformats.org/drawingml/2006/main" xmlns:p="http://schemas.openxmlformats.org/presentationml/2006/main" xmlns:r="http://schemas.openxmlformats.org/officeDocument/2006/relationships">
+<p:notes xmlns:a="http://schemas.openxmlformats.org/drawingml/2006/main" xmlns:r="http://schemas.openxmlformats.org/officeDocument/2006/relationships" xmlns:p="http://schemas.openxmlformats.org/presentationml/2006/main">
   <p:cSld>
     <p:spTree>
       <p:nvGrpSpPr>
@@ -3400,7 +3194,7 @@
         <p:nvSpPr>
           <p:cNvPr id="2" name="Slide Image Placeholder 1"/>
           <p:cNvSpPr>
-            <a:spLocks noGrp="1"/>
+            <a:spLocks noGrp="1" noRot="1" noChangeAspect="1"/>
           </p:cNvSpPr>
           <p:nvPr>
             <p:ph type="sldImg" idx="2"/>
@@ -3415,7 +3209,7 @@
             <a:spLocks noGrp="1"/>
           </p:cNvSpPr>
           <p:nvPr>
-            <p:ph type="body" idx="3" sz="quarter"/>
+            <p:ph type="body" sz="quarter" idx="3"/>
           </p:nvPr>
         </p:nvSpPr>
         <p:spPr/>
@@ -3436,7 +3230,7 @@
             <a:spLocks noGrp="1"/>
           </p:cNvSpPr>
           <p:nvPr>
-            <p:ph type="sldNum" idx="5" sz="quarter"/>
+            <p:ph type="sldNum" sz="quarter" idx="5"/>
           </p:nvPr>
         </p:nvSpPr>
         <p:spPr/>
@@ -3450,7 +3244,7 @@
 </file>
 
 <file path=ppt/notesSlides/notesSlide48.xml><?xml version="1.0" encoding="utf-8"?>
-<p:notes xmlns:a="http://schemas.openxmlformats.org/drawingml/2006/main" xmlns:p="http://schemas.openxmlformats.org/presentationml/2006/main" xmlns:r="http://schemas.openxmlformats.org/officeDocument/2006/relationships">
+<p:notes xmlns:a="http://schemas.openxmlformats.org/drawingml/2006/main" xmlns:r="http://schemas.openxmlformats.org/officeDocument/2006/relationships" xmlns:p="http://schemas.openxmlformats.org/presentationml/2006/main">
   <p:cSld>
     <p:spTree>
       <p:nvGrpSpPr>
@@ -3470,7 +3264,7 @@
         <p:nvSpPr>
           <p:cNvPr id="2" name="Slide Image Placeholder 1"/>
           <p:cNvSpPr>
-            <a:spLocks noGrp="1"/>
+            <a:spLocks noGrp="1" noRot="1" noChangeAspect="1"/>
           </p:cNvSpPr>
           <p:nvPr>
             <p:ph type="sldImg" idx="2"/>
@@ -3485,7 +3279,7 @@
             <a:spLocks noGrp="1"/>
           </p:cNvSpPr>
           <p:nvPr>
-            <p:ph type="body" idx="3" sz="quarter"/>
+            <p:ph type="body" sz="quarter" idx="3"/>
           </p:nvPr>
         </p:nvSpPr>
         <p:spPr/>
@@ -3506,7 +3300,7 @@
             <a:spLocks noGrp="1"/>
           </p:cNvSpPr>
           <p:nvPr>
-            <p:ph type="sldNum" idx="5" sz="quarter"/>
+            <p:ph type="sldNum" sz="quarter" idx="5"/>
           </p:nvPr>
         </p:nvSpPr>
         <p:spPr/>
@@ -3520,7 +3314,7 @@
 </file>
 
 <file path=ppt/notesSlides/notesSlide49.xml><?xml version="1.0" encoding="utf-8"?>
-<p:notes xmlns:a="http://schemas.openxmlformats.org/drawingml/2006/main" xmlns:p="http://schemas.openxmlformats.org/presentationml/2006/main" xmlns:r="http://schemas.openxmlformats.org/officeDocument/2006/relationships">
+<p:notes xmlns:a="http://schemas.openxmlformats.org/drawingml/2006/main" xmlns:r="http://schemas.openxmlformats.org/officeDocument/2006/relationships" xmlns:p="http://schemas.openxmlformats.org/presentationml/2006/main">
   <p:cSld>
     <p:spTree>
       <p:nvGrpSpPr>
@@ -3540,7 +3334,7 @@
         <p:nvSpPr>
           <p:cNvPr id="2" name="Slide Image Placeholder 1"/>
           <p:cNvSpPr>
-            <a:spLocks noGrp="1"/>
+            <a:spLocks noGrp="1" noRot="1" noChangeAspect="1"/>
           </p:cNvSpPr>
           <p:nvPr>
             <p:ph type="sldImg" idx="2"/>
@@ -3555,7 +3349,7 @@
             <a:spLocks noGrp="1"/>
           </p:cNvSpPr>
           <p:nvPr>
-            <p:ph type="body" idx="3" sz="quarter"/>
+            <p:ph type="body" sz="quarter" idx="3"/>
           </p:nvPr>
         </p:nvSpPr>
         <p:spPr/>
@@ -3576,7 +3370,7 @@
             <a:spLocks noGrp="1"/>
           </p:cNvSpPr>
           <p:nvPr>
-            <p:ph type="sldNum" idx="5" sz="quarter"/>
+            <p:ph type="sldNum" sz="quarter" idx="5"/>
           </p:nvPr>
         </p:nvSpPr>
         <p:spPr/>
@@ -3590,7 +3384,7 @@
 </file>
 
 <file path=ppt/notesSlides/notesSlide5.xml><?xml version="1.0" encoding="utf-8"?>
-<p:notes xmlns:a="http://schemas.openxmlformats.org/drawingml/2006/main" xmlns:p="http://schemas.openxmlformats.org/presentationml/2006/main" xmlns:r="http://schemas.openxmlformats.org/officeDocument/2006/relationships">
+<p:notes xmlns:a="http://schemas.openxmlformats.org/drawingml/2006/main" xmlns:r="http://schemas.openxmlformats.org/officeDocument/2006/relationships" xmlns:p="http://schemas.openxmlformats.org/presentationml/2006/main">
   <p:cSld>
     <p:spTree>
       <p:nvGrpSpPr>
@@ -3610,7 +3404,7 @@
         <p:nvSpPr>
           <p:cNvPr id="2" name="Slide Image Placeholder 1"/>
           <p:cNvSpPr>
-            <a:spLocks noGrp="1"/>
+            <a:spLocks noGrp="1" noRot="1" noChangeAspect="1"/>
           </p:cNvSpPr>
           <p:nvPr>
             <p:ph type="sldImg" idx="2"/>
@@ -3625,7 +3419,7 @@
             <a:spLocks noGrp="1"/>
           </p:cNvSpPr>
           <p:nvPr>
-            <p:ph type="body" idx="3" sz="quarter"/>
+            <p:ph type="body" sz="quarter" idx="3"/>
           </p:nvPr>
         </p:nvSpPr>
         <p:spPr/>
@@ -3646,7 +3440,7 @@
             <a:spLocks noGrp="1"/>
           </p:cNvSpPr>
           <p:nvPr>
-            <p:ph type="sldNum" idx="5" sz="quarter"/>
+            <p:ph type="sldNum" sz="quarter" idx="5"/>
           </p:nvPr>
         </p:nvSpPr>
         <p:spPr/>
@@ -3660,7 +3454,7 @@
 </file>
 
 <file path=ppt/notesSlides/notesSlide50.xml><?xml version="1.0" encoding="utf-8"?>
-<p:notes xmlns:a="http://schemas.openxmlformats.org/drawingml/2006/main" xmlns:p="http://schemas.openxmlformats.org/presentationml/2006/main" xmlns:r="http://schemas.openxmlformats.org/officeDocument/2006/relationships">
+<p:notes xmlns:a="http://schemas.openxmlformats.org/drawingml/2006/main" xmlns:r="http://schemas.openxmlformats.org/officeDocument/2006/relationships" xmlns:p="http://schemas.openxmlformats.org/presentationml/2006/main">
   <p:cSld>
     <p:spTree>
       <p:nvGrpSpPr>
@@ -3680,7 +3474,7 @@
         <p:nvSpPr>
           <p:cNvPr id="2" name="Slide Image Placeholder 1"/>
           <p:cNvSpPr>
-            <a:spLocks noGrp="1"/>
+            <a:spLocks noGrp="1" noRot="1" noChangeAspect="1"/>
           </p:cNvSpPr>
           <p:nvPr>
             <p:ph type="sldImg" idx="2"/>
@@ -3695,7 +3489,7 @@
             <a:spLocks noGrp="1"/>
           </p:cNvSpPr>
           <p:nvPr>
-            <p:ph type="body" idx="3" sz="quarter"/>
+            <p:ph type="body" sz="quarter" idx="3"/>
           </p:nvPr>
         </p:nvSpPr>
         <p:spPr/>
@@ -3716,7 +3510,7 @@
             <a:spLocks noGrp="1"/>
           </p:cNvSpPr>
           <p:nvPr>
-            <p:ph type="sldNum" idx="5" sz="quarter"/>
+            <p:ph type="sldNum" sz="quarter" idx="5"/>
           </p:nvPr>
         </p:nvSpPr>
         <p:spPr/>
@@ -3730,7 +3524,7 @@
 </file>
 
 <file path=ppt/notesSlides/notesSlide51.xml><?xml version="1.0" encoding="utf-8"?>
-<p:notes xmlns:a="http://schemas.openxmlformats.org/drawingml/2006/main" xmlns:p="http://schemas.openxmlformats.org/presentationml/2006/main" xmlns:r="http://schemas.openxmlformats.org/officeDocument/2006/relationships">
+<p:notes xmlns:a="http://schemas.openxmlformats.org/drawingml/2006/main" xmlns:r="http://schemas.openxmlformats.org/officeDocument/2006/relationships" xmlns:p="http://schemas.openxmlformats.org/presentationml/2006/main">
   <p:cSld>
     <p:spTree>
       <p:nvGrpSpPr>
@@ -3750,7 +3544,7 @@
         <p:nvSpPr>
           <p:cNvPr id="2" name="Slide Image Placeholder 1"/>
           <p:cNvSpPr>
-            <a:spLocks noGrp="1"/>
+            <a:spLocks noGrp="1" noRot="1" noChangeAspect="1"/>
           </p:cNvSpPr>
           <p:nvPr>
             <p:ph type="sldImg" idx="2"/>
@@ -3765,7 +3559,7 @@
             <a:spLocks noGrp="1"/>
           </p:cNvSpPr>
           <p:nvPr>
-            <p:ph type="body" idx="3" sz="quarter"/>
+            <p:ph type="body" sz="quarter" idx="3"/>
           </p:nvPr>
         </p:nvSpPr>
         <p:spPr/>
@@ -3786,7 +3580,7 @@
             <a:spLocks noGrp="1"/>
           </p:cNvSpPr>
           <p:nvPr>
-            <p:ph type="sldNum" idx="5" sz="quarter"/>
+            <p:ph type="sldNum" sz="quarter" idx="5"/>
           </p:nvPr>
         </p:nvSpPr>
         <p:spPr/>
@@ -3800,7 +3594,7 @@
 </file>
 
 <file path=ppt/notesSlides/notesSlide52.xml><?xml version="1.0" encoding="utf-8"?>
-<p:notes xmlns:a="http://schemas.openxmlformats.org/drawingml/2006/main" xmlns:p="http://schemas.openxmlformats.org/presentationml/2006/main" xmlns:r="http://schemas.openxmlformats.org/officeDocument/2006/relationships">
+<p:notes xmlns:a="http://schemas.openxmlformats.org/drawingml/2006/main" xmlns:r="http://schemas.openxmlformats.org/officeDocument/2006/relationships" xmlns:p="http://schemas.openxmlformats.org/presentationml/2006/main">
   <p:cSld>
     <p:spTree>
       <p:nvGrpSpPr>
@@ -3820,7 +3614,7 @@
         <p:nvSpPr>
           <p:cNvPr id="2" name="Slide Image Placeholder 1"/>
           <p:cNvSpPr>
-            <a:spLocks noGrp="1"/>
+            <a:spLocks noGrp="1" noRot="1" noChangeAspect="1"/>
           </p:cNvSpPr>
           <p:nvPr>
             <p:ph type="sldImg" idx="2"/>
@@ -3835,7 +3629,7 @@
             <a:spLocks noGrp="1"/>
           </p:cNvSpPr>
           <p:nvPr>
-            <p:ph type="body" idx="3" sz="quarter"/>
+            <p:ph type="body" sz="quarter" idx="3"/>
           </p:nvPr>
         </p:nvSpPr>
         <p:spPr/>
@@ -3856,7 +3650,7 @@
             <a:spLocks noGrp="1"/>
           </p:cNvSpPr>
           <p:nvPr>
-            <p:ph type="sldNum" idx="5" sz="quarter"/>
+            <p:ph type="sldNum" sz="quarter" idx="5"/>
           </p:nvPr>
         </p:nvSpPr>
         <p:spPr/>
@@ -3870,7 +3664,7 @@
 </file>
 
 <file path=ppt/notesSlides/notesSlide53.xml><?xml version="1.0" encoding="utf-8"?>
-<p:notes xmlns:a="http://schemas.openxmlformats.org/drawingml/2006/main" xmlns:p="http://schemas.openxmlformats.org/presentationml/2006/main" xmlns:r="http://schemas.openxmlformats.org/officeDocument/2006/relationships">
+<p:notes xmlns:a="http://schemas.openxmlformats.org/drawingml/2006/main" xmlns:r="http://schemas.openxmlformats.org/officeDocument/2006/relationships" xmlns:p="http://schemas.openxmlformats.org/presentationml/2006/main">
   <p:cSld>
     <p:spTree>
       <p:nvGrpSpPr>
@@ -3890,7 +3684,7 @@
         <p:nvSpPr>
           <p:cNvPr id="2" name="Slide Image Placeholder 1"/>
           <p:cNvSpPr>
-            <a:spLocks noGrp="1"/>
+            <a:spLocks noGrp="1" noRot="1" noChangeAspect="1"/>
           </p:cNvSpPr>
           <p:nvPr>
             <p:ph type="sldImg" idx="2"/>
@@ -3905,7 +3699,7 @@
             <a:spLocks noGrp="1"/>
           </p:cNvSpPr>
           <p:nvPr>
-            <p:ph type="body" idx="3" sz="quarter"/>
+            <p:ph type="body" sz="quarter" idx="3"/>
           </p:nvPr>
         </p:nvSpPr>
         <p:spPr/>
@@ -3926,7 +3720,7 @@
             <a:spLocks noGrp="1"/>
           </p:cNvSpPr>
           <p:nvPr>
-            <p:ph type="sldNum" idx="5" sz="quarter"/>
+            <p:ph type="sldNum" sz="quarter" idx="5"/>
           </p:nvPr>
         </p:nvSpPr>
         <p:spPr/>
@@ -3940,7 +3734,7 @@
 </file>
 
 <file path=ppt/notesSlides/notesSlide6.xml><?xml version="1.0" encoding="utf-8"?>
-<p:notes xmlns:a="http://schemas.openxmlformats.org/drawingml/2006/main" xmlns:p="http://schemas.openxmlformats.org/presentationml/2006/main" xmlns:r="http://schemas.openxmlformats.org/officeDocument/2006/relationships">
+<p:notes xmlns:a="http://schemas.openxmlformats.org/drawingml/2006/main" xmlns:r="http://schemas.openxmlformats.org/officeDocument/2006/relationships" xmlns:p="http://schemas.openxmlformats.org/presentationml/2006/main">
   <p:cSld>
     <p:spTree>
       <p:nvGrpSpPr>
@@ -3960,7 +3754,7 @@
         <p:nvSpPr>
           <p:cNvPr id="2" name="Slide Image Placeholder 1"/>
           <p:cNvSpPr>
-            <a:spLocks noGrp="1"/>
+            <a:spLocks noGrp="1" noRot="1" noChangeAspect="1"/>
           </p:cNvSpPr>
           <p:nvPr>
             <p:ph type="sldImg" idx="2"/>
@@ -3975,7 +3769,7 @@
             <a:spLocks noGrp="1"/>
           </p:cNvSpPr>
           <p:nvPr>
-            <p:ph type="body" idx="3" sz="quarter"/>
+            <p:ph type="body" sz="quarter" idx="3"/>
           </p:nvPr>
         </p:nvSpPr>
         <p:spPr/>
@@ -3996,7 +3790,7 @@
             <a:spLocks noGrp="1"/>
           </p:cNvSpPr>
           <p:nvPr>
-            <p:ph type="sldNum" idx="5" sz="quarter"/>
+            <p:ph type="sldNum" sz="quarter" idx="5"/>
           </p:nvPr>
         </p:nvSpPr>
         <p:spPr/>
@@ -4010,7 +3804,7 @@
 </file>
 
 <file path=ppt/notesSlides/notesSlide7.xml><?xml version="1.0" encoding="utf-8"?>
-<p:notes xmlns:a="http://schemas.openxmlformats.org/drawingml/2006/main" xmlns:p="http://schemas.openxmlformats.org/presentationml/2006/main" xmlns:r="http://schemas.openxmlformats.org/officeDocument/2006/relationships">
+<p:notes xmlns:a="http://schemas.openxmlformats.org/drawingml/2006/main" xmlns:r="http://schemas.openxmlformats.org/officeDocument/2006/relationships" xmlns:p="http://schemas.openxmlformats.org/presentationml/2006/main">
   <p:cSld>
     <p:spTree>
       <p:nvGrpSpPr>
@@ -4030,7 +3824,7 @@
         <p:nvSpPr>
           <p:cNvPr id="2" name="Slide Image Placeholder 1"/>
           <p:cNvSpPr>
-            <a:spLocks noGrp="1"/>
+            <a:spLocks noGrp="1" noRot="1" noChangeAspect="1"/>
           </p:cNvSpPr>
           <p:nvPr>
             <p:ph type="sldImg" idx="2"/>
@@ -4045,7 +3839,7 @@
             <a:spLocks noGrp="1"/>
           </p:cNvSpPr>
           <p:nvPr>
-            <p:ph type="body" idx="3" sz="quarter"/>
+            <p:ph type="body" sz="quarter" idx="3"/>
           </p:nvPr>
         </p:nvSpPr>
         <p:spPr/>
@@ -4066,7 +3860,7 @@
             <a:spLocks noGrp="1"/>
           </p:cNvSpPr>
           <p:nvPr>
-            <p:ph type="sldNum" idx="5" sz="quarter"/>
+            <p:ph type="sldNum" sz="quarter" idx="5"/>
           </p:nvPr>
         </p:nvSpPr>
         <p:spPr/>
@@ -4080,7 +3874,7 @@
 </file>
 
 <file path=ppt/notesSlides/notesSlide8.xml><?xml version="1.0" encoding="utf-8"?>
-<p:notes xmlns:a="http://schemas.openxmlformats.org/drawingml/2006/main" xmlns:p="http://schemas.openxmlformats.org/presentationml/2006/main" xmlns:r="http://schemas.openxmlformats.org/officeDocument/2006/relationships">
+<p:notes xmlns:a="http://schemas.openxmlformats.org/drawingml/2006/main" xmlns:r="http://schemas.openxmlformats.org/officeDocument/2006/relationships" xmlns:p="http://schemas.openxmlformats.org/presentationml/2006/main">
   <p:cSld>
     <p:spTree>
       <p:nvGrpSpPr>
@@ -4100,7 +3894,7 @@
         <p:nvSpPr>
           <p:cNvPr id="2" name="Slide Image Placeholder 1"/>
           <p:cNvSpPr>
-            <a:spLocks noGrp="1"/>
+            <a:spLocks noGrp="1" noRot="1" noChangeAspect="1"/>
           </p:cNvSpPr>
           <p:nvPr>
             <p:ph type="sldImg" idx="2"/>
@@ -4115,7 +3909,7 @@
             <a:spLocks noGrp="1"/>
           </p:cNvSpPr>
           <p:nvPr>
-            <p:ph type="body" idx="3" sz="quarter"/>
+            <p:ph type="body" sz="quarter" idx="3"/>
           </p:nvPr>
         </p:nvSpPr>
         <p:spPr/>
@@ -4136,7 +3930,7 @@
             <a:spLocks noGrp="1"/>
           </p:cNvSpPr>
           <p:nvPr>
-            <p:ph type="sldNum" idx="5" sz="quarter"/>
+            <p:ph type="sldNum" sz="quarter" idx="5"/>
           </p:nvPr>
         </p:nvSpPr>
         <p:spPr/>
@@ -4150,7 +3944,7 @@
 </file>
 
 <file path=ppt/notesSlides/notesSlide9.xml><?xml version="1.0" encoding="utf-8"?>
-<p:notes xmlns:a="http://schemas.openxmlformats.org/drawingml/2006/main" xmlns:p="http://schemas.openxmlformats.org/presentationml/2006/main" xmlns:r="http://schemas.openxmlformats.org/officeDocument/2006/relationships">
+<p:notes xmlns:a="http://schemas.openxmlformats.org/drawingml/2006/main" xmlns:r="http://schemas.openxmlformats.org/officeDocument/2006/relationships" xmlns:p="http://schemas.openxmlformats.org/presentationml/2006/main">
   <p:cSld>
     <p:spTree>
       <p:nvGrpSpPr>
@@ -4170,7 +3964,7 @@
         <p:nvSpPr>
           <p:cNvPr id="2" name="Slide Image Placeholder 1"/>
           <p:cNvSpPr>
-            <a:spLocks noGrp="1"/>
+            <a:spLocks noGrp="1" noRot="1" noChangeAspect="1"/>
           </p:cNvSpPr>
           <p:nvPr>
             <p:ph type="sldImg" idx="2"/>
@@ -4185,7 +3979,7 @@
             <a:spLocks noGrp="1"/>
           </p:cNvSpPr>
           <p:nvPr>
-            <p:ph type="body" idx="3" sz="quarter"/>
+            <p:ph type="body" sz="quarter" idx="3"/>
           </p:nvPr>
         </p:nvSpPr>
         <p:spPr/>
@@ -4206,7 +4000,7 @@
             <a:spLocks noGrp="1"/>
           </p:cNvSpPr>
           <p:nvPr>
-            <p:ph type="sldNum" idx="5" sz="quarter"/>
+            <p:ph type="sldNum" sz="quarter" idx="5"/>
           </p:nvPr>
         </p:nvSpPr>
         <p:spPr/>
@@ -4257,10 +4051,9 @@
           <a:lstStyle/>
           <a:p>
             <a:r>
-              <a:rPr lang="en-US" smtClean="0"/>
+              <a:rPr lang="en-US"/>
               <a:t>Click to edit Master title style</a:t>
             </a:r>
-            <a:endParaRPr lang="en-US"/>
           </a:p>
         </p:txBody>
       </p:sp>
@@ -4376,10 +4169,9 @@
           </a:lstStyle>
           <a:p>
             <a:r>
-              <a:rPr lang="en-US" smtClean="0"/>
+              <a:rPr lang="en-US"/>
               <a:t>Click to edit Master subtitle style</a:t>
             </a:r>
-            <a:endParaRPr lang="en-US"/>
           </a:p>
         </p:txBody>
       </p:sp>
@@ -4400,7 +4192,7 @@
           <a:p>
             <a:fld id="{5BCAD085-E8A6-8845-BD4E-CB4CCA059FC4}" type="datetimeFigureOut">
               <a:rPr lang="en-US" smtClean="0"/>
-              <a:t>1/27/13</a:t>
+              <a:t>8/19/2026</a:t>
             </a:fld>
             <a:endParaRPr lang="en-US"/>
           </a:p>
@@ -4494,10 +4286,9 @@
           <a:lstStyle/>
           <a:p>
             <a:r>
-              <a:rPr lang="en-US" smtClean="0"/>
+              <a:rPr lang="en-US"/>
               <a:t>Click to edit Master title style</a:t>
             </a:r>
-            <a:endParaRPr lang="en-US"/>
           </a:p>
         </p:txBody>
       </p:sp>
@@ -4518,38 +4309,37 @@
           <a:p>
             <a:pPr lvl="0"/>
             <a:r>
-              <a:rPr lang="en-US" smtClean="0"/>
+              <a:rPr lang="en-US"/>
               <a:t>Click to edit Master text styles</a:t>
             </a:r>
           </a:p>
           <a:p>
             <a:pPr lvl="1"/>
             <a:r>
-              <a:rPr lang="en-US" smtClean="0"/>
+              <a:rPr lang="en-US"/>
               <a:t>Second level</a:t>
             </a:r>
           </a:p>
           <a:p>
             <a:pPr lvl="2"/>
             <a:r>
-              <a:rPr lang="en-US" smtClean="0"/>
+              <a:rPr lang="en-US"/>
               <a:t>Third level</a:t>
             </a:r>
           </a:p>
           <a:p>
             <a:pPr lvl="3"/>
             <a:r>
-              <a:rPr lang="en-US" smtClean="0"/>
+              <a:rPr lang="en-US"/>
               <a:t>Fourth level</a:t>
             </a:r>
           </a:p>
           <a:p>
             <a:pPr lvl="4"/>
             <a:r>
-              <a:rPr lang="en-US" smtClean="0"/>
+              <a:rPr lang="en-US"/>
               <a:t>Fifth level</a:t>
             </a:r>
-            <a:endParaRPr lang="en-US"/>
           </a:p>
         </p:txBody>
       </p:sp>
@@ -4570,7 +4360,7 @@
           <a:p>
             <a:fld id="{5BCAD085-E8A6-8845-BD4E-CB4CCA059FC4}" type="datetimeFigureOut">
               <a:rPr lang="en-US" smtClean="0"/>
-              <a:t>1/27/13</a:t>
+              <a:t>8/19/2026</a:t>
             </a:fld>
             <a:endParaRPr lang="en-US"/>
           </a:p>
@@ -4669,10 +4459,9 @@
           <a:lstStyle/>
           <a:p>
             <a:r>
-              <a:rPr lang="en-US" smtClean="0"/>
+              <a:rPr lang="en-US"/>
               <a:t>Click to edit Master title style</a:t>
             </a:r>
-            <a:endParaRPr lang="en-US"/>
           </a:p>
         </p:txBody>
       </p:sp>
@@ -4698,38 +4487,37 @@
           <a:p>
             <a:pPr lvl="0"/>
             <a:r>
-              <a:rPr lang="en-US" smtClean="0"/>
+              <a:rPr lang="en-US"/>
               <a:t>Click to edit Master text styles</a:t>
             </a:r>
           </a:p>
           <a:p>
             <a:pPr lvl="1"/>
             <a:r>
-              <a:rPr lang="en-US" smtClean="0"/>
+              <a:rPr lang="en-US"/>
               <a:t>Second level</a:t>
             </a:r>
           </a:p>
           <a:p>
             <a:pPr lvl="2"/>
             <a:r>
-              <a:rPr lang="en-US" smtClean="0"/>
+              <a:rPr lang="en-US"/>
               <a:t>Third level</a:t>
             </a:r>
           </a:p>
           <a:p>
             <a:pPr lvl="3"/>
             <a:r>
-              <a:rPr lang="en-US" smtClean="0"/>
+              <a:rPr lang="en-US"/>
               <a:t>Fourth level</a:t>
             </a:r>
           </a:p>
           <a:p>
             <a:pPr lvl="4"/>
             <a:r>
-              <a:rPr lang="en-US" smtClean="0"/>
+              <a:rPr lang="en-US"/>
               <a:t>Fifth level</a:t>
             </a:r>
-            <a:endParaRPr lang="en-US"/>
           </a:p>
         </p:txBody>
       </p:sp>
@@ -4750,7 +4538,7 @@
           <a:p>
             <a:fld id="{5BCAD085-E8A6-8845-BD4E-CB4CCA059FC4}" type="datetimeFigureOut">
               <a:rPr lang="en-US" smtClean="0"/>
-              <a:t>1/27/13</a:t>
+              <a:t>8/19/2026</a:t>
             </a:fld>
             <a:endParaRPr lang="en-US"/>
           </a:p>
@@ -4844,10 +4632,9 @@
           <a:lstStyle/>
           <a:p>
             <a:r>
-              <a:rPr lang="en-US" smtClean="0"/>
+              <a:rPr lang="en-US"/>
               <a:t>Click to edit Master title style</a:t>
             </a:r>
-            <a:endParaRPr lang="en-US"/>
           </a:p>
         </p:txBody>
       </p:sp>
@@ -4868,38 +4655,37 @@
           <a:p>
             <a:pPr lvl="0"/>
             <a:r>
-              <a:rPr lang="en-US" smtClean="0"/>
+              <a:rPr lang="en-US"/>
               <a:t>Click to edit Master text styles</a:t>
             </a:r>
           </a:p>
           <a:p>
             <a:pPr lvl="1"/>
             <a:r>
-              <a:rPr lang="en-US" smtClean="0"/>
+              <a:rPr lang="en-US"/>
               <a:t>Second level</a:t>
             </a:r>
           </a:p>
           <a:p>
             <a:pPr lvl="2"/>
             <a:r>
-              <a:rPr lang="en-US" smtClean="0"/>
+              <a:rPr lang="en-US"/>
               <a:t>Third level</a:t>
             </a:r>
           </a:p>
           <a:p>
             <a:pPr lvl="3"/>
             <a:r>
-              <a:rPr lang="en-US" smtClean="0"/>
+              <a:rPr lang="en-US"/>
               <a:t>Fourth level</a:t>
             </a:r>
           </a:p>
           <a:p>
             <a:pPr lvl="4"/>
             <a:r>
-              <a:rPr lang="en-US" smtClean="0"/>
+              <a:rPr lang="en-US"/>
               <a:t>Fifth level</a:t>
             </a:r>
-            <a:endParaRPr lang="en-US"/>
           </a:p>
         </p:txBody>
       </p:sp>
@@ -4920,7 +4706,7 @@
           <a:p>
             <a:fld id="{5BCAD085-E8A6-8845-BD4E-CB4CCA059FC4}" type="datetimeFigureOut">
               <a:rPr lang="en-US" smtClean="0"/>
-              <a:t>1/27/13</a:t>
+              <a:t>8/19/2026</a:t>
             </a:fld>
             <a:endParaRPr lang="en-US"/>
           </a:p>
@@ -5023,10 +4809,9 @@
           </a:lstStyle>
           <a:p>
             <a:r>
-              <a:rPr lang="en-US" smtClean="0"/>
+              <a:rPr lang="en-US"/>
               <a:t>Click to edit Master title style</a:t>
             </a:r>
-            <a:endParaRPr lang="en-US"/>
           </a:p>
         </p:txBody>
       </p:sp>
@@ -5143,7 +4928,7 @@
           <a:p>
             <a:pPr lvl="0"/>
             <a:r>
-              <a:rPr lang="en-US" smtClean="0"/>
+              <a:rPr lang="en-US"/>
               <a:t>Click to edit Master text styles</a:t>
             </a:r>
           </a:p>
@@ -5166,7 +4951,7 @@
           <a:p>
             <a:fld id="{5BCAD085-E8A6-8845-BD4E-CB4CCA059FC4}" type="datetimeFigureOut">
               <a:rPr lang="en-US" smtClean="0"/>
-              <a:t>1/27/13</a:t>
+              <a:t>8/19/2026</a:t>
             </a:fld>
             <a:endParaRPr lang="en-US"/>
           </a:p>
@@ -5260,10 +5045,9 @@
           <a:lstStyle/>
           <a:p>
             <a:r>
-              <a:rPr lang="en-US" smtClean="0"/>
+              <a:rPr lang="en-US"/>
               <a:t>Click to edit Master title style</a:t>
             </a:r>
-            <a:endParaRPr lang="en-US"/>
           </a:p>
         </p:txBody>
       </p:sp>
@@ -5317,38 +5101,37 @@
           <a:p>
             <a:pPr lvl="0"/>
             <a:r>
-              <a:rPr lang="en-US" smtClean="0"/>
+              <a:rPr lang="en-US"/>
               <a:t>Click to edit Master text styles</a:t>
             </a:r>
           </a:p>
           <a:p>
             <a:pPr lvl="1"/>
             <a:r>
-              <a:rPr lang="en-US" smtClean="0"/>
+              <a:rPr lang="en-US"/>
               <a:t>Second level</a:t>
             </a:r>
           </a:p>
           <a:p>
             <a:pPr lvl="2"/>
             <a:r>
-              <a:rPr lang="en-US" smtClean="0"/>
+              <a:rPr lang="en-US"/>
               <a:t>Third level</a:t>
             </a:r>
           </a:p>
           <a:p>
             <a:pPr lvl="3"/>
             <a:r>
-              <a:rPr lang="en-US" smtClean="0"/>
+              <a:rPr lang="en-US"/>
               <a:t>Fourth level</a:t>
             </a:r>
           </a:p>
           <a:p>
             <a:pPr lvl="4"/>
             <a:r>
-              <a:rPr lang="en-US" smtClean="0"/>
+              <a:rPr lang="en-US"/>
               <a:t>Fifth level</a:t>
             </a:r>
-            <a:endParaRPr lang="en-US"/>
           </a:p>
         </p:txBody>
       </p:sp>
@@ -5402,38 +5185,37 @@
           <a:p>
             <a:pPr lvl="0"/>
             <a:r>
-              <a:rPr lang="en-US" smtClean="0"/>
+              <a:rPr lang="en-US"/>
               <a:t>Click to edit Master text styles</a:t>
             </a:r>
           </a:p>
           <a:p>
             <a:pPr lvl="1"/>
             <a:r>
-              <a:rPr lang="en-US" smtClean="0"/>
+              <a:rPr lang="en-US"/>
               <a:t>Second level</a:t>
             </a:r>
           </a:p>
           <a:p>
             <a:pPr lvl="2"/>
             <a:r>
-              <a:rPr lang="en-US" smtClean="0"/>
+              <a:rPr lang="en-US"/>
               <a:t>Third level</a:t>
             </a:r>
           </a:p>
           <a:p>
             <a:pPr lvl="3"/>
             <a:r>
-              <a:rPr lang="en-US" smtClean="0"/>
+              <a:rPr lang="en-US"/>
               <a:t>Fourth level</a:t>
             </a:r>
           </a:p>
           <a:p>
             <a:pPr lvl="4"/>
             <a:r>
-              <a:rPr lang="en-US" smtClean="0"/>
+              <a:rPr lang="en-US"/>
               <a:t>Fifth level</a:t>
             </a:r>
-            <a:endParaRPr lang="en-US"/>
           </a:p>
         </p:txBody>
       </p:sp>
@@ -5454,7 +5236,7 @@
           <a:p>
             <a:fld id="{5BCAD085-E8A6-8845-BD4E-CB4CCA059FC4}" type="datetimeFigureOut">
               <a:rPr lang="en-US" smtClean="0"/>
-              <a:t>1/27/13</a:t>
+              <a:t>8/19/2026</a:t>
             </a:fld>
             <a:endParaRPr lang="en-US"/>
           </a:p>
@@ -5552,10 +5334,9 @@
           </a:lstStyle>
           <a:p>
             <a:r>
-              <a:rPr lang="en-US" smtClean="0"/>
+              <a:rPr lang="en-US"/>
               <a:t>Click to edit Master title style</a:t>
             </a:r>
-            <a:endParaRPr lang="en-US"/>
           </a:p>
         </p:txBody>
       </p:sp>
@@ -5618,7 +5399,7 @@
           <a:p>
             <a:pPr lvl="0"/>
             <a:r>
-              <a:rPr lang="en-US" smtClean="0"/>
+              <a:rPr lang="en-US"/>
               <a:t>Click to edit Master text styles</a:t>
             </a:r>
           </a:p>
@@ -5674,38 +5455,37 @@
           <a:p>
             <a:pPr lvl="0"/>
             <a:r>
-              <a:rPr lang="en-US" smtClean="0"/>
+              <a:rPr lang="en-US"/>
               <a:t>Click to edit Master text styles</a:t>
             </a:r>
           </a:p>
           <a:p>
             <a:pPr lvl="1"/>
             <a:r>
-              <a:rPr lang="en-US" smtClean="0"/>
+              <a:rPr lang="en-US"/>
               <a:t>Second level</a:t>
             </a:r>
           </a:p>
           <a:p>
             <a:pPr lvl="2"/>
             <a:r>
-              <a:rPr lang="en-US" smtClean="0"/>
+              <a:rPr lang="en-US"/>
               <a:t>Third level</a:t>
             </a:r>
           </a:p>
           <a:p>
             <a:pPr lvl="3"/>
             <a:r>
-              <a:rPr lang="en-US" smtClean="0"/>
+              <a:rPr lang="en-US"/>
               <a:t>Fourth level</a:t>
             </a:r>
           </a:p>
           <a:p>
             <a:pPr lvl="4"/>
             <a:r>
-              <a:rPr lang="en-US" smtClean="0"/>
+              <a:rPr lang="en-US"/>
               <a:t>Fifth level</a:t>
             </a:r>
-            <a:endParaRPr lang="en-US"/>
           </a:p>
         </p:txBody>
       </p:sp>
@@ -5768,7 +5548,7 @@
           <a:p>
             <a:pPr lvl="0"/>
             <a:r>
-              <a:rPr lang="en-US" smtClean="0"/>
+              <a:rPr lang="en-US"/>
               <a:t>Click to edit Master text styles</a:t>
             </a:r>
           </a:p>
@@ -5824,38 +5604,37 @@
           <a:p>
             <a:pPr lvl="0"/>
             <a:r>
-              <a:rPr lang="en-US" smtClean="0"/>
+              <a:rPr lang="en-US"/>
               <a:t>Click to edit Master text styles</a:t>
             </a:r>
           </a:p>
           <a:p>
             <a:pPr lvl="1"/>
             <a:r>
-              <a:rPr lang="en-US" smtClean="0"/>
+              <a:rPr lang="en-US"/>
               <a:t>Second level</a:t>
             </a:r>
           </a:p>
           <a:p>
             <a:pPr lvl="2"/>
             <a:r>
-              <a:rPr lang="en-US" smtClean="0"/>
+              <a:rPr lang="en-US"/>
               <a:t>Third level</a:t>
             </a:r>
           </a:p>
           <a:p>
             <a:pPr lvl="3"/>
             <a:r>
-              <a:rPr lang="en-US" smtClean="0"/>
+              <a:rPr lang="en-US"/>
               <a:t>Fourth level</a:t>
             </a:r>
           </a:p>
           <a:p>
             <a:pPr lvl="4"/>
             <a:r>
-              <a:rPr lang="en-US" smtClean="0"/>
+              <a:rPr lang="en-US"/>
               <a:t>Fifth level</a:t>
             </a:r>
-            <a:endParaRPr lang="en-US"/>
           </a:p>
         </p:txBody>
       </p:sp>
@@ -5876,7 +5655,7 @@
           <a:p>
             <a:fld id="{5BCAD085-E8A6-8845-BD4E-CB4CCA059FC4}" type="datetimeFigureOut">
               <a:rPr lang="en-US" smtClean="0"/>
-              <a:t>1/27/13</a:t>
+              <a:t>8/19/2026</a:t>
             </a:fld>
             <a:endParaRPr lang="en-US"/>
           </a:p>
@@ -5970,10 +5749,9 @@
           <a:lstStyle/>
           <a:p>
             <a:r>
-              <a:rPr lang="en-US" smtClean="0"/>
+              <a:rPr lang="en-US"/>
               <a:t>Click to edit Master title style</a:t>
             </a:r>
-            <a:endParaRPr lang="en-US"/>
           </a:p>
         </p:txBody>
       </p:sp>
@@ -5994,7 +5772,7 @@
           <a:p>
             <a:fld id="{5BCAD085-E8A6-8845-BD4E-CB4CCA059FC4}" type="datetimeFigureOut">
               <a:rPr lang="en-US" smtClean="0"/>
-              <a:t>1/27/13</a:t>
+              <a:t>8/19/2026</a:t>
             </a:fld>
             <a:endParaRPr lang="en-US"/>
           </a:p>
@@ -6089,7 +5867,7 @@
           <a:p>
             <a:fld id="{5BCAD085-E8A6-8845-BD4E-CB4CCA059FC4}" type="datetimeFigureOut">
               <a:rPr lang="en-US" smtClean="0"/>
-              <a:t>1/27/13</a:t>
+              <a:t>8/19/2026</a:t>
             </a:fld>
             <a:endParaRPr lang="en-US"/>
           </a:p>
@@ -6192,10 +5970,9 @@
           </a:lstStyle>
           <a:p>
             <a:r>
-              <a:rPr lang="en-US" smtClean="0"/>
+              <a:rPr lang="en-US"/>
               <a:t>Click to edit Master title style</a:t>
             </a:r>
-            <a:endParaRPr lang="en-US"/>
           </a:p>
         </p:txBody>
       </p:sp>
@@ -6249,38 +6026,37 @@
           <a:p>
             <a:pPr lvl="0"/>
             <a:r>
-              <a:rPr lang="en-US" smtClean="0"/>
+              <a:rPr lang="en-US"/>
               <a:t>Click to edit Master text styles</a:t>
             </a:r>
           </a:p>
           <a:p>
             <a:pPr lvl="1"/>
             <a:r>
-              <a:rPr lang="en-US" smtClean="0"/>
+              <a:rPr lang="en-US"/>
               <a:t>Second level</a:t>
             </a:r>
           </a:p>
           <a:p>
             <a:pPr lvl="2"/>
             <a:r>
-              <a:rPr lang="en-US" smtClean="0"/>
+              <a:rPr lang="en-US"/>
               <a:t>Third level</a:t>
             </a:r>
           </a:p>
           <a:p>
             <a:pPr lvl="3"/>
             <a:r>
-              <a:rPr lang="en-US" smtClean="0"/>
+              <a:rPr lang="en-US"/>
               <a:t>Fourth level</a:t>
             </a:r>
           </a:p>
           <a:p>
             <a:pPr lvl="4"/>
             <a:r>
-              <a:rPr lang="en-US" smtClean="0"/>
+              <a:rPr lang="en-US"/>
               <a:t>Fifth level</a:t>
             </a:r>
-            <a:endParaRPr lang="en-US"/>
           </a:p>
         </p:txBody>
       </p:sp>
@@ -6343,7 +6119,7 @@
           <a:p>
             <a:pPr lvl="0"/>
             <a:r>
-              <a:rPr lang="en-US" smtClean="0"/>
+              <a:rPr lang="en-US"/>
               <a:t>Click to edit Master text styles</a:t>
             </a:r>
           </a:p>
@@ -6366,7 +6142,7 @@
           <a:p>
             <a:fld id="{5BCAD085-E8A6-8845-BD4E-CB4CCA059FC4}" type="datetimeFigureOut">
               <a:rPr lang="en-US" smtClean="0"/>
-              <a:t>1/27/13</a:t>
+              <a:t>8/19/2026</a:t>
             </a:fld>
             <a:endParaRPr lang="en-US"/>
           </a:p>
@@ -6469,10 +6245,9 @@
           </a:lstStyle>
           <a:p>
             <a:r>
-              <a:rPr lang="en-US" smtClean="0"/>
+              <a:rPr lang="en-US"/>
               <a:t>Click to edit Master title style</a:t>
             </a:r>
-            <a:endParaRPr lang="en-US"/>
           </a:p>
         </p:txBody>
       </p:sp>
@@ -6596,7 +6371,7 @@
           <a:p>
             <a:pPr lvl="0"/>
             <a:r>
-              <a:rPr lang="en-US" smtClean="0"/>
+              <a:rPr lang="en-US"/>
               <a:t>Click to edit Master text styles</a:t>
             </a:r>
           </a:p>
@@ -6619,7 +6394,7 @@
           <a:p>
             <a:fld id="{5BCAD085-E8A6-8845-BD4E-CB4CCA059FC4}" type="datetimeFigureOut">
               <a:rPr lang="en-US" smtClean="0"/>
-              <a:t>1/27/13</a:t>
+              <a:t>8/19/2026</a:t>
             </a:fld>
             <a:endParaRPr lang="en-US"/>
           </a:p>
@@ -6728,10 +6503,9 @@
           <a:lstStyle/>
           <a:p>
             <a:r>
-              <a:rPr lang="en-US" smtClean="0"/>
+              <a:rPr lang="en-US"/>
               <a:t>Click to edit Master title style</a:t>
             </a:r>
-            <a:endParaRPr lang="en-US"/>
           </a:p>
         </p:txBody>
       </p:sp>
@@ -6762,38 +6536,37 @@
           <a:p>
             <a:pPr lvl="0"/>
             <a:r>
-              <a:rPr lang="en-US" smtClean="0"/>
+              <a:rPr lang="en-US"/>
               <a:t>Click to edit Master text styles</a:t>
             </a:r>
           </a:p>
           <a:p>
             <a:pPr lvl="1"/>
             <a:r>
-              <a:rPr lang="en-US" smtClean="0"/>
+              <a:rPr lang="en-US"/>
               <a:t>Second level</a:t>
             </a:r>
           </a:p>
           <a:p>
             <a:pPr lvl="2"/>
             <a:r>
-              <a:rPr lang="en-US" smtClean="0"/>
+              <a:rPr lang="en-US"/>
               <a:t>Third level</a:t>
             </a:r>
           </a:p>
           <a:p>
             <a:pPr lvl="3"/>
             <a:r>
-              <a:rPr lang="en-US" smtClean="0"/>
+              <a:rPr lang="en-US"/>
               <a:t>Fourth level</a:t>
             </a:r>
           </a:p>
           <a:p>
             <a:pPr lvl="4"/>
             <a:r>
-              <a:rPr lang="en-US" smtClean="0"/>
+              <a:rPr lang="en-US"/>
               <a:t>Fifth level</a:t>
             </a:r>
-            <a:endParaRPr lang="en-US"/>
           </a:p>
         </p:txBody>
       </p:sp>
@@ -6832,7 +6605,7 @@
           <a:p>
             <a:fld id="{5BCAD085-E8A6-8845-BD4E-CB4CCA059FC4}" type="datetimeFigureOut">
               <a:rPr lang="en-US" smtClean="0"/>
-              <a:t>1/27/13</a:t>
+              <a:t>8/19/2026</a:t>
             </a:fld>
             <a:endParaRPr lang="en-US"/>
           </a:p>
@@ -7191,7 +6964,7 @@
 </file>
 
 <file path=ppt/slides/slide1.xml><?xml version="1.0" encoding="utf-8"?>
-<p:sld xmlns:a="http://schemas.openxmlformats.org/drawingml/2006/main" xmlns:p="http://schemas.openxmlformats.org/presentationml/2006/main" xmlns:r="http://schemas.openxmlformats.org/officeDocument/2006/relationships">
+<p:sld xmlns:a="http://schemas.openxmlformats.org/drawingml/2006/main" xmlns:r="http://schemas.openxmlformats.org/officeDocument/2006/relationships" xmlns:p="http://schemas.openxmlformats.org/presentationml/2006/main">
   <p:cSld>
     <p:bg>
       <p:bgPr>
@@ -7207,7 +6980,14 @@
         <p:cNvGrpSpPr/>
         <p:nvPr/>
       </p:nvGrpSpPr>
-      <p:grpSpPr/>
+      <p:grpSpPr>
+        <a:xfrm>
+          <a:off x="0" y="0"/>
+          <a:ext cx="0" cy="0"/>
+          <a:chOff x="0" y="0"/>
+          <a:chExt cx="0" cy="0"/>
+        </a:xfrm>
+      </p:grpSpPr>
       <p:sp>
         <p:nvSpPr>
           <p:cNvPr id="2" name="Rectangle 1"/>
@@ -7249,6 +7029,7 @@
           <a:lstStyle/>
           <a:p>
             <a:pPr algn="ctr"/>
+            <a:endParaRPr/>
           </a:p>
         </p:txBody>
       </p:sp>
@@ -7261,7 +7042,7 @@
         <p:spPr>
           <a:xfrm>
             <a:off x="1188720" y="1463040"/>
-            <a:ext cx="10058400" cy="548640"/>
+            <a:ext cx="10058400" cy="369332"/>
           </a:xfrm>
           <a:prstGeom prst="rect">
             <a:avLst/>
@@ -7288,7 +7069,62 @@
                 <a:ea typeface="Malgun Gothic"/>
                 <a:cs typeface="Malgun Gothic"/>
               </a:rPr>
-              <a:t>Oracle PL/SQL 7일 실무·DBA 운영자동화 과정  ·  제2장</a:t>
+              <a:t>Oracle PL/SQL 실무·DBA</a:t>
+            </a:r>
+            <a:r>
+              <a:rPr sz="1800" b="1" dirty="0">
+                <a:solidFill>
+                  <a:srgbClr val="C0392B"/>
+                </a:solidFill>
+                <a:latin typeface="Malgun Gothic"/>
+                <a:ea typeface="Malgun Gothic"/>
+                <a:cs typeface="Malgun Gothic"/>
+              </a:rPr>
+              <a:t> </a:t>
+            </a:r>
+            <a:r>
+              <a:rPr sz="1800" b="1" dirty="0" err="1">
+                <a:solidFill>
+                  <a:srgbClr val="C0392B"/>
+                </a:solidFill>
+                <a:latin typeface="Malgun Gothic"/>
+                <a:ea typeface="Malgun Gothic"/>
+                <a:cs typeface="Malgun Gothic"/>
+              </a:rPr>
+              <a:t>운영자동화</a:t>
+            </a:r>
+            <a:r>
+              <a:rPr sz="1800" b="1" dirty="0">
+                <a:solidFill>
+                  <a:srgbClr val="C0392B"/>
+                </a:solidFill>
+                <a:latin typeface="Malgun Gothic"/>
+                <a:ea typeface="Malgun Gothic"/>
+                <a:cs typeface="Malgun Gothic"/>
+              </a:rPr>
+              <a:t> </a:t>
+            </a:r>
+            <a:r>
+              <a:rPr sz="1800" b="1" dirty="0" err="1">
+                <a:solidFill>
+                  <a:srgbClr val="C0392B"/>
+                </a:solidFill>
+                <a:latin typeface="Malgun Gothic"/>
+                <a:ea typeface="Malgun Gothic"/>
+                <a:cs typeface="Malgun Gothic"/>
+              </a:rPr>
+              <a:t>과정</a:t>
+            </a:r>
+            <a:r>
+              <a:rPr sz="1800" b="1" dirty="0">
+                <a:solidFill>
+                  <a:srgbClr val="C0392B"/>
+                </a:solidFill>
+                <a:latin typeface="Malgun Gothic"/>
+                <a:ea typeface="Malgun Gothic"/>
+                <a:cs typeface="Malgun Gothic"/>
+              </a:rPr>
+              <a:t>  ·  제2장</a:t>
             </a:r>
           </a:p>
         </p:txBody>
@@ -7384,7 +7220,7 @@
 </file>
 
 <file path=ppt/slides/slide10.xml><?xml version="1.0" encoding="utf-8"?>
-<p:sld xmlns:a="http://schemas.openxmlformats.org/drawingml/2006/main" xmlns:p="http://schemas.openxmlformats.org/presentationml/2006/main" xmlns:r="http://schemas.openxmlformats.org/officeDocument/2006/relationships">
+<p:sld xmlns:a="http://schemas.openxmlformats.org/drawingml/2006/main" xmlns:r="http://schemas.openxmlformats.org/officeDocument/2006/relationships" xmlns:p="http://schemas.openxmlformats.org/presentationml/2006/main">
   <p:cSld>
     <p:bg>
       <p:bgPr>
@@ -7400,7 +7236,14 @@
         <p:cNvGrpSpPr/>
         <p:nvPr/>
       </p:nvGrpSpPr>
-      <p:grpSpPr/>
+      <p:grpSpPr>
+        <a:xfrm>
+          <a:off x="0" y="0"/>
+          <a:ext cx="0" cy="0"/>
+          <a:chOff x="0" y="0"/>
+          <a:chExt cx="0" cy="0"/>
+        </a:xfrm>
+      </p:grpSpPr>
       <p:sp>
         <p:nvSpPr>
           <p:cNvPr id="2" name="TextBox 1"/>
@@ -7409,8 +7252,8 @@
         </p:nvSpPr>
         <p:spPr>
           <a:xfrm>
-            <a:off x="822960" y="1371600"/>
-            <a:ext cx="2743200" cy="1371600"/>
+            <a:off x="822959" y="1371600"/>
+            <a:ext cx="3887585" cy="1107996"/>
           </a:xfrm>
           <a:prstGeom prst="rect">
             <a:avLst/>
@@ -7429,7 +7272,7 @@
               </a:spcAft>
             </a:pPr>
             <a:r>
-              <a:rPr sz="6600" b="1">
+              <a:rPr sz="6600" b="1" dirty="0">
                 <a:solidFill>
                   <a:srgbClr val="C0392B"/>
                 </a:solidFill>
@@ -7524,6 +7367,7 @@
           <a:lstStyle/>
           <a:p>
             <a:pPr algn="ctr"/>
+            <a:endParaRPr/>
           </a:p>
         </p:txBody>
       </p:sp>
@@ -7613,7 +7457,7 @@
 </file>
 
 <file path=ppt/slides/slide11.xml><?xml version="1.0" encoding="utf-8"?>
-<p:sld xmlns:a="http://schemas.openxmlformats.org/drawingml/2006/main" xmlns:p="http://schemas.openxmlformats.org/presentationml/2006/main" xmlns:r="http://schemas.openxmlformats.org/officeDocument/2006/relationships">
+<p:sld xmlns:a="http://schemas.openxmlformats.org/drawingml/2006/main" xmlns:r="http://schemas.openxmlformats.org/officeDocument/2006/relationships" xmlns:p="http://schemas.openxmlformats.org/presentationml/2006/main">
   <p:cSld>
     <p:bg>
       <p:bgPr>
@@ -7629,7 +7473,14 @@
         <p:cNvGrpSpPr/>
         <p:nvPr/>
       </p:nvGrpSpPr>
-      <p:grpSpPr/>
+      <p:grpSpPr>
+        <a:xfrm>
+          <a:off x="0" y="0"/>
+          <a:ext cx="0" cy="0"/>
+          <a:chOff x="0" y="0"/>
+          <a:chExt cx="0" cy="0"/>
+        </a:xfrm>
+      </p:grpSpPr>
       <p:sp>
         <p:nvSpPr>
           <p:cNvPr id="2" name="Rectangle 1"/>
@@ -7671,6 +7522,7 @@
           <a:lstStyle/>
           <a:p>
             <a:pPr algn="ctr"/>
+            <a:endParaRPr/>
           </a:p>
         </p:txBody>
       </p:sp>
@@ -7905,6 +7757,7 @@
           <a:lstStyle/>
           <a:p>
             <a:pPr algn="ctr"/>
+            <a:endParaRPr/>
           </a:p>
         </p:txBody>
       </p:sp>
@@ -7949,6 +7802,7 @@
           <a:lstStyle/>
           <a:p>
             <a:pPr algn="ctr"/>
+            <a:endParaRPr/>
           </a:p>
         </p:txBody>
       </p:sp>
@@ -8008,7 +7862,7 @@
 </file>
 
 <file path=ppt/slides/slide12.xml><?xml version="1.0" encoding="utf-8"?>
-<p:sld xmlns:a="http://schemas.openxmlformats.org/drawingml/2006/main" xmlns:p="http://schemas.openxmlformats.org/presentationml/2006/main" xmlns:r="http://schemas.openxmlformats.org/officeDocument/2006/relationships">
+<p:sld xmlns:a="http://schemas.openxmlformats.org/drawingml/2006/main" xmlns:r="http://schemas.openxmlformats.org/officeDocument/2006/relationships" xmlns:p="http://schemas.openxmlformats.org/presentationml/2006/main">
   <p:cSld>
     <p:bg>
       <p:bgPr>
@@ -8024,7 +7878,14 @@
         <p:cNvGrpSpPr/>
         <p:nvPr/>
       </p:nvGrpSpPr>
-      <p:grpSpPr/>
+      <p:grpSpPr>
+        <a:xfrm>
+          <a:off x="0" y="0"/>
+          <a:ext cx="0" cy="0"/>
+          <a:chOff x="0" y="0"/>
+          <a:chExt cx="0" cy="0"/>
+        </a:xfrm>
+      </p:grpSpPr>
       <p:sp>
         <p:nvSpPr>
           <p:cNvPr id="2" name="Rectangle 1"/>
@@ -8066,6 +7927,7 @@
           <a:lstStyle/>
           <a:p>
             <a:pPr algn="ctr"/>
+            <a:endParaRPr/>
           </a:p>
         </p:txBody>
       </p:sp>
@@ -8192,6 +8054,7 @@
           <a:lstStyle/>
           <a:p>
             <a:pPr algn="ctr"/>
+            <a:endParaRPr/>
           </a:p>
         </p:txBody>
       </p:sp>
@@ -8626,7 +8489,7 @@
 </file>
 
 <file path=ppt/slides/slide13.xml><?xml version="1.0" encoding="utf-8"?>
-<p:sld xmlns:a="http://schemas.openxmlformats.org/drawingml/2006/main" xmlns:p="http://schemas.openxmlformats.org/presentationml/2006/main" xmlns:r="http://schemas.openxmlformats.org/officeDocument/2006/relationships">
+<p:sld xmlns:a="http://schemas.openxmlformats.org/drawingml/2006/main" xmlns:r="http://schemas.openxmlformats.org/officeDocument/2006/relationships" xmlns:p="http://schemas.openxmlformats.org/presentationml/2006/main">
   <p:cSld>
     <p:bg>
       <p:bgPr>
@@ -8642,7 +8505,14 @@
         <p:cNvGrpSpPr/>
         <p:nvPr/>
       </p:nvGrpSpPr>
-      <p:grpSpPr/>
+      <p:grpSpPr>
+        <a:xfrm>
+          <a:off x="0" y="0"/>
+          <a:ext cx="0" cy="0"/>
+          <a:chOff x="0" y="0"/>
+          <a:chExt cx="0" cy="0"/>
+        </a:xfrm>
+      </p:grpSpPr>
       <p:sp>
         <p:nvSpPr>
           <p:cNvPr id="2" name="Rectangle 1"/>
@@ -8684,6 +8554,7 @@
           <a:lstStyle/>
           <a:p>
             <a:pPr algn="ctr"/>
+            <a:endParaRPr/>
           </a:p>
         </p:txBody>
       </p:sp>
@@ -8936,6 +8807,7 @@
           <a:lstStyle/>
           <a:p>
             <a:pPr algn="ctr"/>
+            <a:endParaRPr/>
           </a:p>
         </p:txBody>
       </p:sp>
@@ -8980,6 +8852,7 @@
           <a:lstStyle/>
           <a:p>
             <a:pPr algn="ctr"/>
+            <a:endParaRPr/>
           </a:p>
         </p:txBody>
       </p:sp>
@@ -9039,7 +8912,7 @@
 </file>
 
 <file path=ppt/slides/slide14.xml><?xml version="1.0" encoding="utf-8"?>
-<p:sld xmlns:a="http://schemas.openxmlformats.org/drawingml/2006/main" xmlns:p="http://schemas.openxmlformats.org/presentationml/2006/main" xmlns:r="http://schemas.openxmlformats.org/officeDocument/2006/relationships">
+<p:sld xmlns:a="http://schemas.openxmlformats.org/drawingml/2006/main" xmlns:r="http://schemas.openxmlformats.org/officeDocument/2006/relationships" xmlns:p="http://schemas.openxmlformats.org/presentationml/2006/main">
   <p:cSld>
     <p:bg>
       <p:bgPr>
@@ -9055,7 +8928,14 @@
         <p:cNvGrpSpPr/>
         <p:nvPr/>
       </p:nvGrpSpPr>
-      <p:grpSpPr/>
+      <p:grpSpPr>
+        <a:xfrm>
+          <a:off x="0" y="0"/>
+          <a:ext cx="0" cy="0"/>
+          <a:chOff x="0" y="0"/>
+          <a:chExt cx="0" cy="0"/>
+        </a:xfrm>
+      </p:grpSpPr>
       <p:sp>
         <p:nvSpPr>
           <p:cNvPr id="2" name="Rectangle 1"/>
@@ -9097,6 +8977,7 @@
           <a:lstStyle/>
           <a:p>
             <a:pPr algn="ctr"/>
+            <a:endParaRPr/>
           </a:p>
         </p:txBody>
       </p:sp>
@@ -9223,6 +9104,7 @@
           <a:lstStyle/>
           <a:p>
             <a:pPr algn="ctr"/>
+            <a:endParaRPr/>
           </a:p>
         </p:txBody>
       </p:sp>
@@ -9720,7 +9602,7 @@
 </file>
 
 <file path=ppt/slides/slide15.xml><?xml version="1.0" encoding="utf-8"?>
-<p:sld xmlns:a="http://schemas.openxmlformats.org/drawingml/2006/main" xmlns:p="http://schemas.openxmlformats.org/presentationml/2006/main" xmlns:r="http://schemas.openxmlformats.org/officeDocument/2006/relationships">
+<p:sld xmlns:a="http://schemas.openxmlformats.org/drawingml/2006/main" xmlns:r="http://schemas.openxmlformats.org/officeDocument/2006/relationships" xmlns:p="http://schemas.openxmlformats.org/presentationml/2006/main">
   <p:cSld>
     <p:bg>
       <p:bgPr>
@@ -9736,7 +9618,14 @@
         <p:cNvGrpSpPr/>
         <p:nvPr/>
       </p:nvGrpSpPr>
-      <p:grpSpPr/>
+      <p:grpSpPr>
+        <a:xfrm>
+          <a:off x="0" y="0"/>
+          <a:ext cx="0" cy="0"/>
+          <a:chOff x="0" y="0"/>
+          <a:chExt cx="0" cy="0"/>
+        </a:xfrm>
+      </p:grpSpPr>
       <p:sp>
         <p:nvSpPr>
           <p:cNvPr id="2" name="Rectangle 1"/>
@@ -9778,6 +9667,7 @@
           <a:lstStyle/>
           <a:p>
             <a:pPr algn="ctr"/>
+            <a:endParaRPr/>
           </a:p>
         </p:txBody>
       </p:sp>
@@ -9998,7 +9888,7 @@
 </file>
 
 <file path=ppt/slides/slide16.xml><?xml version="1.0" encoding="utf-8"?>
-<p:sld xmlns:a="http://schemas.openxmlformats.org/drawingml/2006/main" xmlns:p="http://schemas.openxmlformats.org/presentationml/2006/main" xmlns:r="http://schemas.openxmlformats.org/officeDocument/2006/relationships">
+<p:sld xmlns:a="http://schemas.openxmlformats.org/drawingml/2006/main" xmlns:r="http://schemas.openxmlformats.org/officeDocument/2006/relationships" xmlns:p="http://schemas.openxmlformats.org/presentationml/2006/main">
   <p:cSld>
     <p:bg>
       <p:bgPr>
@@ -10014,7 +9904,14 @@
         <p:cNvGrpSpPr/>
         <p:nvPr/>
       </p:nvGrpSpPr>
-      <p:grpSpPr/>
+      <p:grpSpPr>
+        <a:xfrm>
+          <a:off x="0" y="0"/>
+          <a:ext cx="0" cy="0"/>
+          <a:chOff x="0" y="0"/>
+          <a:chExt cx="0" cy="0"/>
+        </a:xfrm>
+      </p:grpSpPr>
       <p:sp>
         <p:nvSpPr>
           <p:cNvPr id="2" name="TextBox 1"/>
@@ -10023,8 +9920,8 @@
         </p:nvSpPr>
         <p:spPr>
           <a:xfrm>
-            <a:off x="822960" y="1371600"/>
-            <a:ext cx="2743200" cy="1371600"/>
+            <a:off x="822959" y="1371600"/>
+            <a:ext cx="3979949" cy="1107996"/>
           </a:xfrm>
           <a:prstGeom prst="rect">
             <a:avLst/>
@@ -10043,7 +9940,7 @@
               </a:spcAft>
             </a:pPr>
             <a:r>
-              <a:rPr sz="6600" b="1">
+              <a:rPr sz="6600" b="1" dirty="0">
                 <a:solidFill>
                   <a:srgbClr val="C0392B"/>
                 </a:solidFill>
@@ -10138,6 +10035,7 @@
           <a:lstStyle/>
           <a:p>
             <a:pPr algn="ctr"/>
+            <a:endParaRPr/>
           </a:p>
         </p:txBody>
       </p:sp>
@@ -10227,7 +10125,7 @@
 </file>
 
 <file path=ppt/slides/slide17.xml><?xml version="1.0" encoding="utf-8"?>
-<p:sld xmlns:a="http://schemas.openxmlformats.org/drawingml/2006/main" xmlns:p="http://schemas.openxmlformats.org/presentationml/2006/main" xmlns:r="http://schemas.openxmlformats.org/officeDocument/2006/relationships">
+<p:sld xmlns:a="http://schemas.openxmlformats.org/drawingml/2006/main" xmlns:r="http://schemas.openxmlformats.org/officeDocument/2006/relationships" xmlns:p="http://schemas.openxmlformats.org/presentationml/2006/main">
   <p:cSld>
     <p:bg>
       <p:bgPr>
@@ -10243,7 +10141,14 @@
         <p:cNvGrpSpPr/>
         <p:nvPr/>
       </p:nvGrpSpPr>
-      <p:grpSpPr/>
+      <p:grpSpPr>
+        <a:xfrm>
+          <a:off x="0" y="0"/>
+          <a:ext cx="0" cy="0"/>
+          <a:chOff x="0" y="0"/>
+          <a:chExt cx="0" cy="0"/>
+        </a:xfrm>
+      </p:grpSpPr>
       <p:sp>
         <p:nvSpPr>
           <p:cNvPr id="2" name="Rectangle 1"/>
@@ -10285,6 +10190,7 @@
           <a:lstStyle/>
           <a:p>
             <a:pPr algn="ctr"/>
+            <a:endParaRPr/>
           </a:p>
         </p:txBody>
       </p:sp>
@@ -10487,7 +10393,7 @@
 </file>
 
 <file path=ppt/slides/slide18.xml><?xml version="1.0" encoding="utf-8"?>
-<p:sld xmlns:a="http://schemas.openxmlformats.org/drawingml/2006/main" xmlns:p="http://schemas.openxmlformats.org/presentationml/2006/main" xmlns:r="http://schemas.openxmlformats.org/officeDocument/2006/relationships">
+<p:sld xmlns:a="http://schemas.openxmlformats.org/drawingml/2006/main" xmlns:r="http://schemas.openxmlformats.org/officeDocument/2006/relationships" xmlns:p="http://schemas.openxmlformats.org/presentationml/2006/main">
   <p:cSld>
     <p:bg>
       <p:bgPr>
@@ -10503,7 +10409,14 @@
         <p:cNvGrpSpPr/>
         <p:nvPr/>
       </p:nvGrpSpPr>
-      <p:grpSpPr/>
+      <p:grpSpPr>
+        <a:xfrm>
+          <a:off x="0" y="0"/>
+          <a:ext cx="0" cy="0"/>
+          <a:chOff x="0" y="0"/>
+          <a:chExt cx="0" cy="0"/>
+        </a:xfrm>
+      </p:grpSpPr>
       <p:sp>
         <p:nvSpPr>
           <p:cNvPr id="2" name="Rectangle 1"/>
@@ -10545,6 +10458,7 @@
           <a:lstStyle/>
           <a:p>
             <a:pPr algn="ctr"/>
+            <a:endParaRPr/>
           </a:p>
         </p:txBody>
       </p:sp>
@@ -10671,6 +10585,7 @@
           <a:lstStyle/>
           <a:p>
             <a:pPr algn="ctr"/>
+            <a:endParaRPr/>
           </a:p>
         </p:txBody>
       </p:sp>
@@ -10979,7 +10894,7 @@
 </file>
 
 <file path=ppt/slides/slide19.xml><?xml version="1.0" encoding="utf-8"?>
-<p:sld xmlns:a="http://schemas.openxmlformats.org/drawingml/2006/main" xmlns:p="http://schemas.openxmlformats.org/presentationml/2006/main" xmlns:r="http://schemas.openxmlformats.org/officeDocument/2006/relationships">
+<p:sld xmlns:a="http://schemas.openxmlformats.org/drawingml/2006/main" xmlns:r="http://schemas.openxmlformats.org/officeDocument/2006/relationships" xmlns:p="http://schemas.openxmlformats.org/presentationml/2006/main">
   <p:cSld>
     <p:bg>
       <p:bgPr>
@@ -10995,7 +10910,14 @@
         <p:cNvGrpSpPr/>
         <p:nvPr/>
       </p:nvGrpSpPr>
-      <p:grpSpPr/>
+      <p:grpSpPr>
+        <a:xfrm>
+          <a:off x="0" y="0"/>
+          <a:ext cx="0" cy="0"/>
+          <a:chOff x="0" y="0"/>
+          <a:chExt cx="0" cy="0"/>
+        </a:xfrm>
+      </p:grpSpPr>
       <p:sp>
         <p:nvSpPr>
           <p:cNvPr id="2" name="Rectangle 1"/>
@@ -11037,6 +10959,7 @@
           <a:lstStyle/>
           <a:p>
             <a:pPr algn="ctr"/>
+            <a:endParaRPr/>
           </a:p>
         </p:txBody>
       </p:sp>
@@ -11289,6 +11212,7 @@
           <a:lstStyle/>
           <a:p>
             <a:pPr algn="ctr"/>
+            <a:endParaRPr/>
           </a:p>
         </p:txBody>
       </p:sp>
@@ -11333,6 +11257,7 @@
           <a:lstStyle/>
           <a:p>
             <a:pPr algn="ctr"/>
+            <a:endParaRPr/>
           </a:p>
         </p:txBody>
       </p:sp>
@@ -11392,7 +11317,7 @@
 </file>
 
 <file path=ppt/slides/slide2.xml><?xml version="1.0" encoding="utf-8"?>
-<p:sld xmlns:a="http://schemas.openxmlformats.org/drawingml/2006/main" xmlns:p="http://schemas.openxmlformats.org/presentationml/2006/main" xmlns:r="http://schemas.openxmlformats.org/officeDocument/2006/relationships">
+<p:sld xmlns:a="http://schemas.openxmlformats.org/drawingml/2006/main" xmlns:r="http://schemas.openxmlformats.org/officeDocument/2006/relationships" xmlns:p="http://schemas.openxmlformats.org/presentationml/2006/main">
   <p:cSld>
     <p:bg>
       <p:bgPr>
@@ -11408,7 +11333,14 @@
         <p:cNvGrpSpPr/>
         <p:nvPr/>
       </p:nvGrpSpPr>
-      <p:grpSpPr/>
+      <p:grpSpPr>
+        <a:xfrm>
+          <a:off x="0" y="0"/>
+          <a:ext cx="0" cy="0"/>
+          <a:chOff x="0" y="0"/>
+          <a:chExt cx="0" cy="0"/>
+        </a:xfrm>
+      </p:grpSpPr>
       <p:sp>
         <p:nvSpPr>
           <p:cNvPr id="2" name="Rectangle 1"/>
@@ -11450,6 +11382,7 @@
           <a:lstStyle/>
           <a:p>
             <a:pPr algn="ctr"/>
+            <a:endParaRPr/>
           </a:p>
         </p:txBody>
       </p:sp>
@@ -11742,7 +11675,7 @@
 </file>
 
 <file path=ppt/slides/slide20.xml><?xml version="1.0" encoding="utf-8"?>
-<p:sld xmlns:a="http://schemas.openxmlformats.org/drawingml/2006/main" xmlns:p="http://schemas.openxmlformats.org/presentationml/2006/main" xmlns:r="http://schemas.openxmlformats.org/officeDocument/2006/relationships">
+<p:sld xmlns:a="http://schemas.openxmlformats.org/drawingml/2006/main" xmlns:r="http://schemas.openxmlformats.org/officeDocument/2006/relationships" xmlns:p="http://schemas.openxmlformats.org/presentationml/2006/main">
   <p:cSld>
     <p:bg>
       <p:bgPr>
@@ -11758,7 +11691,14 @@
         <p:cNvGrpSpPr/>
         <p:nvPr/>
       </p:nvGrpSpPr>
-      <p:grpSpPr/>
+      <p:grpSpPr>
+        <a:xfrm>
+          <a:off x="0" y="0"/>
+          <a:ext cx="0" cy="0"/>
+          <a:chOff x="0" y="0"/>
+          <a:chExt cx="0" cy="0"/>
+        </a:xfrm>
+      </p:grpSpPr>
       <p:sp>
         <p:nvSpPr>
           <p:cNvPr id="2" name="Rectangle 1"/>
@@ -11800,6 +11740,7 @@
           <a:lstStyle/>
           <a:p>
             <a:pPr algn="ctr"/>
+            <a:endParaRPr/>
           </a:p>
         </p:txBody>
       </p:sp>
@@ -11926,6 +11867,7 @@
           <a:lstStyle/>
           <a:p>
             <a:pPr algn="ctr"/>
+            <a:endParaRPr/>
           </a:p>
         </p:txBody>
       </p:sp>
@@ -12276,7 +12218,7 @@
 </file>
 
 <file path=ppt/slides/slide21.xml><?xml version="1.0" encoding="utf-8"?>
-<p:sld xmlns:a="http://schemas.openxmlformats.org/drawingml/2006/main" xmlns:p="http://schemas.openxmlformats.org/presentationml/2006/main" xmlns:r="http://schemas.openxmlformats.org/officeDocument/2006/relationships">
+<p:sld xmlns:a="http://schemas.openxmlformats.org/drawingml/2006/main" xmlns:r="http://schemas.openxmlformats.org/officeDocument/2006/relationships" xmlns:p="http://schemas.openxmlformats.org/presentationml/2006/main">
   <p:cSld>
     <p:bg>
       <p:bgPr>
@@ -12292,7 +12234,14 @@
         <p:cNvGrpSpPr/>
         <p:nvPr/>
       </p:nvGrpSpPr>
-      <p:grpSpPr/>
+      <p:grpSpPr>
+        <a:xfrm>
+          <a:off x="0" y="0"/>
+          <a:ext cx="0" cy="0"/>
+          <a:chOff x="0" y="0"/>
+          <a:chExt cx="0" cy="0"/>
+        </a:xfrm>
+      </p:grpSpPr>
       <p:sp>
         <p:nvSpPr>
           <p:cNvPr id="2" name="Rectangle 1"/>
@@ -12334,6 +12283,7 @@
           <a:lstStyle/>
           <a:p>
             <a:pPr algn="ctr"/>
+            <a:endParaRPr/>
           </a:p>
         </p:txBody>
       </p:sp>
@@ -12568,6 +12518,7 @@
           <a:lstStyle/>
           <a:p>
             <a:pPr algn="ctr"/>
+            <a:endParaRPr/>
           </a:p>
         </p:txBody>
       </p:sp>
@@ -12612,6 +12563,7 @@
           <a:lstStyle/>
           <a:p>
             <a:pPr algn="ctr"/>
+            <a:endParaRPr/>
           </a:p>
         </p:txBody>
       </p:sp>
@@ -12671,7 +12623,7 @@
 </file>
 
 <file path=ppt/slides/slide22.xml><?xml version="1.0" encoding="utf-8"?>
-<p:sld xmlns:a="http://schemas.openxmlformats.org/drawingml/2006/main" xmlns:p="http://schemas.openxmlformats.org/presentationml/2006/main" xmlns:r="http://schemas.openxmlformats.org/officeDocument/2006/relationships">
+<p:sld xmlns:a="http://schemas.openxmlformats.org/drawingml/2006/main" xmlns:r="http://schemas.openxmlformats.org/officeDocument/2006/relationships" xmlns:p="http://schemas.openxmlformats.org/presentationml/2006/main">
   <p:cSld>
     <p:bg>
       <p:bgPr>
@@ -12687,7 +12639,14 @@
         <p:cNvGrpSpPr/>
         <p:nvPr/>
       </p:nvGrpSpPr>
-      <p:grpSpPr/>
+      <p:grpSpPr>
+        <a:xfrm>
+          <a:off x="0" y="0"/>
+          <a:ext cx="0" cy="0"/>
+          <a:chOff x="0" y="0"/>
+          <a:chExt cx="0" cy="0"/>
+        </a:xfrm>
+      </p:grpSpPr>
       <p:sp>
         <p:nvSpPr>
           <p:cNvPr id="2" name="Rectangle 1"/>
@@ -12729,6 +12688,7 @@
           <a:lstStyle/>
           <a:p>
             <a:pPr algn="ctr"/>
+            <a:endParaRPr/>
           </a:p>
         </p:txBody>
       </p:sp>
@@ -12855,6 +12815,7 @@
           <a:lstStyle/>
           <a:p>
             <a:pPr algn="ctr"/>
+            <a:endParaRPr/>
           </a:p>
         </p:txBody>
       </p:sp>
@@ -13121,7 +13082,7 @@
 </file>
 
 <file path=ppt/slides/slide23.xml><?xml version="1.0" encoding="utf-8"?>
-<p:sld xmlns:a="http://schemas.openxmlformats.org/drawingml/2006/main" xmlns:p="http://schemas.openxmlformats.org/presentationml/2006/main" xmlns:r="http://schemas.openxmlformats.org/officeDocument/2006/relationships">
+<p:sld xmlns:a="http://schemas.openxmlformats.org/drawingml/2006/main" xmlns:r="http://schemas.openxmlformats.org/officeDocument/2006/relationships" xmlns:p="http://schemas.openxmlformats.org/presentationml/2006/main">
   <p:cSld>
     <p:bg>
       <p:bgPr>
@@ -13137,7 +13098,14 @@
         <p:cNvGrpSpPr/>
         <p:nvPr/>
       </p:nvGrpSpPr>
-      <p:grpSpPr/>
+      <p:grpSpPr>
+        <a:xfrm>
+          <a:off x="0" y="0"/>
+          <a:ext cx="0" cy="0"/>
+          <a:chOff x="0" y="0"/>
+          <a:chExt cx="0" cy="0"/>
+        </a:xfrm>
+      </p:grpSpPr>
       <p:sp>
         <p:nvSpPr>
           <p:cNvPr id="2" name="TextBox 1"/>
@@ -13146,8 +13114,8 @@
         </p:nvSpPr>
         <p:spPr>
           <a:xfrm>
-            <a:off x="822960" y="1371600"/>
-            <a:ext cx="2743200" cy="1371600"/>
+            <a:off x="822959" y="1371600"/>
+            <a:ext cx="4229331" cy="1107996"/>
           </a:xfrm>
           <a:prstGeom prst="rect">
             <a:avLst/>
@@ -13166,7 +13134,7 @@
               </a:spcAft>
             </a:pPr>
             <a:r>
-              <a:rPr sz="6600" b="1">
+              <a:rPr sz="6600" b="1" dirty="0">
                 <a:solidFill>
                   <a:srgbClr val="C0392B"/>
                 </a:solidFill>
@@ -13261,6 +13229,7 @@
           <a:lstStyle/>
           <a:p>
             <a:pPr algn="ctr"/>
+            <a:endParaRPr/>
           </a:p>
         </p:txBody>
       </p:sp>
@@ -13350,7 +13319,7 @@
 </file>
 
 <file path=ppt/slides/slide24.xml><?xml version="1.0" encoding="utf-8"?>
-<p:sld xmlns:a="http://schemas.openxmlformats.org/drawingml/2006/main" xmlns:p="http://schemas.openxmlformats.org/presentationml/2006/main" xmlns:r="http://schemas.openxmlformats.org/officeDocument/2006/relationships">
+<p:sld xmlns:a="http://schemas.openxmlformats.org/drawingml/2006/main" xmlns:r="http://schemas.openxmlformats.org/officeDocument/2006/relationships" xmlns:p="http://schemas.openxmlformats.org/presentationml/2006/main">
   <p:cSld>
     <p:bg>
       <p:bgPr>
@@ -13366,7 +13335,14 @@
         <p:cNvGrpSpPr/>
         <p:nvPr/>
       </p:nvGrpSpPr>
-      <p:grpSpPr/>
+      <p:grpSpPr>
+        <a:xfrm>
+          <a:off x="0" y="0"/>
+          <a:ext cx="0" cy="0"/>
+          <a:chOff x="0" y="0"/>
+          <a:chExt cx="0" cy="0"/>
+        </a:xfrm>
+      </p:grpSpPr>
       <p:sp>
         <p:nvSpPr>
           <p:cNvPr id="2" name="Rectangle 1"/>
@@ -13408,6 +13384,7 @@
           <a:lstStyle/>
           <a:p>
             <a:pPr algn="ctr"/>
+            <a:endParaRPr/>
           </a:p>
         </p:txBody>
       </p:sp>
@@ -13678,6 +13655,7 @@
           <a:lstStyle/>
           <a:p>
             <a:pPr algn="ctr"/>
+            <a:endParaRPr/>
           </a:p>
         </p:txBody>
       </p:sp>
@@ -13722,6 +13700,7 @@
           <a:lstStyle/>
           <a:p>
             <a:pPr algn="ctr"/>
+            <a:endParaRPr/>
           </a:p>
         </p:txBody>
       </p:sp>
@@ -13781,7 +13760,7 @@
 </file>
 
 <file path=ppt/slides/slide25.xml><?xml version="1.0" encoding="utf-8"?>
-<p:sld xmlns:a="http://schemas.openxmlformats.org/drawingml/2006/main" xmlns:p="http://schemas.openxmlformats.org/presentationml/2006/main" xmlns:r="http://schemas.openxmlformats.org/officeDocument/2006/relationships">
+<p:sld xmlns:a="http://schemas.openxmlformats.org/drawingml/2006/main" xmlns:r="http://schemas.openxmlformats.org/officeDocument/2006/relationships" xmlns:p="http://schemas.openxmlformats.org/presentationml/2006/main">
   <p:cSld>
     <p:bg>
       <p:bgPr>
@@ -13797,7 +13776,14 @@
         <p:cNvGrpSpPr/>
         <p:nvPr/>
       </p:nvGrpSpPr>
-      <p:grpSpPr/>
+      <p:grpSpPr>
+        <a:xfrm>
+          <a:off x="0" y="0"/>
+          <a:ext cx="0" cy="0"/>
+          <a:chOff x="0" y="0"/>
+          <a:chExt cx="0" cy="0"/>
+        </a:xfrm>
+      </p:grpSpPr>
       <p:sp>
         <p:nvSpPr>
           <p:cNvPr id="2" name="Rectangle 1"/>
@@ -13839,6 +13825,7 @@
           <a:lstStyle/>
           <a:p>
             <a:pPr algn="ctr"/>
+            <a:endParaRPr/>
           </a:p>
         </p:txBody>
       </p:sp>
@@ -13965,6 +13952,7 @@
           <a:lstStyle/>
           <a:p>
             <a:pPr algn="ctr"/>
+            <a:endParaRPr/>
           </a:p>
         </p:txBody>
       </p:sp>
@@ -14378,7 +14366,7 @@
 </file>
 
 <file path=ppt/slides/slide26.xml><?xml version="1.0" encoding="utf-8"?>
-<p:sld xmlns:a="http://schemas.openxmlformats.org/drawingml/2006/main" xmlns:p="http://schemas.openxmlformats.org/presentationml/2006/main" xmlns:r="http://schemas.openxmlformats.org/officeDocument/2006/relationships">
+<p:sld xmlns:a="http://schemas.openxmlformats.org/drawingml/2006/main" xmlns:r="http://schemas.openxmlformats.org/officeDocument/2006/relationships" xmlns:p="http://schemas.openxmlformats.org/presentationml/2006/main">
   <p:cSld>
     <p:bg>
       <p:bgPr>
@@ -14394,7 +14382,14 @@
         <p:cNvGrpSpPr/>
         <p:nvPr/>
       </p:nvGrpSpPr>
-      <p:grpSpPr/>
+      <p:grpSpPr>
+        <a:xfrm>
+          <a:off x="0" y="0"/>
+          <a:ext cx="0" cy="0"/>
+          <a:chOff x="0" y="0"/>
+          <a:chExt cx="0" cy="0"/>
+        </a:xfrm>
+      </p:grpSpPr>
       <p:sp>
         <p:nvSpPr>
           <p:cNvPr id="2" name="Rectangle 1"/>
@@ -14436,6 +14431,7 @@
           <a:lstStyle/>
           <a:p>
             <a:pPr algn="ctr"/>
+            <a:endParaRPr/>
           </a:p>
         </p:txBody>
       </p:sp>
@@ -14706,6 +14702,7 @@
           <a:lstStyle/>
           <a:p>
             <a:pPr algn="ctr"/>
+            <a:endParaRPr/>
           </a:p>
         </p:txBody>
       </p:sp>
@@ -14750,6 +14747,7 @@
           <a:lstStyle/>
           <a:p>
             <a:pPr algn="ctr"/>
+            <a:endParaRPr/>
           </a:p>
         </p:txBody>
       </p:sp>
@@ -14809,7 +14807,7 @@
 </file>
 
 <file path=ppt/slides/slide27.xml><?xml version="1.0" encoding="utf-8"?>
-<p:sld xmlns:a="http://schemas.openxmlformats.org/drawingml/2006/main" xmlns:p="http://schemas.openxmlformats.org/presentationml/2006/main" xmlns:r="http://schemas.openxmlformats.org/officeDocument/2006/relationships">
+<p:sld xmlns:a="http://schemas.openxmlformats.org/drawingml/2006/main" xmlns:r="http://schemas.openxmlformats.org/officeDocument/2006/relationships" xmlns:p="http://schemas.openxmlformats.org/presentationml/2006/main">
   <p:cSld>
     <p:bg>
       <p:bgPr>
@@ -14825,7 +14823,14 @@
         <p:cNvGrpSpPr/>
         <p:nvPr/>
       </p:nvGrpSpPr>
-      <p:grpSpPr/>
+      <p:grpSpPr>
+        <a:xfrm>
+          <a:off x="0" y="0"/>
+          <a:ext cx="0" cy="0"/>
+          <a:chOff x="0" y="0"/>
+          <a:chExt cx="0" cy="0"/>
+        </a:xfrm>
+      </p:grpSpPr>
       <p:sp>
         <p:nvSpPr>
           <p:cNvPr id="2" name="Rectangle 1"/>
@@ -14867,6 +14872,7 @@
           <a:lstStyle/>
           <a:p>
             <a:pPr algn="ctr"/>
+            <a:endParaRPr/>
           </a:p>
         </p:txBody>
       </p:sp>
@@ -14993,6 +14999,7 @@
           <a:lstStyle/>
           <a:p>
             <a:pPr algn="ctr"/>
+            <a:endParaRPr/>
           </a:p>
         </p:txBody>
       </p:sp>
@@ -15406,7 +15413,7 @@
 </file>
 
 <file path=ppt/slides/slide28.xml><?xml version="1.0" encoding="utf-8"?>
-<p:sld xmlns:a="http://schemas.openxmlformats.org/drawingml/2006/main" xmlns:p="http://schemas.openxmlformats.org/presentationml/2006/main" xmlns:r="http://schemas.openxmlformats.org/officeDocument/2006/relationships">
+<p:sld xmlns:a="http://schemas.openxmlformats.org/drawingml/2006/main" xmlns:r="http://schemas.openxmlformats.org/officeDocument/2006/relationships" xmlns:p="http://schemas.openxmlformats.org/presentationml/2006/main">
   <p:cSld>
     <p:bg>
       <p:bgPr>
@@ -15422,7 +15429,14 @@
         <p:cNvGrpSpPr/>
         <p:nvPr/>
       </p:nvGrpSpPr>
-      <p:grpSpPr/>
+      <p:grpSpPr>
+        <a:xfrm>
+          <a:off x="0" y="0"/>
+          <a:ext cx="0" cy="0"/>
+          <a:chOff x="0" y="0"/>
+          <a:chExt cx="0" cy="0"/>
+        </a:xfrm>
+      </p:grpSpPr>
       <p:sp>
         <p:nvSpPr>
           <p:cNvPr id="2" name="Rectangle 1"/>
@@ -15464,6 +15478,7 @@
           <a:lstStyle/>
           <a:p>
             <a:pPr algn="ctr"/>
+            <a:endParaRPr/>
           </a:p>
         </p:txBody>
       </p:sp>
@@ -15734,6 +15749,7 @@
           <a:lstStyle/>
           <a:p>
             <a:pPr algn="ctr"/>
+            <a:endParaRPr/>
           </a:p>
         </p:txBody>
       </p:sp>
@@ -15778,6 +15794,7 @@
           <a:lstStyle/>
           <a:p>
             <a:pPr algn="ctr"/>
+            <a:endParaRPr/>
           </a:p>
         </p:txBody>
       </p:sp>
@@ -15837,7 +15854,7 @@
 </file>
 
 <file path=ppt/slides/slide29.xml><?xml version="1.0" encoding="utf-8"?>
-<p:sld xmlns:a="http://schemas.openxmlformats.org/drawingml/2006/main" xmlns:p="http://schemas.openxmlformats.org/presentationml/2006/main" xmlns:r="http://schemas.openxmlformats.org/officeDocument/2006/relationships">
+<p:sld xmlns:a="http://schemas.openxmlformats.org/drawingml/2006/main" xmlns:r="http://schemas.openxmlformats.org/officeDocument/2006/relationships" xmlns:p="http://schemas.openxmlformats.org/presentationml/2006/main">
   <p:cSld>
     <p:bg>
       <p:bgPr>
@@ -15853,7 +15870,14 @@
         <p:cNvGrpSpPr/>
         <p:nvPr/>
       </p:nvGrpSpPr>
-      <p:grpSpPr/>
+      <p:grpSpPr>
+        <a:xfrm>
+          <a:off x="0" y="0"/>
+          <a:ext cx="0" cy="0"/>
+          <a:chOff x="0" y="0"/>
+          <a:chExt cx="0" cy="0"/>
+        </a:xfrm>
+      </p:grpSpPr>
       <p:sp>
         <p:nvSpPr>
           <p:cNvPr id="2" name="Rectangle 1"/>
@@ -15895,6 +15919,7 @@
           <a:lstStyle/>
           <a:p>
             <a:pPr algn="ctr"/>
+            <a:endParaRPr/>
           </a:p>
         </p:txBody>
       </p:sp>
@@ -16021,6 +16046,7 @@
           <a:lstStyle/>
           <a:p>
             <a:pPr algn="ctr"/>
+            <a:endParaRPr/>
           </a:p>
         </p:txBody>
       </p:sp>
@@ -16455,7 +16481,7 @@
 </file>
 
 <file path=ppt/slides/slide3.xml><?xml version="1.0" encoding="utf-8"?>
-<p:sld xmlns:a="http://schemas.openxmlformats.org/drawingml/2006/main" xmlns:p="http://schemas.openxmlformats.org/presentationml/2006/main" xmlns:r="http://schemas.openxmlformats.org/officeDocument/2006/relationships">
+<p:sld xmlns:a="http://schemas.openxmlformats.org/drawingml/2006/main" xmlns:r="http://schemas.openxmlformats.org/officeDocument/2006/relationships" xmlns:p="http://schemas.openxmlformats.org/presentationml/2006/main">
   <p:cSld>
     <p:bg>
       <p:bgPr>
@@ -16471,7 +16497,14 @@
         <p:cNvGrpSpPr/>
         <p:nvPr/>
       </p:nvGrpSpPr>
-      <p:grpSpPr/>
+      <p:grpSpPr>
+        <a:xfrm>
+          <a:off x="0" y="0"/>
+          <a:ext cx="0" cy="0"/>
+          <a:chOff x="0" y="0"/>
+          <a:chExt cx="0" cy="0"/>
+        </a:xfrm>
+      </p:grpSpPr>
       <p:sp>
         <p:nvSpPr>
           <p:cNvPr id="2" name="Rectangle 1"/>
@@ -16513,6 +16546,7 @@
           <a:lstStyle/>
           <a:p>
             <a:pPr algn="ctr"/>
+            <a:endParaRPr/>
           </a:p>
         </p:txBody>
       </p:sp>
@@ -16733,7 +16767,7 @@
 </file>
 
 <file path=ppt/slides/slide30.xml><?xml version="1.0" encoding="utf-8"?>
-<p:sld xmlns:a="http://schemas.openxmlformats.org/drawingml/2006/main" xmlns:p="http://schemas.openxmlformats.org/presentationml/2006/main" xmlns:r="http://schemas.openxmlformats.org/officeDocument/2006/relationships">
+<p:sld xmlns:a="http://schemas.openxmlformats.org/drawingml/2006/main" xmlns:r="http://schemas.openxmlformats.org/officeDocument/2006/relationships" xmlns:p="http://schemas.openxmlformats.org/presentationml/2006/main">
   <p:cSld>
     <p:bg>
       <p:bgPr>
@@ -16749,7 +16783,14 @@
         <p:cNvGrpSpPr/>
         <p:nvPr/>
       </p:nvGrpSpPr>
-      <p:grpSpPr/>
+      <p:grpSpPr>
+        <a:xfrm>
+          <a:off x="0" y="0"/>
+          <a:ext cx="0" cy="0"/>
+          <a:chOff x="0" y="0"/>
+          <a:chExt cx="0" cy="0"/>
+        </a:xfrm>
+      </p:grpSpPr>
       <p:sp>
         <p:nvSpPr>
           <p:cNvPr id="2" name="TextBox 1"/>
@@ -16759,7 +16800,7 @@
         <p:spPr>
           <a:xfrm>
             <a:off x="822960" y="1371600"/>
-            <a:ext cx="2743200" cy="1371600"/>
+            <a:ext cx="5273040" cy="1107996"/>
           </a:xfrm>
           <a:prstGeom prst="rect">
             <a:avLst/>
@@ -16778,7 +16819,7 @@
               </a:spcAft>
             </a:pPr>
             <a:r>
-              <a:rPr sz="6600" b="1">
+              <a:rPr sz="6600" b="1" dirty="0">
                 <a:solidFill>
                   <a:srgbClr val="C0392B"/>
                 </a:solidFill>
@@ -16873,6 +16914,7 @@
           <a:lstStyle/>
           <a:p>
             <a:pPr algn="ctr"/>
+            <a:endParaRPr/>
           </a:p>
         </p:txBody>
       </p:sp>
@@ -16962,7 +17004,7 @@
 </file>
 
 <file path=ppt/slides/slide31.xml><?xml version="1.0" encoding="utf-8"?>
-<p:sld xmlns:a="http://schemas.openxmlformats.org/drawingml/2006/main" xmlns:p="http://schemas.openxmlformats.org/presentationml/2006/main" xmlns:r="http://schemas.openxmlformats.org/officeDocument/2006/relationships">
+<p:sld xmlns:a="http://schemas.openxmlformats.org/drawingml/2006/main" xmlns:r="http://schemas.openxmlformats.org/officeDocument/2006/relationships" xmlns:p="http://schemas.openxmlformats.org/presentationml/2006/main">
   <p:cSld>
     <p:bg>
       <p:bgPr>
@@ -16978,7 +17020,14 @@
         <p:cNvGrpSpPr/>
         <p:nvPr/>
       </p:nvGrpSpPr>
-      <p:grpSpPr/>
+      <p:grpSpPr>
+        <a:xfrm>
+          <a:off x="0" y="0"/>
+          <a:ext cx="0" cy="0"/>
+          <a:chOff x="0" y="0"/>
+          <a:chExt cx="0" cy="0"/>
+        </a:xfrm>
+      </p:grpSpPr>
       <p:sp>
         <p:nvSpPr>
           <p:cNvPr id="2" name="Rectangle 1"/>
@@ -17020,6 +17069,7 @@
           <a:lstStyle/>
           <a:p>
             <a:pPr algn="ctr"/>
+            <a:endParaRPr/>
           </a:p>
         </p:txBody>
       </p:sp>
@@ -17272,6 +17322,7 @@
           <a:lstStyle/>
           <a:p>
             <a:pPr algn="ctr"/>
+            <a:endParaRPr/>
           </a:p>
         </p:txBody>
       </p:sp>
@@ -17316,6 +17367,7 @@
           <a:lstStyle/>
           <a:p>
             <a:pPr algn="ctr"/>
+            <a:endParaRPr/>
           </a:p>
         </p:txBody>
       </p:sp>
@@ -17375,7 +17427,7 @@
 </file>
 
 <file path=ppt/slides/slide32.xml><?xml version="1.0" encoding="utf-8"?>
-<p:sld xmlns:a="http://schemas.openxmlformats.org/drawingml/2006/main" xmlns:p="http://schemas.openxmlformats.org/presentationml/2006/main" xmlns:r="http://schemas.openxmlformats.org/officeDocument/2006/relationships">
+<p:sld xmlns:a="http://schemas.openxmlformats.org/drawingml/2006/main" xmlns:r="http://schemas.openxmlformats.org/officeDocument/2006/relationships" xmlns:p="http://schemas.openxmlformats.org/presentationml/2006/main">
   <p:cSld>
     <p:bg>
       <p:bgPr>
@@ -17391,7 +17443,14 @@
         <p:cNvGrpSpPr/>
         <p:nvPr/>
       </p:nvGrpSpPr>
-      <p:grpSpPr/>
+      <p:grpSpPr>
+        <a:xfrm>
+          <a:off x="0" y="0"/>
+          <a:ext cx="0" cy="0"/>
+          <a:chOff x="0" y="0"/>
+          <a:chExt cx="0" cy="0"/>
+        </a:xfrm>
+      </p:grpSpPr>
       <p:sp>
         <p:nvSpPr>
           <p:cNvPr id="2" name="Rectangle 1"/>
@@ -17433,6 +17492,7 @@
           <a:lstStyle/>
           <a:p>
             <a:pPr algn="ctr"/>
+            <a:endParaRPr/>
           </a:p>
         </p:txBody>
       </p:sp>
@@ -17559,6 +17619,7 @@
           <a:lstStyle/>
           <a:p>
             <a:pPr algn="ctr"/>
+            <a:endParaRPr/>
           </a:p>
         </p:txBody>
       </p:sp>
@@ -18035,7 +18096,7 @@
 </file>
 
 <file path=ppt/slides/slide33.xml><?xml version="1.0" encoding="utf-8"?>
-<p:sld xmlns:a="http://schemas.openxmlformats.org/drawingml/2006/main" xmlns:p="http://schemas.openxmlformats.org/presentationml/2006/main" xmlns:r="http://schemas.openxmlformats.org/officeDocument/2006/relationships">
+<p:sld xmlns:a="http://schemas.openxmlformats.org/drawingml/2006/main" xmlns:r="http://schemas.openxmlformats.org/officeDocument/2006/relationships" xmlns:p="http://schemas.openxmlformats.org/presentationml/2006/main">
   <p:cSld>
     <p:bg>
       <p:bgPr>
@@ -18051,7 +18112,14 @@
         <p:cNvGrpSpPr/>
         <p:nvPr/>
       </p:nvGrpSpPr>
-      <p:grpSpPr/>
+      <p:grpSpPr>
+        <a:xfrm>
+          <a:off x="0" y="0"/>
+          <a:ext cx="0" cy="0"/>
+          <a:chOff x="0" y="0"/>
+          <a:chExt cx="0" cy="0"/>
+        </a:xfrm>
+      </p:grpSpPr>
       <p:sp>
         <p:nvSpPr>
           <p:cNvPr id="2" name="Rectangle 1"/>
@@ -18093,6 +18161,7 @@
           <a:lstStyle/>
           <a:p>
             <a:pPr algn="ctr"/>
+            <a:endParaRPr/>
           </a:p>
         </p:txBody>
       </p:sp>
@@ -18345,6 +18414,7 @@
           <a:lstStyle/>
           <a:p>
             <a:pPr algn="ctr"/>
+            <a:endParaRPr/>
           </a:p>
         </p:txBody>
       </p:sp>
@@ -18389,6 +18459,7 @@
           <a:lstStyle/>
           <a:p>
             <a:pPr algn="ctr"/>
+            <a:endParaRPr/>
           </a:p>
         </p:txBody>
       </p:sp>
@@ -18448,7 +18519,7 @@
 </file>
 
 <file path=ppt/slides/slide34.xml><?xml version="1.0" encoding="utf-8"?>
-<p:sld xmlns:a="http://schemas.openxmlformats.org/drawingml/2006/main" xmlns:p="http://schemas.openxmlformats.org/presentationml/2006/main" xmlns:r="http://schemas.openxmlformats.org/officeDocument/2006/relationships">
+<p:sld xmlns:a="http://schemas.openxmlformats.org/drawingml/2006/main" xmlns:r="http://schemas.openxmlformats.org/officeDocument/2006/relationships" xmlns:p="http://schemas.openxmlformats.org/presentationml/2006/main">
   <p:cSld>
     <p:bg>
       <p:bgPr>
@@ -18464,7 +18535,14 @@
         <p:cNvGrpSpPr/>
         <p:nvPr/>
       </p:nvGrpSpPr>
-      <p:grpSpPr/>
+      <p:grpSpPr>
+        <a:xfrm>
+          <a:off x="0" y="0"/>
+          <a:ext cx="0" cy="0"/>
+          <a:chOff x="0" y="0"/>
+          <a:chExt cx="0" cy="0"/>
+        </a:xfrm>
+      </p:grpSpPr>
       <p:sp>
         <p:nvSpPr>
           <p:cNvPr id="2" name="Rectangle 1"/>
@@ -18506,6 +18584,7 @@
           <a:lstStyle/>
           <a:p>
             <a:pPr algn="ctr"/>
+            <a:endParaRPr/>
           </a:p>
         </p:txBody>
       </p:sp>
@@ -18632,6 +18711,7 @@
           <a:lstStyle/>
           <a:p>
             <a:pPr algn="ctr"/>
+            <a:endParaRPr/>
           </a:p>
         </p:txBody>
       </p:sp>
@@ -19003,7 +19083,7 @@
 </file>
 
 <file path=ppt/slides/slide35.xml><?xml version="1.0" encoding="utf-8"?>
-<p:sld xmlns:a="http://schemas.openxmlformats.org/drawingml/2006/main" xmlns:p="http://schemas.openxmlformats.org/presentationml/2006/main" xmlns:r="http://schemas.openxmlformats.org/officeDocument/2006/relationships">
+<p:sld xmlns:a="http://schemas.openxmlformats.org/drawingml/2006/main" xmlns:r="http://schemas.openxmlformats.org/officeDocument/2006/relationships" xmlns:p="http://schemas.openxmlformats.org/presentationml/2006/main">
   <p:cSld>
     <p:bg>
       <p:bgPr>
@@ -19019,7 +19099,14 @@
         <p:cNvGrpSpPr/>
         <p:nvPr/>
       </p:nvGrpSpPr>
-      <p:grpSpPr/>
+      <p:grpSpPr>
+        <a:xfrm>
+          <a:off x="0" y="0"/>
+          <a:ext cx="0" cy="0"/>
+          <a:chOff x="0" y="0"/>
+          <a:chExt cx="0" cy="0"/>
+        </a:xfrm>
+      </p:grpSpPr>
       <p:sp>
         <p:nvSpPr>
           <p:cNvPr id="2" name="Rectangle 1"/>
@@ -19061,6 +19148,7 @@
           <a:lstStyle/>
           <a:p>
             <a:pPr algn="ctr"/>
+            <a:endParaRPr/>
           </a:p>
         </p:txBody>
       </p:sp>
@@ -19187,6 +19275,7 @@
           <a:lstStyle/>
           <a:p>
             <a:pPr algn="ctr"/>
+            <a:endParaRPr/>
           </a:p>
         </p:txBody>
       </p:sp>
@@ -19516,7 +19605,7 @@
 </file>
 
 <file path=ppt/slides/slide36.xml><?xml version="1.0" encoding="utf-8"?>
-<p:sld xmlns:a="http://schemas.openxmlformats.org/drawingml/2006/main" xmlns:p="http://schemas.openxmlformats.org/presentationml/2006/main" xmlns:r="http://schemas.openxmlformats.org/officeDocument/2006/relationships">
+<p:sld xmlns:a="http://schemas.openxmlformats.org/drawingml/2006/main" xmlns:r="http://schemas.openxmlformats.org/officeDocument/2006/relationships" xmlns:p="http://schemas.openxmlformats.org/presentationml/2006/main">
   <p:cSld>
     <p:bg>
       <p:bgPr>
@@ -19532,7 +19621,14 @@
         <p:cNvGrpSpPr/>
         <p:nvPr/>
       </p:nvGrpSpPr>
-      <p:grpSpPr/>
+      <p:grpSpPr>
+        <a:xfrm>
+          <a:off x="0" y="0"/>
+          <a:ext cx="0" cy="0"/>
+          <a:chOff x="0" y="0"/>
+          <a:chExt cx="0" cy="0"/>
+        </a:xfrm>
+      </p:grpSpPr>
       <p:sp>
         <p:nvSpPr>
           <p:cNvPr id="2" name="Rectangle 1"/>
@@ -19574,6 +19670,7 @@
           <a:lstStyle/>
           <a:p>
             <a:pPr algn="ctr"/>
+            <a:endParaRPr/>
           </a:p>
         </p:txBody>
       </p:sp>
@@ -19844,6 +19941,7 @@
           <a:lstStyle/>
           <a:p>
             <a:pPr algn="ctr"/>
+            <a:endParaRPr/>
           </a:p>
         </p:txBody>
       </p:sp>
@@ -19888,6 +19986,7 @@
           <a:lstStyle/>
           <a:p>
             <a:pPr algn="ctr"/>
+            <a:endParaRPr/>
           </a:p>
         </p:txBody>
       </p:sp>
@@ -19947,7 +20046,7 @@
 </file>
 
 <file path=ppt/slides/slide37.xml><?xml version="1.0" encoding="utf-8"?>
-<p:sld xmlns:a="http://schemas.openxmlformats.org/drawingml/2006/main" xmlns:p="http://schemas.openxmlformats.org/presentationml/2006/main" xmlns:r="http://schemas.openxmlformats.org/officeDocument/2006/relationships">
+<p:sld xmlns:a="http://schemas.openxmlformats.org/drawingml/2006/main" xmlns:r="http://schemas.openxmlformats.org/officeDocument/2006/relationships" xmlns:p="http://schemas.openxmlformats.org/presentationml/2006/main">
   <p:cSld>
     <p:bg>
       <p:bgPr>
@@ -19963,7 +20062,14 @@
         <p:cNvGrpSpPr/>
         <p:nvPr/>
       </p:nvGrpSpPr>
-      <p:grpSpPr/>
+      <p:grpSpPr>
+        <a:xfrm>
+          <a:off x="0" y="0"/>
+          <a:ext cx="0" cy="0"/>
+          <a:chOff x="0" y="0"/>
+          <a:chExt cx="0" cy="0"/>
+        </a:xfrm>
+      </p:grpSpPr>
       <p:sp>
         <p:nvSpPr>
           <p:cNvPr id="2" name="Rectangle 1"/>
@@ -20005,6 +20111,7 @@
           <a:lstStyle/>
           <a:p>
             <a:pPr algn="ctr"/>
+            <a:endParaRPr/>
           </a:p>
         </p:txBody>
       </p:sp>
@@ -20131,6 +20238,7 @@
           <a:lstStyle/>
           <a:p>
             <a:pPr algn="ctr"/>
+            <a:endParaRPr/>
           </a:p>
         </p:txBody>
       </p:sp>
@@ -20607,7 +20715,7 @@
 </file>
 
 <file path=ppt/slides/slide38.xml><?xml version="1.0" encoding="utf-8"?>
-<p:sld xmlns:a="http://schemas.openxmlformats.org/drawingml/2006/main" xmlns:p="http://schemas.openxmlformats.org/presentationml/2006/main" xmlns:r="http://schemas.openxmlformats.org/officeDocument/2006/relationships">
+<p:sld xmlns:a="http://schemas.openxmlformats.org/drawingml/2006/main" xmlns:r="http://schemas.openxmlformats.org/officeDocument/2006/relationships" xmlns:p="http://schemas.openxmlformats.org/presentationml/2006/main">
   <p:cSld>
     <p:bg>
       <p:bgPr>
@@ -20623,7 +20731,14 @@
         <p:cNvGrpSpPr/>
         <p:nvPr/>
       </p:nvGrpSpPr>
-      <p:grpSpPr/>
+      <p:grpSpPr>
+        <a:xfrm>
+          <a:off x="0" y="0"/>
+          <a:ext cx="0" cy="0"/>
+          <a:chOff x="0" y="0"/>
+          <a:chExt cx="0" cy="0"/>
+        </a:xfrm>
+      </p:grpSpPr>
       <p:sp>
         <p:nvSpPr>
           <p:cNvPr id="2" name="TextBox 1"/>
@@ -20632,8 +20747,8 @@
         </p:nvSpPr>
         <p:spPr>
           <a:xfrm>
-            <a:off x="822960" y="1371600"/>
-            <a:ext cx="2743200" cy="1371600"/>
+            <a:off x="822959" y="1371600"/>
+            <a:ext cx="5152967" cy="1107996"/>
           </a:xfrm>
           <a:prstGeom prst="rect">
             <a:avLst/>
@@ -20652,7 +20767,7 @@
               </a:spcAft>
             </a:pPr>
             <a:r>
-              <a:rPr sz="6600" b="1">
+              <a:rPr sz="6600" b="1" dirty="0">
                 <a:solidFill>
                   <a:srgbClr val="C0392B"/>
                 </a:solidFill>
@@ -20747,6 +20862,7 @@
           <a:lstStyle/>
           <a:p>
             <a:pPr algn="ctr"/>
+            <a:endParaRPr/>
           </a:p>
         </p:txBody>
       </p:sp>
@@ -20836,7 +20952,7 @@
 </file>
 
 <file path=ppt/slides/slide39.xml><?xml version="1.0" encoding="utf-8"?>
-<p:sld xmlns:a="http://schemas.openxmlformats.org/drawingml/2006/main" xmlns:p="http://schemas.openxmlformats.org/presentationml/2006/main" xmlns:r="http://schemas.openxmlformats.org/officeDocument/2006/relationships">
+<p:sld xmlns:a="http://schemas.openxmlformats.org/drawingml/2006/main" xmlns:r="http://schemas.openxmlformats.org/officeDocument/2006/relationships" xmlns:p="http://schemas.openxmlformats.org/presentationml/2006/main">
   <p:cSld>
     <p:bg>
       <p:bgPr>
@@ -20852,7 +20968,14 @@
         <p:cNvGrpSpPr/>
         <p:nvPr/>
       </p:nvGrpSpPr>
-      <p:grpSpPr/>
+      <p:grpSpPr>
+        <a:xfrm>
+          <a:off x="0" y="0"/>
+          <a:ext cx="0" cy="0"/>
+          <a:chOff x="0" y="0"/>
+          <a:chExt cx="0" cy="0"/>
+        </a:xfrm>
+      </p:grpSpPr>
       <p:sp>
         <p:nvSpPr>
           <p:cNvPr id="2" name="Rectangle 1"/>
@@ -20894,6 +21017,7 @@
           <a:lstStyle/>
           <a:p>
             <a:pPr algn="ctr"/>
+            <a:endParaRPr/>
           </a:p>
         </p:txBody>
       </p:sp>
@@ -21146,6 +21270,7 @@
           <a:lstStyle/>
           <a:p>
             <a:pPr algn="ctr"/>
+            <a:endParaRPr/>
           </a:p>
         </p:txBody>
       </p:sp>
@@ -21190,6 +21315,7 @@
           <a:lstStyle/>
           <a:p>
             <a:pPr algn="ctr"/>
+            <a:endParaRPr/>
           </a:p>
         </p:txBody>
       </p:sp>
@@ -21249,7 +21375,7 @@
 </file>
 
 <file path=ppt/slides/slide4.xml><?xml version="1.0" encoding="utf-8"?>
-<p:sld xmlns:a="http://schemas.openxmlformats.org/drawingml/2006/main" xmlns:p="http://schemas.openxmlformats.org/presentationml/2006/main" xmlns:r="http://schemas.openxmlformats.org/officeDocument/2006/relationships">
+<p:sld xmlns:a="http://schemas.openxmlformats.org/drawingml/2006/main" xmlns:r="http://schemas.openxmlformats.org/officeDocument/2006/relationships" xmlns:p="http://schemas.openxmlformats.org/presentationml/2006/main">
   <p:cSld>
     <p:bg>
       <p:bgPr>
@@ -21265,7 +21391,14 @@
         <p:cNvGrpSpPr/>
         <p:nvPr/>
       </p:nvGrpSpPr>
-      <p:grpSpPr/>
+      <p:grpSpPr>
+        <a:xfrm>
+          <a:off x="0" y="0"/>
+          <a:ext cx="0" cy="0"/>
+          <a:chOff x="0" y="0"/>
+          <a:chExt cx="0" cy="0"/>
+        </a:xfrm>
+      </p:grpSpPr>
       <p:sp>
         <p:nvSpPr>
           <p:cNvPr id="2" name="TextBox 1"/>
@@ -21275,7 +21408,7 @@
         <p:spPr>
           <a:xfrm>
             <a:off x="822960" y="1371600"/>
-            <a:ext cx="2743200" cy="1371600"/>
+            <a:ext cx="4367876" cy="1107996"/>
           </a:xfrm>
           <a:prstGeom prst="rect">
             <a:avLst/>
@@ -21294,7 +21427,7 @@
               </a:spcAft>
             </a:pPr>
             <a:r>
-              <a:rPr sz="6600" b="1">
+              <a:rPr sz="6600" b="1" dirty="0">
                 <a:solidFill>
                   <a:srgbClr val="C0392B"/>
                 </a:solidFill>
@@ -21389,6 +21522,7 @@
           <a:lstStyle/>
           <a:p>
             <a:pPr algn="ctr"/>
+            <a:endParaRPr/>
           </a:p>
         </p:txBody>
       </p:sp>
@@ -21478,7 +21612,7 @@
 </file>
 
 <file path=ppt/slides/slide40.xml><?xml version="1.0" encoding="utf-8"?>
-<p:sld xmlns:a="http://schemas.openxmlformats.org/drawingml/2006/main" xmlns:p="http://schemas.openxmlformats.org/presentationml/2006/main" xmlns:r="http://schemas.openxmlformats.org/officeDocument/2006/relationships">
+<p:sld xmlns:a="http://schemas.openxmlformats.org/drawingml/2006/main" xmlns:r="http://schemas.openxmlformats.org/officeDocument/2006/relationships" xmlns:p="http://schemas.openxmlformats.org/presentationml/2006/main">
   <p:cSld>
     <p:bg>
       <p:bgPr>
@@ -21494,7 +21628,14 @@
         <p:cNvGrpSpPr/>
         <p:nvPr/>
       </p:nvGrpSpPr>
-      <p:grpSpPr/>
+      <p:grpSpPr>
+        <a:xfrm>
+          <a:off x="0" y="0"/>
+          <a:ext cx="0" cy="0"/>
+          <a:chOff x="0" y="0"/>
+          <a:chExt cx="0" cy="0"/>
+        </a:xfrm>
+      </p:grpSpPr>
       <p:sp>
         <p:nvSpPr>
           <p:cNvPr id="2" name="Rectangle 1"/>
@@ -21536,6 +21677,7 @@
           <a:lstStyle/>
           <a:p>
             <a:pPr algn="ctr"/>
+            <a:endParaRPr/>
           </a:p>
         </p:txBody>
       </p:sp>
@@ -21662,6 +21804,7 @@
           <a:lstStyle/>
           <a:p>
             <a:pPr algn="ctr"/>
+            <a:endParaRPr/>
           </a:p>
         </p:txBody>
       </p:sp>
@@ -22138,7 +22281,7 @@
 </file>
 
 <file path=ppt/slides/slide41.xml><?xml version="1.0" encoding="utf-8"?>
-<p:sld xmlns:a="http://schemas.openxmlformats.org/drawingml/2006/main" xmlns:p="http://schemas.openxmlformats.org/presentationml/2006/main" xmlns:r="http://schemas.openxmlformats.org/officeDocument/2006/relationships">
+<p:sld xmlns:a="http://schemas.openxmlformats.org/drawingml/2006/main" xmlns:r="http://schemas.openxmlformats.org/officeDocument/2006/relationships" xmlns:p="http://schemas.openxmlformats.org/presentationml/2006/main">
   <p:cSld>
     <p:bg>
       <p:bgPr>
@@ -22154,7 +22297,14 @@
         <p:cNvGrpSpPr/>
         <p:nvPr/>
       </p:nvGrpSpPr>
-      <p:grpSpPr/>
+      <p:grpSpPr>
+        <a:xfrm>
+          <a:off x="0" y="0"/>
+          <a:ext cx="0" cy="0"/>
+          <a:chOff x="0" y="0"/>
+          <a:chExt cx="0" cy="0"/>
+        </a:xfrm>
+      </p:grpSpPr>
       <p:sp>
         <p:nvSpPr>
           <p:cNvPr id="2" name="Rectangle 1"/>
@@ -22196,6 +22346,7 @@
           <a:lstStyle/>
           <a:p>
             <a:pPr algn="ctr"/>
+            <a:endParaRPr/>
           </a:p>
         </p:txBody>
       </p:sp>
@@ -22466,6 +22617,7 @@
           <a:lstStyle/>
           <a:p>
             <a:pPr algn="ctr"/>
+            <a:endParaRPr/>
           </a:p>
         </p:txBody>
       </p:sp>
@@ -22510,6 +22662,7 @@
           <a:lstStyle/>
           <a:p>
             <a:pPr algn="ctr"/>
+            <a:endParaRPr/>
           </a:p>
         </p:txBody>
       </p:sp>
@@ -22569,7 +22722,7 @@
 </file>
 
 <file path=ppt/slides/slide42.xml><?xml version="1.0" encoding="utf-8"?>
-<p:sld xmlns:a="http://schemas.openxmlformats.org/drawingml/2006/main" xmlns:p="http://schemas.openxmlformats.org/presentationml/2006/main" xmlns:r="http://schemas.openxmlformats.org/officeDocument/2006/relationships">
+<p:sld xmlns:a="http://schemas.openxmlformats.org/drawingml/2006/main" xmlns:r="http://schemas.openxmlformats.org/officeDocument/2006/relationships" xmlns:p="http://schemas.openxmlformats.org/presentationml/2006/main">
   <p:cSld>
     <p:bg>
       <p:bgPr>
@@ -22585,7 +22738,14 @@
         <p:cNvGrpSpPr/>
         <p:nvPr/>
       </p:nvGrpSpPr>
-      <p:grpSpPr/>
+      <p:grpSpPr>
+        <a:xfrm>
+          <a:off x="0" y="0"/>
+          <a:ext cx="0" cy="0"/>
+          <a:chOff x="0" y="0"/>
+          <a:chExt cx="0" cy="0"/>
+        </a:xfrm>
+      </p:grpSpPr>
       <p:sp>
         <p:nvSpPr>
           <p:cNvPr id="2" name="Rectangle 1"/>
@@ -22627,6 +22787,7 @@
           <a:lstStyle/>
           <a:p>
             <a:pPr algn="ctr"/>
+            <a:endParaRPr/>
           </a:p>
         </p:txBody>
       </p:sp>
@@ -22753,6 +22914,7 @@
           <a:lstStyle/>
           <a:p>
             <a:pPr algn="ctr"/>
+            <a:endParaRPr/>
           </a:p>
         </p:txBody>
       </p:sp>
@@ -23271,7 +23433,7 @@
 </file>
 
 <file path=ppt/slides/slide43.xml><?xml version="1.0" encoding="utf-8"?>
-<p:sld xmlns:a="http://schemas.openxmlformats.org/drawingml/2006/main" xmlns:p="http://schemas.openxmlformats.org/presentationml/2006/main" xmlns:r="http://schemas.openxmlformats.org/officeDocument/2006/relationships">
+<p:sld xmlns:a="http://schemas.openxmlformats.org/drawingml/2006/main" xmlns:r="http://schemas.openxmlformats.org/officeDocument/2006/relationships" xmlns:p="http://schemas.openxmlformats.org/presentationml/2006/main">
   <p:cSld>
     <p:bg>
       <p:bgPr>
@@ -23287,7 +23449,14 @@
         <p:cNvGrpSpPr/>
         <p:nvPr/>
       </p:nvGrpSpPr>
-      <p:grpSpPr/>
+      <p:grpSpPr>
+        <a:xfrm>
+          <a:off x="0" y="0"/>
+          <a:ext cx="0" cy="0"/>
+          <a:chOff x="0" y="0"/>
+          <a:chExt cx="0" cy="0"/>
+        </a:xfrm>
+      </p:grpSpPr>
       <p:sp>
         <p:nvSpPr>
           <p:cNvPr id="2" name="Rectangle 1"/>
@@ -23329,6 +23498,7 @@
           <a:lstStyle/>
           <a:p>
             <a:pPr algn="ctr"/>
+            <a:endParaRPr/>
           </a:p>
         </p:txBody>
       </p:sp>
@@ -23455,6 +23625,7 @@
           <a:lstStyle/>
           <a:p>
             <a:pPr algn="ctr"/>
+            <a:endParaRPr/>
           </a:p>
         </p:txBody>
       </p:sp>
@@ -23994,7 +24165,7 @@
 </file>
 
 <file path=ppt/slides/slide44.xml><?xml version="1.0" encoding="utf-8"?>
-<p:sld xmlns:a="http://schemas.openxmlformats.org/drawingml/2006/main" xmlns:p="http://schemas.openxmlformats.org/presentationml/2006/main" xmlns:r="http://schemas.openxmlformats.org/officeDocument/2006/relationships">
+<p:sld xmlns:a="http://schemas.openxmlformats.org/drawingml/2006/main" xmlns:r="http://schemas.openxmlformats.org/officeDocument/2006/relationships" xmlns:p="http://schemas.openxmlformats.org/presentationml/2006/main">
   <p:cSld>
     <p:bg>
       <p:bgPr>
@@ -24010,7 +24181,14 @@
         <p:cNvGrpSpPr/>
         <p:nvPr/>
       </p:nvGrpSpPr>
-      <p:grpSpPr/>
+      <p:grpSpPr>
+        <a:xfrm>
+          <a:off x="0" y="0"/>
+          <a:ext cx="0" cy="0"/>
+          <a:chOff x="0" y="0"/>
+          <a:chExt cx="0" cy="0"/>
+        </a:xfrm>
+      </p:grpSpPr>
       <p:sp>
         <p:nvSpPr>
           <p:cNvPr id="2" name="Rectangle 1"/>
@@ -24052,6 +24230,7 @@
           <a:lstStyle/>
           <a:p>
             <a:pPr algn="ctr"/>
+            <a:endParaRPr/>
           </a:p>
         </p:txBody>
       </p:sp>
@@ -24178,6 +24357,7 @@
           <a:lstStyle/>
           <a:p>
             <a:pPr algn="ctr"/>
+            <a:endParaRPr/>
           </a:p>
         </p:txBody>
       </p:sp>
@@ -24549,7 +24729,7 @@
 </file>
 
 <file path=ppt/slides/slide45.xml><?xml version="1.0" encoding="utf-8"?>
-<p:sld xmlns:a="http://schemas.openxmlformats.org/drawingml/2006/main" xmlns:p="http://schemas.openxmlformats.org/presentationml/2006/main" xmlns:r="http://schemas.openxmlformats.org/officeDocument/2006/relationships">
+<p:sld xmlns:a="http://schemas.openxmlformats.org/drawingml/2006/main" xmlns:r="http://schemas.openxmlformats.org/officeDocument/2006/relationships" xmlns:p="http://schemas.openxmlformats.org/presentationml/2006/main">
   <p:cSld>
     <p:bg>
       <p:bgPr>
@@ -24565,7 +24745,14 @@
         <p:cNvGrpSpPr/>
         <p:nvPr/>
       </p:nvGrpSpPr>
-      <p:grpSpPr/>
+      <p:grpSpPr>
+        <a:xfrm>
+          <a:off x="0" y="0"/>
+          <a:ext cx="0" cy="0"/>
+          <a:chOff x="0" y="0"/>
+          <a:chExt cx="0" cy="0"/>
+        </a:xfrm>
+      </p:grpSpPr>
       <p:sp>
         <p:nvSpPr>
           <p:cNvPr id="2" name="TextBox 1"/>
@@ -24689,6 +24876,7 @@
           <a:lstStyle/>
           <a:p>
             <a:pPr algn="ctr"/>
+            <a:endParaRPr/>
           </a:p>
         </p:txBody>
       </p:sp>
@@ -24778,7 +24966,7 @@
 </file>
 
 <file path=ppt/slides/slide46.xml><?xml version="1.0" encoding="utf-8"?>
-<p:sld xmlns:a="http://schemas.openxmlformats.org/drawingml/2006/main" xmlns:p="http://schemas.openxmlformats.org/presentationml/2006/main" xmlns:r="http://schemas.openxmlformats.org/officeDocument/2006/relationships">
+<p:sld xmlns:a="http://schemas.openxmlformats.org/drawingml/2006/main" xmlns:r="http://schemas.openxmlformats.org/officeDocument/2006/relationships" xmlns:p="http://schemas.openxmlformats.org/presentationml/2006/main">
   <p:cSld>
     <p:bg>
       <p:bgPr>
@@ -24794,7 +24982,14 @@
         <p:cNvGrpSpPr/>
         <p:nvPr/>
       </p:nvGrpSpPr>
-      <p:grpSpPr/>
+      <p:grpSpPr>
+        <a:xfrm>
+          <a:off x="0" y="0"/>
+          <a:ext cx="0" cy="0"/>
+          <a:chOff x="0" y="0"/>
+          <a:chExt cx="0" cy="0"/>
+        </a:xfrm>
+      </p:grpSpPr>
       <p:sp>
         <p:nvSpPr>
           <p:cNvPr id="2" name="Rectangle 1"/>
@@ -24836,6 +25031,7 @@
           <a:lstStyle/>
           <a:p>
             <a:pPr algn="ctr"/>
+            <a:endParaRPr/>
           </a:p>
         </p:txBody>
       </p:sp>
@@ -25074,7 +25270,7 @@
 </file>
 
 <file path=ppt/slides/slide47.xml><?xml version="1.0" encoding="utf-8"?>
-<p:sld xmlns:a="http://schemas.openxmlformats.org/drawingml/2006/main" xmlns:p="http://schemas.openxmlformats.org/presentationml/2006/main" xmlns:r="http://schemas.openxmlformats.org/officeDocument/2006/relationships">
+<p:sld xmlns:a="http://schemas.openxmlformats.org/drawingml/2006/main" xmlns:r="http://schemas.openxmlformats.org/officeDocument/2006/relationships" xmlns:p="http://schemas.openxmlformats.org/presentationml/2006/main">
   <p:cSld>
     <p:bg>
       <p:bgPr>
@@ -25090,7 +25286,14 @@
         <p:cNvGrpSpPr/>
         <p:nvPr/>
       </p:nvGrpSpPr>
-      <p:grpSpPr/>
+      <p:grpSpPr>
+        <a:xfrm>
+          <a:off x="0" y="0"/>
+          <a:ext cx="0" cy="0"/>
+          <a:chOff x="0" y="0"/>
+          <a:chExt cx="0" cy="0"/>
+        </a:xfrm>
+      </p:grpSpPr>
       <p:sp>
         <p:nvSpPr>
           <p:cNvPr id="2" name="Rectangle 1"/>
@@ -25132,6 +25335,7 @@
           <a:lstStyle/>
           <a:p>
             <a:pPr algn="ctr"/>
+            <a:endParaRPr/>
           </a:p>
         </p:txBody>
       </p:sp>
@@ -25258,6 +25462,7 @@
           <a:lstStyle/>
           <a:p>
             <a:pPr algn="ctr"/>
+            <a:endParaRPr/>
           </a:p>
         </p:txBody>
       </p:sp>
@@ -25671,7 +25876,7 @@
 </file>
 
 <file path=ppt/slides/slide48.xml><?xml version="1.0" encoding="utf-8"?>
-<p:sld xmlns:a="http://schemas.openxmlformats.org/drawingml/2006/main" xmlns:p="http://schemas.openxmlformats.org/presentationml/2006/main" xmlns:r="http://schemas.openxmlformats.org/officeDocument/2006/relationships">
+<p:sld xmlns:a="http://schemas.openxmlformats.org/drawingml/2006/main" xmlns:r="http://schemas.openxmlformats.org/officeDocument/2006/relationships" xmlns:p="http://schemas.openxmlformats.org/presentationml/2006/main">
   <p:cSld>
     <p:bg>
       <p:bgPr>
@@ -25687,7 +25892,14 @@
         <p:cNvGrpSpPr/>
         <p:nvPr/>
       </p:nvGrpSpPr>
-      <p:grpSpPr/>
+      <p:grpSpPr>
+        <a:xfrm>
+          <a:off x="0" y="0"/>
+          <a:ext cx="0" cy="0"/>
+          <a:chOff x="0" y="0"/>
+          <a:chExt cx="0" cy="0"/>
+        </a:xfrm>
+      </p:grpSpPr>
       <p:sp>
         <p:nvSpPr>
           <p:cNvPr id="2" name="Rectangle 1"/>
@@ -25729,6 +25941,7 @@
           <a:lstStyle/>
           <a:p>
             <a:pPr algn="ctr"/>
+            <a:endParaRPr/>
           </a:p>
         </p:txBody>
       </p:sp>
@@ -25855,6 +26068,7 @@
           <a:lstStyle/>
           <a:p>
             <a:pPr algn="ctr"/>
+            <a:endParaRPr/>
           </a:p>
         </p:txBody>
       </p:sp>
@@ -26268,7 +26482,7 @@
 </file>
 
 <file path=ppt/slides/slide49.xml><?xml version="1.0" encoding="utf-8"?>
-<p:sld xmlns:a="http://schemas.openxmlformats.org/drawingml/2006/main" xmlns:p="http://schemas.openxmlformats.org/presentationml/2006/main" xmlns:r="http://schemas.openxmlformats.org/officeDocument/2006/relationships">
+<p:sld xmlns:a="http://schemas.openxmlformats.org/drawingml/2006/main" xmlns:r="http://schemas.openxmlformats.org/officeDocument/2006/relationships" xmlns:p="http://schemas.openxmlformats.org/presentationml/2006/main">
   <p:cSld>
     <p:bg>
       <p:bgPr>
@@ -26284,7 +26498,14 @@
         <p:cNvGrpSpPr/>
         <p:nvPr/>
       </p:nvGrpSpPr>
-      <p:grpSpPr/>
+      <p:grpSpPr>
+        <a:xfrm>
+          <a:off x="0" y="0"/>
+          <a:ext cx="0" cy="0"/>
+          <a:chOff x="0" y="0"/>
+          <a:chExt cx="0" cy="0"/>
+        </a:xfrm>
+      </p:grpSpPr>
       <p:sp>
         <p:nvSpPr>
           <p:cNvPr id="2" name="Rectangle 1"/>
@@ -26326,6 +26547,7 @@
           <a:lstStyle/>
           <a:p>
             <a:pPr algn="ctr"/>
+            <a:endParaRPr/>
           </a:p>
         </p:txBody>
       </p:sp>
@@ -26578,6 +26800,7 @@
           <a:lstStyle/>
           <a:p>
             <a:pPr algn="ctr"/>
+            <a:endParaRPr/>
           </a:p>
         </p:txBody>
       </p:sp>
@@ -26622,6 +26845,7 @@
           <a:lstStyle/>
           <a:p>
             <a:pPr algn="ctr"/>
+            <a:endParaRPr/>
           </a:p>
         </p:txBody>
       </p:sp>
@@ -26681,7 +26905,7 @@
 </file>
 
 <file path=ppt/slides/slide5.xml><?xml version="1.0" encoding="utf-8"?>
-<p:sld xmlns:a="http://schemas.openxmlformats.org/drawingml/2006/main" xmlns:p="http://schemas.openxmlformats.org/presentationml/2006/main" xmlns:r="http://schemas.openxmlformats.org/officeDocument/2006/relationships">
+<p:sld xmlns:a="http://schemas.openxmlformats.org/drawingml/2006/main" xmlns:r="http://schemas.openxmlformats.org/officeDocument/2006/relationships" xmlns:p="http://schemas.openxmlformats.org/presentationml/2006/main">
   <p:cSld>
     <p:bg>
       <p:bgPr>
@@ -26697,7 +26921,14 @@
         <p:cNvGrpSpPr/>
         <p:nvPr/>
       </p:nvGrpSpPr>
-      <p:grpSpPr/>
+      <p:grpSpPr>
+        <a:xfrm>
+          <a:off x="0" y="0"/>
+          <a:ext cx="0" cy="0"/>
+          <a:chOff x="0" y="0"/>
+          <a:chExt cx="0" cy="0"/>
+        </a:xfrm>
+      </p:grpSpPr>
       <p:sp>
         <p:nvSpPr>
           <p:cNvPr id="2" name="Rectangle 1"/>
@@ -26739,6 +26970,7 @@
           <a:lstStyle/>
           <a:p>
             <a:pPr algn="ctr"/>
+            <a:endParaRPr/>
           </a:p>
         </p:txBody>
       </p:sp>
@@ -26973,6 +27205,7 @@
           <a:lstStyle/>
           <a:p>
             <a:pPr algn="ctr"/>
+            <a:endParaRPr/>
           </a:p>
         </p:txBody>
       </p:sp>
@@ -27017,6 +27250,7 @@
           <a:lstStyle/>
           <a:p>
             <a:pPr algn="ctr"/>
+            <a:endParaRPr/>
           </a:p>
         </p:txBody>
       </p:sp>
@@ -27076,7 +27310,7 @@
 </file>
 
 <file path=ppt/slides/slide50.xml><?xml version="1.0" encoding="utf-8"?>
-<p:sld xmlns:a="http://schemas.openxmlformats.org/drawingml/2006/main" xmlns:p="http://schemas.openxmlformats.org/presentationml/2006/main" xmlns:r="http://schemas.openxmlformats.org/officeDocument/2006/relationships">
+<p:sld xmlns:a="http://schemas.openxmlformats.org/drawingml/2006/main" xmlns:r="http://schemas.openxmlformats.org/officeDocument/2006/relationships" xmlns:p="http://schemas.openxmlformats.org/presentationml/2006/main">
   <p:cSld>
     <p:bg>
       <p:bgPr>
@@ -27092,7 +27326,14 @@
         <p:cNvGrpSpPr/>
         <p:nvPr/>
       </p:nvGrpSpPr>
-      <p:grpSpPr/>
+      <p:grpSpPr>
+        <a:xfrm>
+          <a:off x="0" y="0"/>
+          <a:ext cx="0" cy="0"/>
+          <a:chOff x="0" y="0"/>
+          <a:chExt cx="0" cy="0"/>
+        </a:xfrm>
+      </p:grpSpPr>
       <p:sp>
         <p:nvSpPr>
           <p:cNvPr id="2" name="Rectangle 1"/>
@@ -27134,6 +27375,7 @@
           <a:lstStyle/>
           <a:p>
             <a:pPr algn="ctr"/>
+            <a:endParaRPr/>
           </a:p>
         </p:txBody>
       </p:sp>
@@ -27318,7 +27560,7 @@
 </file>
 
 <file path=ppt/slides/slide51.xml><?xml version="1.0" encoding="utf-8"?>
-<p:sld xmlns:a="http://schemas.openxmlformats.org/drawingml/2006/main" xmlns:p="http://schemas.openxmlformats.org/presentationml/2006/main" xmlns:r="http://schemas.openxmlformats.org/officeDocument/2006/relationships">
+<p:sld xmlns:a="http://schemas.openxmlformats.org/drawingml/2006/main" xmlns:r="http://schemas.openxmlformats.org/officeDocument/2006/relationships" xmlns:p="http://schemas.openxmlformats.org/presentationml/2006/main">
   <p:cSld>
     <p:bg>
       <p:bgPr>
@@ -27334,7 +27576,14 @@
         <p:cNvGrpSpPr/>
         <p:nvPr/>
       </p:nvGrpSpPr>
-      <p:grpSpPr/>
+      <p:grpSpPr>
+        <a:xfrm>
+          <a:off x="0" y="0"/>
+          <a:ext cx="0" cy="0"/>
+          <a:chOff x="0" y="0"/>
+          <a:chExt cx="0" cy="0"/>
+        </a:xfrm>
+      </p:grpSpPr>
       <p:sp>
         <p:nvSpPr>
           <p:cNvPr id="2" name="Rectangle 1"/>
@@ -27376,6 +27625,7 @@
           <a:lstStyle/>
           <a:p>
             <a:pPr algn="ctr"/>
+            <a:endParaRPr/>
           </a:p>
         </p:txBody>
       </p:sp>
@@ -27560,7 +27810,7 @@
 </file>
 
 <file path=ppt/slides/slide52.xml><?xml version="1.0" encoding="utf-8"?>
-<p:sld xmlns:a="http://schemas.openxmlformats.org/drawingml/2006/main" xmlns:p="http://schemas.openxmlformats.org/presentationml/2006/main" xmlns:r="http://schemas.openxmlformats.org/officeDocument/2006/relationships">
+<p:sld xmlns:a="http://schemas.openxmlformats.org/drawingml/2006/main" xmlns:r="http://schemas.openxmlformats.org/officeDocument/2006/relationships" xmlns:p="http://schemas.openxmlformats.org/presentationml/2006/main">
   <p:cSld>
     <p:bg>
       <p:bgPr>
@@ -27576,7 +27826,14 @@
         <p:cNvGrpSpPr/>
         <p:nvPr/>
       </p:nvGrpSpPr>
-      <p:grpSpPr/>
+      <p:grpSpPr>
+        <a:xfrm>
+          <a:off x="0" y="0"/>
+          <a:ext cx="0" cy="0"/>
+          <a:chOff x="0" y="0"/>
+          <a:chExt cx="0" cy="0"/>
+        </a:xfrm>
+      </p:grpSpPr>
       <p:sp>
         <p:nvSpPr>
           <p:cNvPr id="2" name="Rectangle 1"/>
@@ -27618,6 +27875,7 @@
           <a:lstStyle/>
           <a:p>
             <a:pPr algn="ctr"/>
+            <a:endParaRPr/>
           </a:p>
         </p:txBody>
       </p:sp>
@@ -27928,7 +28186,7 @@
 </file>
 
 <file path=ppt/slides/slide53.xml><?xml version="1.0" encoding="utf-8"?>
-<p:sld xmlns:a="http://schemas.openxmlformats.org/drawingml/2006/main" xmlns:p="http://schemas.openxmlformats.org/presentationml/2006/main" xmlns:r="http://schemas.openxmlformats.org/officeDocument/2006/relationships">
+<p:sld xmlns:a="http://schemas.openxmlformats.org/drawingml/2006/main" xmlns:r="http://schemas.openxmlformats.org/officeDocument/2006/relationships" xmlns:p="http://schemas.openxmlformats.org/presentationml/2006/main">
   <p:cSld>
     <p:bg>
       <p:bgPr>
@@ -27944,7 +28202,14 @@
         <p:cNvGrpSpPr/>
         <p:nvPr/>
       </p:nvGrpSpPr>
-      <p:grpSpPr/>
+      <p:grpSpPr>
+        <a:xfrm>
+          <a:off x="0" y="0"/>
+          <a:ext cx="0" cy="0"/>
+          <a:chOff x="0" y="0"/>
+          <a:chExt cx="0" cy="0"/>
+        </a:xfrm>
+      </p:grpSpPr>
       <p:sp>
         <p:nvSpPr>
           <p:cNvPr id="2" name="Rectangle 1"/>
@@ -27986,6 +28251,7 @@
           <a:lstStyle/>
           <a:p>
             <a:pPr algn="ctr"/>
+            <a:endParaRPr/>
           </a:p>
         </p:txBody>
       </p:sp>
@@ -28224,7 +28490,7 @@
 </file>
 
 <file path=ppt/slides/slide6.xml><?xml version="1.0" encoding="utf-8"?>
-<p:sld xmlns:a="http://schemas.openxmlformats.org/drawingml/2006/main" xmlns:p="http://schemas.openxmlformats.org/presentationml/2006/main" xmlns:r="http://schemas.openxmlformats.org/officeDocument/2006/relationships">
+<p:sld xmlns:a="http://schemas.openxmlformats.org/drawingml/2006/main" xmlns:r="http://schemas.openxmlformats.org/officeDocument/2006/relationships" xmlns:p="http://schemas.openxmlformats.org/presentationml/2006/main">
   <p:cSld>
     <p:bg>
       <p:bgPr>
@@ -28240,7 +28506,14 @@
         <p:cNvGrpSpPr/>
         <p:nvPr/>
       </p:nvGrpSpPr>
-      <p:grpSpPr/>
+      <p:grpSpPr>
+        <a:xfrm>
+          <a:off x="0" y="0"/>
+          <a:ext cx="0" cy="0"/>
+          <a:chOff x="0" y="0"/>
+          <a:chExt cx="0" cy="0"/>
+        </a:xfrm>
+      </p:grpSpPr>
       <p:sp>
         <p:nvSpPr>
           <p:cNvPr id="2" name="Rectangle 1"/>
@@ -28282,6 +28555,7 @@
           <a:lstStyle/>
           <a:p>
             <a:pPr algn="ctr"/>
+            <a:endParaRPr/>
           </a:p>
         </p:txBody>
       </p:sp>
@@ -28408,6 +28682,7 @@
           <a:lstStyle/>
           <a:p>
             <a:pPr algn="ctr"/>
+            <a:endParaRPr/>
           </a:p>
         </p:txBody>
       </p:sp>
@@ -28758,7 +29033,7 @@
 </file>
 
 <file path=ppt/slides/slide7.xml><?xml version="1.0" encoding="utf-8"?>
-<p:sld xmlns:a="http://schemas.openxmlformats.org/drawingml/2006/main" xmlns:p="http://schemas.openxmlformats.org/presentationml/2006/main" xmlns:r="http://schemas.openxmlformats.org/officeDocument/2006/relationships">
+<p:sld xmlns:a="http://schemas.openxmlformats.org/drawingml/2006/main" xmlns:r="http://schemas.openxmlformats.org/officeDocument/2006/relationships" xmlns:p="http://schemas.openxmlformats.org/presentationml/2006/main">
   <p:cSld>
     <p:bg>
       <p:bgPr>
@@ -28774,7 +29049,14 @@
         <p:cNvGrpSpPr/>
         <p:nvPr/>
       </p:nvGrpSpPr>
-      <p:grpSpPr/>
+      <p:grpSpPr>
+        <a:xfrm>
+          <a:off x="0" y="0"/>
+          <a:ext cx="0" cy="0"/>
+          <a:chOff x="0" y="0"/>
+          <a:chExt cx="0" cy="0"/>
+        </a:xfrm>
+      </p:grpSpPr>
       <p:sp>
         <p:nvSpPr>
           <p:cNvPr id="2" name="Rectangle 1"/>
@@ -28816,6 +29098,7 @@
           <a:lstStyle/>
           <a:p>
             <a:pPr algn="ctr"/>
+            <a:endParaRPr/>
           </a:p>
         </p:txBody>
       </p:sp>
@@ -29050,6 +29333,7 @@
           <a:lstStyle/>
           <a:p>
             <a:pPr algn="ctr"/>
+            <a:endParaRPr/>
           </a:p>
         </p:txBody>
       </p:sp>
@@ -29094,6 +29378,7 @@
           <a:lstStyle/>
           <a:p>
             <a:pPr algn="ctr"/>
+            <a:endParaRPr/>
           </a:p>
         </p:txBody>
       </p:sp>
@@ -29153,7 +29438,7 @@
 </file>
 
 <file path=ppt/slides/slide8.xml><?xml version="1.0" encoding="utf-8"?>
-<p:sld xmlns:a="http://schemas.openxmlformats.org/drawingml/2006/main" xmlns:p="http://schemas.openxmlformats.org/presentationml/2006/main" xmlns:r="http://schemas.openxmlformats.org/officeDocument/2006/relationships">
+<p:sld xmlns:a="http://schemas.openxmlformats.org/drawingml/2006/main" xmlns:r="http://schemas.openxmlformats.org/officeDocument/2006/relationships" xmlns:p="http://schemas.openxmlformats.org/presentationml/2006/main">
   <p:cSld>
     <p:bg>
       <p:bgPr>
@@ -29169,7 +29454,14 @@
         <p:cNvGrpSpPr/>
         <p:nvPr/>
       </p:nvGrpSpPr>
-      <p:grpSpPr/>
+      <p:grpSpPr>
+        <a:xfrm>
+          <a:off x="0" y="0"/>
+          <a:ext cx="0" cy="0"/>
+          <a:chOff x="0" y="0"/>
+          <a:chExt cx="0" cy="0"/>
+        </a:xfrm>
+      </p:grpSpPr>
       <p:sp>
         <p:nvSpPr>
           <p:cNvPr id="2" name="Rectangle 1"/>
@@ -29211,6 +29503,7 @@
           <a:lstStyle/>
           <a:p>
             <a:pPr algn="ctr"/>
+            <a:endParaRPr/>
           </a:p>
         </p:txBody>
       </p:sp>
@@ -29337,6 +29630,7 @@
           <a:lstStyle/>
           <a:p>
             <a:pPr algn="ctr"/>
+            <a:endParaRPr/>
           </a:p>
         </p:txBody>
       </p:sp>
@@ -29750,7 +30044,7 @@
 </file>
 
 <file path=ppt/slides/slide9.xml><?xml version="1.0" encoding="utf-8"?>
-<p:sld xmlns:a="http://schemas.openxmlformats.org/drawingml/2006/main" xmlns:p="http://schemas.openxmlformats.org/presentationml/2006/main" xmlns:r="http://schemas.openxmlformats.org/officeDocument/2006/relationships">
+<p:sld xmlns:a="http://schemas.openxmlformats.org/drawingml/2006/main" xmlns:r="http://schemas.openxmlformats.org/officeDocument/2006/relationships" xmlns:p="http://schemas.openxmlformats.org/presentationml/2006/main">
   <p:cSld>
     <p:bg>
       <p:bgPr>
@@ -29766,7 +30060,14 @@
         <p:cNvGrpSpPr/>
         <p:nvPr/>
       </p:nvGrpSpPr>
-      <p:grpSpPr/>
+      <p:grpSpPr>
+        <a:xfrm>
+          <a:off x="0" y="0"/>
+          <a:ext cx="0" cy="0"/>
+          <a:chOff x="0" y="0"/>
+          <a:chExt cx="0" cy="0"/>
+        </a:xfrm>
+      </p:grpSpPr>
       <p:sp>
         <p:nvSpPr>
           <p:cNvPr id="2" name="Rectangle 1"/>
@@ -29808,6 +30109,7 @@
           <a:lstStyle/>
           <a:p>
             <a:pPr algn="ctr"/>
+            <a:endParaRPr/>
           </a:p>
         </p:txBody>
       </p:sp>
@@ -30042,6 +30344,7 @@
           <a:lstStyle/>
           <a:p>
             <a:pPr algn="ctr"/>
+            <a:endParaRPr/>
           </a:p>
         </p:txBody>
       </p:sp>
@@ -30086,6 +30389,7 @@
           <a:lstStyle/>
           <a:p>
             <a:pPr algn="ctr"/>
+            <a:endParaRPr/>
           </a:p>
         </p:txBody>
       </p:sp>
@@ -30465,7 +30769,7 @@
 </file>
 
 <file path=ppt/theme/theme2.xml><?xml version="1.0" encoding="utf-8"?>
-<a:theme xmlns:a="http://schemas.openxmlformats.org/drawingml/2006/main" name="Office Theme">
+<a:theme xmlns:a="http://schemas.openxmlformats.org/drawingml/2006/main" name="Office 테마">
   <a:themeElements>
     <a:clrScheme name="Office">
       <a:dk1>
@@ -30475,44 +30779,44 @@
         <a:sysClr val="window" lastClr="FFFFFF"/>
       </a:lt1>
       <a:dk2>
-        <a:srgbClr val="1F497D"/>
+        <a:srgbClr val="0E2841"/>
       </a:dk2>
       <a:lt2>
-        <a:srgbClr val="EEECE1"/>
+        <a:srgbClr val="E8E8E8"/>
       </a:lt2>
       <a:accent1>
-        <a:srgbClr val="4F81BD"/>
+        <a:srgbClr val="156082"/>
       </a:accent1>
       <a:accent2>
-        <a:srgbClr val="C0504D"/>
+        <a:srgbClr val="E97132"/>
       </a:accent2>
       <a:accent3>
-        <a:srgbClr val="9BBB59"/>
+        <a:srgbClr val="196B24"/>
       </a:accent3>
       <a:accent4>
-        <a:srgbClr val="8064A2"/>
+        <a:srgbClr val="0F9ED5"/>
       </a:accent4>
       <a:accent5>
-        <a:srgbClr val="4BACC6"/>
+        <a:srgbClr val="A02B93"/>
       </a:accent5>
       <a:accent6>
-        <a:srgbClr val="F79646"/>
+        <a:srgbClr val="4EA72E"/>
       </a:accent6>
       <a:hlink>
-        <a:srgbClr val="0000FF"/>
+        <a:srgbClr val="467886"/>
       </a:hlink>
       <a:folHlink>
-        <a:srgbClr val="800080"/>
+        <a:srgbClr val="96607D"/>
       </a:folHlink>
     </a:clrScheme>
     <a:fontScheme name="Office">
       <a:majorFont>
-        <a:latin typeface="Calibri"/>
+        <a:latin typeface="맑은 고딕" panose="02110004020202020204"/>
         <a:ea typeface=""/>
         <a:cs typeface=""/>
-        <a:font script="Jpan" typeface="ＭＳ Ｐゴシック"/>
+        <a:font script="Jpan" typeface="游ゴシック Light"/>
         <a:font script="Hang" typeface="맑은 고딕"/>
-        <a:font script="Hans" typeface="宋体"/>
+        <a:font script="Hans" typeface="等线 Light"/>
         <a:font script="Hant" typeface="新細明體"/>
         <a:font script="Arab" typeface="Times New Roman"/>
         <a:font script="Hebr" typeface="Times New Roman"/>
@@ -30540,14 +30844,31 @@
         <a:font script="Viet" typeface="Times New Roman"/>
         <a:font script="Uigh" typeface="Microsoft Uighur"/>
         <a:font script="Geor" typeface="Sylfaen"/>
+        <a:font script="Armn" typeface="Arial"/>
+        <a:font script="Bugi" typeface="Leelawadee UI"/>
+        <a:font script="Bopo" typeface="Microsoft JhengHei"/>
+        <a:font script="Java" typeface="Javanese Text"/>
+        <a:font script="Lisu" typeface="Segoe UI"/>
+        <a:font script="Mymr" typeface="Myanmar Text"/>
+        <a:font script="Nkoo" typeface="Ebrima"/>
+        <a:font script="Olck" typeface="Nirmala UI"/>
+        <a:font script="Osma" typeface="Ebrima"/>
+        <a:font script="Phag" typeface="Phagspa"/>
+        <a:font script="Syrn" typeface="Estrangelo Edessa"/>
+        <a:font script="Syrj" typeface="Estrangelo Edessa"/>
+        <a:font script="Syre" typeface="Estrangelo Edessa"/>
+        <a:font script="Sora" typeface="Nirmala UI"/>
+        <a:font script="Tale" typeface="Microsoft Tai Le"/>
+        <a:font script="Talu" typeface="Microsoft New Tai Lue"/>
+        <a:font script="Tfng" typeface="Ebrima"/>
       </a:majorFont>
       <a:minorFont>
-        <a:latin typeface="Calibri"/>
+        <a:latin typeface="맑은 고딕" panose="02110004020202020204"/>
         <a:ea typeface=""/>
         <a:cs typeface=""/>
-        <a:font script="Jpan" typeface="ＭＳ Ｐゴシック"/>
+        <a:font script="Jpan" typeface="游ゴシック"/>
         <a:font script="Hang" typeface="맑은 고딕"/>
-        <a:font script="Hans" typeface="宋体"/>
+        <a:font script="Hans" typeface="等线"/>
         <a:font script="Hant" typeface="新細明體"/>
         <a:font script="Arab" typeface="Arial"/>
         <a:font script="Hebr" typeface="Arial"/>
@@ -30575,6 +30896,23 @@
         <a:font script="Viet" typeface="Arial"/>
         <a:font script="Uigh" typeface="Microsoft Uighur"/>
         <a:font script="Geor" typeface="Sylfaen"/>
+        <a:font script="Armn" typeface="Arial"/>
+        <a:font script="Bugi" typeface="Leelawadee UI"/>
+        <a:font script="Bopo" typeface="Microsoft JhengHei"/>
+        <a:font script="Java" typeface="Javanese Text"/>
+        <a:font script="Lisu" typeface="Segoe UI"/>
+        <a:font script="Mymr" typeface="Myanmar Text"/>
+        <a:font script="Nkoo" typeface="Ebrima"/>
+        <a:font script="Olck" typeface="Nirmala UI"/>
+        <a:font script="Osma" typeface="Ebrima"/>
+        <a:font script="Phag" typeface="Phagspa"/>
+        <a:font script="Syrn" typeface="Estrangelo Edessa"/>
+        <a:font script="Syrj" typeface="Estrangelo Edessa"/>
+        <a:font script="Syre" typeface="Estrangelo Edessa"/>
+        <a:font script="Sora" typeface="Nirmala UI"/>
+        <a:font script="Tale" typeface="Microsoft Tai Le"/>
+        <a:font script="Talu" typeface="Microsoft New Tai Lue"/>
+        <a:font script="Tfng" typeface="Ebrima"/>
       </a:minorFont>
     </a:fontScheme>
     <a:fmtScheme name="Office">
@@ -30586,180 +30924,136 @@
           <a:gsLst>
             <a:gs pos="0">
               <a:schemeClr val="phClr">
-                <a:tint val="50000"/>
-                <a:satMod val="300000"/>
+                <a:lumMod val="110000"/>
+                <a:satMod val="105000"/>
+                <a:tint val="67000"/>
               </a:schemeClr>
             </a:gs>
-            <a:gs pos="35000">
+            <a:gs pos="50000">
               <a:schemeClr val="phClr">
-                <a:tint val="37000"/>
-                <a:satMod val="300000"/>
+                <a:lumMod val="105000"/>
+                <a:satMod val="103000"/>
+                <a:tint val="73000"/>
               </a:schemeClr>
             </a:gs>
             <a:gs pos="100000">
               <a:schemeClr val="phClr">
-                <a:tint val="15000"/>
-                <a:satMod val="350000"/>
+                <a:lumMod val="105000"/>
+                <a:satMod val="109000"/>
+                <a:tint val="81000"/>
               </a:schemeClr>
             </a:gs>
           </a:gsLst>
-          <a:lin ang="16200000" scaled="1"/>
+          <a:lin ang="5400000" scaled="0"/>
         </a:gradFill>
         <a:gradFill rotWithShape="1">
           <a:gsLst>
             <a:gs pos="0">
               <a:schemeClr val="phClr">
-                <a:tint val="100000"/>
+                <a:satMod val="103000"/>
+                <a:lumMod val="102000"/>
+                <a:tint val="94000"/>
+              </a:schemeClr>
+            </a:gs>
+            <a:gs pos="50000">
+              <a:schemeClr val="phClr">
+                <a:satMod val="110000"/>
+                <a:lumMod val="100000"/>
                 <a:shade val="100000"/>
-                <a:satMod val="130000"/>
               </a:schemeClr>
             </a:gs>
             <a:gs pos="100000">
               <a:schemeClr val="phClr">
-                <a:tint val="50000"/>
-                <a:shade val="100000"/>
-                <a:satMod val="350000"/>
+                <a:lumMod val="99000"/>
+                <a:satMod val="120000"/>
+                <a:shade val="78000"/>
               </a:schemeClr>
             </a:gs>
           </a:gsLst>
-          <a:lin ang="16200000" scaled="0"/>
+          <a:lin ang="5400000" scaled="0"/>
         </a:gradFill>
       </a:fillStyleLst>
       <a:lnStyleLst>
-        <a:ln w="9525" cap="flat" cmpd="sng" algn="ctr">
+        <a:ln w="12700" cap="flat" cmpd="sng" algn="ctr">
           <a:solidFill>
-            <a:schemeClr val="phClr">
-              <a:shade val="95000"/>
-              <a:satMod val="105000"/>
-            </a:schemeClr>
+            <a:schemeClr val="phClr"/>
           </a:solidFill>
           <a:prstDash val="solid"/>
+          <a:miter lim="800000"/>
+        </a:ln>
+        <a:ln w="19050" cap="flat" cmpd="sng" algn="ctr">
+          <a:solidFill>
+            <a:schemeClr val="phClr"/>
+          </a:solidFill>
+          <a:prstDash val="solid"/>
+          <a:miter lim="800000"/>
         </a:ln>
         <a:ln w="25400" cap="flat" cmpd="sng" algn="ctr">
           <a:solidFill>
             <a:schemeClr val="phClr"/>
           </a:solidFill>
           <a:prstDash val="solid"/>
-        </a:ln>
-        <a:ln w="38100" cap="flat" cmpd="sng" algn="ctr">
-          <a:solidFill>
-            <a:schemeClr val="phClr"/>
-          </a:solidFill>
-          <a:prstDash val="solid"/>
+          <a:miter lim="800000"/>
         </a:ln>
       </a:lnStyleLst>
       <a:effectStyleLst>
         <a:effectStyle>
+          <a:effectLst/>
+        </a:effectStyle>
+        <a:effectStyle>
+          <a:effectLst/>
+        </a:effectStyle>
+        <a:effectStyle>
           <a:effectLst>
-            <a:outerShdw blurRad="40000" dist="20000" dir="5400000" rotWithShape="0">
+            <a:outerShdw blurRad="57150" dist="19050" dir="5400000" algn="ctr" rotWithShape="0">
               <a:srgbClr val="000000">
-                <a:alpha val="38000"/>
+                <a:alpha val="63000"/>
               </a:srgbClr>
             </a:outerShdw>
           </a:effectLst>
-        </a:effectStyle>
-        <a:effectStyle>
-          <a:effectLst>
-            <a:outerShdw blurRad="40000" dist="23000" dir="5400000" rotWithShape="0">
-              <a:srgbClr val="000000">
-                <a:alpha val="35000"/>
-              </a:srgbClr>
-            </a:outerShdw>
-          </a:effectLst>
-        </a:effectStyle>
-        <a:effectStyle>
-          <a:effectLst>
-            <a:outerShdw blurRad="40000" dist="23000" dir="5400000" rotWithShape="0">
-              <a:srgbClr val="000000">
-                <a:alpha val="35000"/>
-              </a:srgbClr>
-            </a:outerShdw>
-          </a:effectLst>
-          <a:scene3d>
-            <a:camera prst="orthographicFront">
-              <a:rot lat="0" lon="0" rev="0"/>
-            </a:camera>
-            <a:lightRig rig="threePt" dir="t">
-              <a:rot lat="0" lon="0" rev="1200000"/>
-            </a:lightRig>
-          </a:scene3d>
-          <a:sp3d>
-            <a:bevelT w="63500" h="25400"/>
-          </a:sp3d>
         </a:effectStyle>
       </a:effectStyleLst>
       <a:bgFillStyleLst>
         <a:solidFill>
           <a:schemeClr val="phClr"/>
         </a:solidFill>
+        <a:solidFill>
+          <a:schemeClr val="phClr">
+            <a:tint val="95000"/>
+            <a:satMod val="170000"/>
+          </a:schemeClr>
+        </a:solidFill>
         <a:gradFill rotWithShape="1">
           <a:gsLst>
             <a:gs pos="0">
               <a:schemeClr val="phClr">
-                <a:tint val="40000"/>
-                <a:satMod val="350000"/>
+                <a:tint val="93000"/>
+                <a:satMod val="150000"/>
+                <a:shade val="98000"/>
+                <a:lumMod val="102000"/>
               </a:schemeClr>
             </a:gs>
-            <a:gs pos="40000">
+            <a:gs pos="50000">
               <a:schemeClr val="phClr">
-                <a:tint val="45000"/>
-                <a:shade val="99000"/>
-                <a:satMod val="350000"/>
+                <a:tint val="98000"/>
+                <a:satMod val="130000"/>
+                <a:shade val="90000"/>
+                <a:lumMod val="103000"/>
               </a:schemeClr>
             </a:gs>
             <a:gs pos="100000">
               <a:schemeClr val="phClr">
-                <a:shade val="20000"/>
-                <a:satMod val="255000"/>
+                <a:shade val="63000"/>
+                <a:satMod val="120000"/>
               </a:schemeClr>
             </a:gs>
           </a:gsLst>
-          <a:path path="circle">
-            <a:fillToRect l="50000" t="-80000" r="50000" b="180000"/>
-          </a:path>
-        </a:gradFill>
-        <a:gradFill rotWithShape="1">
-          <a:gsLst>
-            <a:gs pos="0">
-              <a:schemeClr val="phClr">
-                <a:tint val="80000"/>
-                <a:satMod val="300000"/>
-              </a:schemeClr>
-            </a:gs>
-            <a:gs pos="100000">
-              <a:schemeClr val="phClr">
-                <a:shade val="30000"/>
-                <a:satMod val="200000"/>
-              </a:schemeClr>
-            </a:gs>
-          </a:gsLst>
-          <a:path path="circle">
-            <a:fillToRect l="50000" t="50000" r="50000" b="50000"/>
-          </a:path>
+          <a:lin ang="5400000" scaled="0"/>
         </a:gradFill>
       </a:bgFillStyleLst>
     </a:fmtScheme>
   </a:themeElements>
   <a:objectDefaults>
-    <a:spDef>
-      <a:spPr/>
-      <a:bodyPr/>
-      <a:lstStyle/>
-      <a:style>
-        <a:lnRef idx="1">
-          <a:schemeClr val="accent1"/>
-        </a:lnRef>
-        <a:fillRef idx="3">
-          <a:schemeClr val="accent1"/>
-        </a:fillRef>
-        <a:effectRef idx="2">
-          <a:schemeClr val="accent1"/>
-        </a:effectRef>
-        <a:fontRef idx="minor">
-          <a:schemeClr val="lt1"/>
-        </a:fontRef>
-      </a:style>
-    </a:spDef>
     <a:lnDef>
       <a:spPr/>
       <a:bodyPr/>
@@ -30781,5 +31075,10 @@
     </a:lnDef>
   </a:objectDefaults>
   <a:extraClrSchemeLst/>
+  <a:extLst>
+    <a:ext uri="{05A4C25C-085E-4340-85A3-A5531E510DB2}">
+      <thm15:themeFamily xmlns:thm15="http://schemas.microsoft.com/office/thememl/2012/main" name="Office Theme" id="{2E142A2C-CD16-42D6-873A-C26D2A0506FA}" vid="{1BDDFF52-6CD6-40A5-AB3C-68EB2F1E4D0A}"/>
+    </a:ext>
+  </a:extLst>
 </a:theme>
 </file>